--- a/组会汇报_2026-09-26/组会汇报_三维动态预警升级版.pptx
+++ b/组会汇报_2026-09-26/组会汇报_三维动态预警升级版.pptx
@@ -7509,8 +7509,8 @@
         </p:nvSpPr>
         <p:spPr>
           <a:xfrm>
-            <a:off x="758952" y="3502152"/>
-            <a:ext cx="10515600" cy="1280160"/>
+            <a:off x="758952" y="3364992"/>
+            <a:ext cx="10652760" cy="1143000"/>
           </a:xfrm>
           <a:prstGeom prst="rect">
             <a:avLst/>
@@ -7527,7 +7527,7 @@
               <a:spcAft>
                 <a:spcPts val="1000"/>
               </a:spcAft>
-              <a:defRPr sz="2200" b="0">
+              <a:defRPr sz="1800" b="0">
                 <a:solidFill>
                   <a:srgbClr val="162A41"/>
                 </a:solidFill>
@@ -7535,7 +7535,7 @@
               </a:defRPr>
             </a:pPr>
             <a:r>
-              <a:t>检验下一年问卷使用率下降：12 条技术年度记录。</a:t>
+              <a:t>使用率检验：12 条＝Kotlin、Ruby 各 3 条；Express、Flask、jQuery 各 2 条。</a:t>
             </a:r>
           </a:p>
           <a:p>
@@ -7543,7 +7543,7 @@
               <a:spcAft>
                 <a:spcPts val="1000"/>
               </a:spcAft>
-              <a:defRPr sz="2200" b="0">
+              <a:defRPr sz="1800" b="0">
                 <a:solidFill>
                   <a:srgbClr val="162A41"/>
                 </a:solidFill>
@@ -7551,7 +7551,7 @@
               </a:defRPr>
             </a:pPr>
             <a:r>
-              <a:t>检验下一年主仓评论量下降：17 条技术年度记录。</a:t>
+              <a:t>评论量检验：17 条＝Kotlin、Ruby 各 4 条；Express、Flask、jQuery 各 3 条。</a:t>
             </a:r>
           </a:p>
         </p:txBody>
@@ -7564,8 +7564,8 @@
         </p:nvSpPr>
         <p:spPr>
           <a:xfrm>
-            <a:off x="758952" y="5349240"/>
-            <a:ext cx="10515600" cy="612648"/>
+            <a:off x="758952" y="4672584"/>
+            <a:ext cx="10652760" cy="594360"/>
           </a:xfrm>
           <a:prstGeom prst="rect">
             <a:avLst/>
@@ -7582,7 +7582,46 @@
               <a:spcAft>
                 <a:spcPts val="1000"/>
               </a:spcAft>
-              <a:defRPr sz="1900" b="0">
+              <a:defRPr sz="1700" b="0">
+                <a:solidFill>
+                  <a:srgbClr val="007E80"/>
+                </a:solidFill>
+                <a:latin typeface="Microsoft YaHei"/>
+              </a:defRPr>
+            </a:pPr>
+            <a:r>
+              <a:t>评论量多 5 条：这 5 项技术的 2022 年记录可核对 2023 年评论，缺少对应问卷。</a:t>
+            </a:r>
+          </a:p>
+        </p:txBody>
+      </p:sp>
+      <p:sp>
+        <p:nvSpPr>
+          <p:cNvPr id="9" name="TextBox 8"/>
+          <p:cNvSpPr txBox="1"/>
+          <p:nvPr/>
+        </p:nvSpPr>
+        <p:spPr>
+          <a:xfrm>
+            <a:off x="758952" y="5504688"/>
+            <a:ext cx="10515600" cy="502920"/>
+          </a:xfrm>
+          <a:prstGeom prst="rect">
+            <a:avLst/>
+          </a:prstGeom>
+          <a:noFill/>
+        </p:spPr>
+        <p:txBody>
+          <a:bodyPr wrap="square" lIns="18288" rIns="18288" tIns="9144" bIns="9144">
+            <a:spAutoFit/>
+          </a:bodyPr>
+          <a:lstStyle/>
+          <a:p>
+            <a:pPr>
+              <a:spcAft>
+                <a:spcPts val="1000"/>
+              </a:spcAft>
+              <a:defRPr sz="1800" b="0">
                 <a:solidFill>
                   <a:srgbClr val="C36623"/>
                 </a:solidFill>
@@ -7590,7 +7629,7 @@
               </a:defRPr>
             </a:pPr>
             <a:r>
-              <a:t>技术年度记录不是个人；样本少，下面的百分比只作探索性比较。</a:t>
+              <a:t>一项技术每个可检验年份算一条；样本少，百分比只作探索性比较。</a:t>
             </a:r>
           </a:p>
         </p:txBody>
@@ -8234,7 +8273,7 @@
               </a:defRPr>
             </a:pPr>
             <a:r>
-              <a:t>五项技术、12 条可比记录；四种规则在完全相同的样本上测试</a:t>
+              <a:t>五项技术、12 条可比记录；每行满足：命中＋误报＋漏报＋正确未报＝12</a:t>
             </a:r>
           </a:p>
         </p:txBody>
@@ -8288,7 +8327,7 @@
         </p:nvGraphicFramePr>
         <p:xfrm>
           <a:off x="566928" y="1408176"/>
-          <a:ext cx="10744200" cy="3246120"/>
+          <a:ext cx="10652760" cy="3246120"/>
         </p:xfrm>
         <a:graphic>
           <a:graphicData uri="http://schemas.openxmlformats.org/drawingml/2006/table">
@@ -8297,13 +8336,14 @@
                 <a:tableStyleId>{5C22544A-7EE6-4342-B048-85BDC9FD1C3A}</a:tableStyleId>
               </a:tblPr>
               <a:tblGrid>
-                <a:gridCol w="2331720"/>
-                <a:gridCol w="1143000"/>
-                <a:gridCol w="1143000"/>
-                <a:gridCol w="1143000"/>
-                <a:gridCol w="1143000"/>
-                <a:gridCol w="1920240"/>
-                <a:gridCol w="1920240"/>
+                <a:gridCol w="2148840"/>
+                <a:gridCol w="914400"/>
+                <a:gridCol w="914400"/>
+                <a:gridCol w="914400"/>
+                <a:gridCol w="914400"/>
+                <a:gridCol w="1463040"/>
+                <a:gridCol w="1691640"/>
+                <a:gridCol w="1691640"/>
               </a:tblGrid>
               <a:tr h="649224">
                 <a:tc>
@@ -8312,7 +8352,7 @@
                     <a:lstStyle/>
                     <a:p>
                       <a:pPr>
-                        <a:defRPr sz="1600" b="1">
+                        <a:defRPr sz="1500" b="1">
                           <a:solidFill>
                             <a:srgbClr val="FFFFFF"/>
                           </a:solidFill>
@@ -8336,7 +8376,7 @@
                     <a:lstStyle/>
                     <a:p>
                       <a:pPr>
-                        <a:defRPr sz="1600" b="1">
+                        <a:defRPr sz="1500" b="1">
                           <a:solidFill>
                             <a:srgbClr val="FFFFFF"/>
                           </a:solidFill>
@@ -8360,7 +8400,7 @@
                     <a:lstStyle/>
                     <a:p>
                       <a:pPr>
-                        <a:defRPr sz="1600" b="1">
+                        <a:defRPr sz="1500" b="1">
                           <a:solidFill>
                             <a:srgbClr val="FFFFFF"/>
                           </a:solidFill>
@@ -8384,7 +8424,7 @@
                     <a:lstStyle/>
                     <a:p>
                       <a:pPr>
-                        <a:defRPr sz="1600" b="1">
+                        <a:defRPr sz="1500" b="1">
                           <a:solidFill>
                             <a:srgbClr val="FFFFFF"/>
                           </a:solidFill>
@@ -8408,7 +8448,7 @@
                     <a:lstStyle/>
                     <a:p>
                       <a:pPr>
-                        <a:defRPr sz="1600" b="1">
+                        <a:defRPr sz="1500" b="1">
                           <a:solidFill>
                             <a:srgbClr val="FFFFFF"/>
                           </a:solidFill>
@@ -8432,7 +8472,7 @@
                     <a:lstStyle/>
                     <a:p>
                       <a:pPr>
-                        <a:defRPr sz="1600" b="1">
+                        <a:defRPr sz="1500" b="1">
                           <a:solidFill>
                             <a:srgbClr val="FFFFFF"/>
                           </a:solidFill>
@@ -8440,6 +8480,30 @@
                         </a:defRPr>
                       </a:pPr>
                       <a:r>
+                        <a:t>正确未报</a:t>
+                      </a:r>
+                    </a:p>
+                  </a:txBody>
+                  <a:tcPr>
+                    <a:solidFill>
+                      <a:srgbClr val="162A41"/>
+                    </a:solidFill>
+                  </a:tcPr>
+                </a:tc>
+                <a:tc>
+                  <a:txBody>
+                    <a:bodyPr/>
+                    <a:lstStyle/>
+                    <a:p>
+                      <a:pPr>
+                        <a:defRPr sz="1500" b="1">
+                          <a:solidFill>
+                            <a:srgbClr val="FFFFFF"/>
+                          </a:solidFill>
+                          <a:latin typeface="Microsoft YaHei"/>
+                        </a:defRPr>
+                      </a:pPr>
+                      <a:r>
                         <a:t>命中率</a:t>
                       </a:r>
                     </a:p>
@@ -8456,7 +8520,7 @@
                     <a:lstStyle/>
                     <a:p>
                       <a:pPr>
-                        <a:defRPr sz="1600" b="1">
+                        <a:defRPr sz="1500" b="1">
                           <a:solidFill>
                             <a:srgbClr val="FFFFFF"/>
                           </a:solidFill>
@@ -8482,7 +8546,7 @@
                     <a:lstStyle/>
                     <a:p>
                       <a:pPr>
-                        <a:defRPr sz="1600" b="0">
+                        <a:defRPr sz="1500" b="0">
                           <a:solidFill>
                             <a:srgbClr val="162A41"/>
                           </a:solidFill>
@@ -8506,7 +8570,7 @@
                     <a:lstStyle/>
                     <a:p>
                       <a:pPr>
-                        <a:defRPr sz="1600" b="0">
+                        <a:defRPr sz="1500" b="0">
                           <a:solidFill>
                             <a:srgbClr val="162A41"/>
                           </a:solidFill>
@@ -8530,7 +8594,7 @@
                     <a:lstStyle/>
                     <a:p>
                       <a:pPr>
-                        <a:defRPr sz="1600" b="0">
+                        <a:defRPr sz="1500" b="0">
                           <a:solidFill>
                             <a:srgbClr val="162A41"/>
                           </a:solidFill>
@@ -8554,7 +8618,7 @@
                     <a:lstStyle/>
                     <a:p>
                       <a:pPr>
-                        <a:defRPr sz="1600" b="0">
+                        <a:defRPr sz="1500" b="0">
                           <a:solidFill>
                             <a:srgbClr val="162A41"/>
                           </a:solidFill>
@@ -8578,7 +8642,7 @@
                     <a:lstStyle/>
                     <a:p>
                       <a:pPr>
-                        <a:defRPr sz="1600" b="0">
+                        <a:defRPr sz="1500" b="0">
                           <a:solidFill>
                             <a:srgbClr val="162A41"/>
                           </a:solidFill>
@@ -8602,7 +8666,31 @@
                     <a:lstStyle/>
                     <a:p>
                       <a:pPr>
-                        <a:defRPr sz="1600" b="0">
+                        <a:defRPr sz="1500" b="0">
+                          <a:solidFill>
+                            <a:srgbClr val="162A41"/>
+                          </a:solidFill>
+                          <a:latin typeface="Microsoft YaHei"/>
+                        </a:defRPr>
+                      </a:pPr>
+                      <a:r>
+                        <a:t>4</a:t>
+                      </a:r>
+                    </a:p>
+                  </a:txBody>
+                  <a:tcPr>
+                    <a:solidFill>
+                      <a:srgbClr val="EAF1F3"/>
+                    </a:solidFill>
+                  </a:tcPr>
+                </a:tc>
+                <a:tc>
+                  <a:txBody>
+                    <a:bodyPr/>
+                    <a:lstStyle/>
+                    <a:p>
+                      <a:pPr>
+                        <a:defRPr sz="1500" b="0">
                           <a:solidFill>
                             <a:srgbClr val="162A41"/>
                           </a:solidFill>
@@ -8626,7 +8714,7 @@
                     <a:lstStyle/>
                     <a:p>
                       <a:pPr>
-                        <a:defRPr sz="1600" b="0">
+                        <a:defRPr sz="1500" b="0">
                           <a:solidFill>
                             <a:srgbClr val="162A41"/>
                           </a:solidFill>
@@ -8652,7 +8740,7 @@
                     <a:lstStyle/>
                     <a:p>
                       <a:pPr>
-                        <a:defRPr sz="1600" b="0">
+                        <a:defRPr sz="1500" b="0">
                           <a:solidFill>
                             <a:srgbClr val="162A41"/>
                           </a:solidFill>
@@ -8676,7 +8764,7 @@
                     <a:lstStyle/>
                     <a:p>
                       <a:pPr>
-                        <a:defRPr sz="1600" b="0">
+                        <a:defRPr sz="1500" b="0">
                           <a:solidFill>
                             <a:srgbClr val="162A41"/>
                           </a:solidFill>
@@ -8700,7 +8788,7 @@
                     <a:lstStyle/>
                     <a:p>
                       <a:pPr>
-                        <a:defRPr sz="1600" b="0">
+                        <a:defRPr sz="1500" b="0">
                           <a:solidFill>
                             <a:srgbClr val="162A41"/>
                           </a:solidFill>
@@ -8724,7 +8812,7 @@
                     <a:lstStyle/>
                     <a:p>
                       <a:pPr>
-                        <a:defRPr sz="1600" b="0">
+                        <a:defRPr sz="1500" b="0">
                           <a:solidFill>
                             <a:srgbClr val="162A41"/>
                           </a:solidFill>
@@ -8748,7 +8836,7 @@
                     <a:lstStyle/>
                     <a:p>
                       <a:pPr>
-                        <a:defRPr sz="1600" b="0">
+                        <a:defRPr sz="1500" b="0">
                           <a:solidFill>
                             <a:srgbClr val="162A41"/>
                           </a:solidFill>
@@ -8772,7 +8860,31 @@
                     <a:lstStyle/>
                     <a:p>
                       <a:pPr>
-                        <a:defRPr sz="1600" b="0">
+                        <a:defRPr sz="1500" b="0">
+                          <a:solidFill>
+                            <a:srgbClr val="162A41"/>
+                          </a:solidFill>
+                          <a:latin typeface="Microsoft YaHei"/>
+                        </a:defRPr>
+                      </a:pPr>
+                      <a:r>
+                        <a:t>3</a:t>
+                      </a:r>
+                    </a:p>
+                  </a:txBody>
+                  <a:tcPr>
+                    <a:solidFill>
+                      <a:srgbClr val="F8FAFB"/>
+                    </a:solidFill>
+                  </a:tcPr>
+                </a:tc>
+                <a:tc>
+                  <a:txBody>
+                    <a:bodyPr/>
+                    <a:lstStyle/>
+                    <a:p>
+                      <a:pPr>
+                        <a:defRPr sz="1500" b="0">
                           <a:solidFill>
                             <a:srgbClr val="162A41"/>
                           </a:solidFill>
@@ -8796,7 +8908,7 @@
                     <a:lstStyle/>
                     <a:p>
                       <a:pPr>
-                        <a:defRPr sz="1600" b="0">
+                        <a:defRPr sz="1500" b="0">
                           <a:solidFill>
                             <a:srgbClr val="162A41"/>
                           </a:solidFill>
@@ -8822,7 +8934,7 @@
                     <a:lstStyle/>
                     <a:p>
                       <a:pPr>
-                        <a:defRPr sz="1600" b="0">
+                        <a:defRPr sz="1500" b="0">
                           <a:solidFill>
                             <a:srgbClr val="162A41"/>
                           </a:solidFill>
@@ -8846,7 +8958,7 @@
                     <a:lstStyle/>
                     <a:p>
                       <a:pPr>
-                        <a:defRPr sz="1600" b="0">
+                        <a:defRPr sz="1500" b="0">
                           <a:solidFill>
                             <a:srgbClr val="162A41"/>
                           </a:solidFill>
@@ -8870,7 +8982,7 @@
                     <a:lstStyle/>
                     <a:p>
                       <a:pPr>
-                        <a:defRPr sz="1600" b="0">
+                        <a:defRPr sz="1500" b="0">
                           <a:solidFill>
                             <a:srgbClr val="162A41"/>
                           </a:solidFill>
@@ -8894,7 +9006,7 @@
                     <a:lstStyle/>
                     <a:p>
                       <a:pPr>
-                        <a:defRPr sz="1600" b="0">
+                        <a:defRPr sz="1500" b="0">
                           <a:solidFill>
                             <a:srgbClr val="162A41"/>
                           </a:solidFill>
@@ -8918,7 +9030,7 @@
                     <a:lstStyle/>
                     <a:p>
                       <a:pPr>
-                        <a:defRPr sz="1600" b="0">
+                        <a:defRPr sz="1500" b="0">
                           <a:solidFill>
                             <a:srgbClr val="162A41"/>
                           </a:solidFill>
@@ -8942,7 +9054,31 @@
                     <a:lstStyle/>
                     <a:p>
                       <a:pPr>
-                        <a:defRPr sz="1600" b="0">
+                        <a:defRPr sz="1500" b="0">
+                          <a:solidFill>
+                            <a:srgbClr val="162A41"/>
+                          </a:solidFill>
+                          <a:latin typeface="Microsoft YaHei"/>
+                        </a:defRPr>
+                      </a:pPr>
+                      <a:r>
+                        <a:t>5</a:t>
+                      </a:r>
+                    </a:p>
+                  </a:txBody>
+                  <a:tcPr>
+                    <a:solidFill>
+                      <a:srgbClr val="EAF1F3"/>
+                    </a:solidFill>
+                  </a:tcPr>
+                </a:tc>
+                <a:tc>
+                  <a:txBody>
+                    <a:bodyPr/>
+                    <a:lstStyle/>
+                    <a:p>
+                      <a:pPr>
+                        <a:defRPr sz="1500" b="0">
                           <a:solidFill>
                             <a:srgbClr val="162A41"/>
                           </a:solidFill>
@@ -8966,7 +9102,7 @@
                     <a:lstStyle/>
                     <a:p>
                       <a:pPr>
-                        <a:defRPr sz="1600" b="0">
+                        <a:defRPr sz="1500" b="0">
                           <a:solidFill>
                             <a:srgbClr val="162A41"/>
                           </a:solidFill>
@@ -8992,7 +9128,7 @@
                     <a:lstStyle/>
                     <a:p>
                       <a:pPr>
-                        <a:defRPr sz="1600" b="0">
+                        <a:defRPr sz="1500" b="0">
                           <a:solidFill>
                             <a:srgbClr val="162A41"/>
                           </a:solidFill>
@@ -9016,7 +9152,7 @@
                     <a:lstStyle/>
                     <a:p>
                       <a:pPr>
-                        <a:defRPr sz="1600" b="0">
+                        <a:defRPr sz="1500" b="0">
                           <a:solidFill>
                             <a:srgbClr val="162A41"/>
                           </a:solidFill>
@@ -9040,7 +9176,7 @@
                     <a:lstStyle/>
                     <a:p>
                       <a:pPr>
-                        <a:defRPr sz="1600" b="0">
+                        <a:defRPr sz="1500" b="0">
                           <a:solidFill>
                             <a:srgbClr val="162A41"/>
                           </a:solidFill>
@@ -9064,7 +9200,7 @@
                     <a:lstStyle/>
                     <a:p>
                       <a:pPr>
-                        <a:defRPr sz="1600" b="0">
+                        <a:defRPr sz="1500" b="0">
                           <a:solidFill>
                             <a:srgbClr val="162A41"/>
                           </a:solidFill>
@@ -9088,7 +9224,7 @@
                     <a:lstStyle/>
                     <a:p>
                       <a:pPr>
-                        <a:defRPr sz="1600" b="0">
+                        <a:defRPr sz="1500" b="0">
                           <a:solidFill>
                             <a:srgbClr val="162A41"/>
                           </a:solidFill>
@@ -9112,7 +9248,31 @@
                     <a:lstStyle/>
                     <a:p>
                       <a:pPr>
-                        <a:defRPr sz="1600" b="0">
+                        <a:defRPr sz="1500" b="0">
+                          <a:solidFill>
+                            <a:srgbClr val="162A41"/>
+                          </a:solidFill>
+                          <a:latin typeface="Microsoft YaHei"/>
+                        </a:defRPr>
+                      </a:pPr>
+                      <a:r>
+                        <a:t>2</a:t>
+                      </a:r>
+                    </a:p>
+                  </a:txBody>
+                  <a:tcPr>
+                    <a:solidFill>
+                      <a:srgbClr val="F8FAFB"/>
+                    </a:solidFill>
+                  </a:tcPr>
+                </a:tc>
+                <a:tc>
+                  <a:txBody>
+                    <a:bodyPr/>
+                    <a:lstStyle/>
+                    <a:p>
+                      <a:pPr>
+                        <a:defRPr sz="1500" b="0">
                           <a:solidFill>
                             <a:srgbClr val="162A41"/>
                           </a:solidFill>
@@ -9136,7 +9296,7 @@
                     <a:lstStyle/>
                     <a:p>
                       <a:pPr>
-                        <a:defRPr sz="1600" b="0">
+                        <a:defRPr sz="1500" b="0">
                           <a:solidFill>
                             <a:srgbClr val="162A41"/>
                           </a:solidFill>
@@ -9591,7 +9751,7 @@
               </a:defRPr>
             </a:pPr>
             <a:r>
-              <a:t>五项技术、17 条可比记录；评论量是独立于问卷的结果变量</a:t>
+              <a:t>五项技术、17 条可比记录；每行满足：命中＋误报＋漏报＋正确未报＝17</a:t>
             </a:r>
           </a:p>
         </p:txBody>
@@ -9645,7 +9805,7 @@
         </p:nvGraphicFramePr>
         <p:xfrm>
           <a:off x="566928" y="1408176"/>
-          <a:ext cx="10744200" cy="3246120"/>
+          <a:ext cx="10652760" cy="3246120"/>
         </p:xfrm>
         <a:graphic>
           <a:graphicData uri="http://schemas.openxmlformats.org/drawingml/2006/table">
@@ -9654,13 +9814,14 @@
                 <a:tableStyleId>{5C22544A-7EE6-4342-B048-85BDC9FD1C3A}</a:tableStyleId>
               </a:tblPr>
               <a:tblGrid>
-                <a:gridCol w="2331720"/>
-                <a:gridCol w="1143000"/>
-                <a:gridCol w="1143000"/>
-                <a:gridCol w="1143000"/>
-                <a:gridCol w="1143000"/>
-                <a:gridCol w="1920240"/>
-                <a:gridCol w="1920240"/>
+                <a:gridCol w="2148840"/>
+                <a:gridCol w="914400"/>
+                <a:gridCol w="914400"/>
+                <a:gridCol w="914400"/>
+                <a:gridCol w="914400"/>
+                <a:gridCol w="1463040"/>
+                <a:gridCol w="1691640"/>
+                <a:gridCol w="1691640"/>
               </a:tblGrid>
               <a:tr h="649224">
                 <a:tc>
@@ -9669,7 +9830,7 @@
                     <a:lstStyle/>
                     <a:p>
                       <a:pPr>
-                        <a:defRPr sz="1600" b="1">
+                        <a:defRPr sz="1500" b="1">
                           <a:solidFill>
                             <a:srgbClr val="FFFFFF"/>
                           </a:solidFill>
@@ -9693,7 +9854,7 @@
                     <a:lstStyle/>
                     <a:p>
                       <a:pPr>
-                        <a:defRPr sz="1600" b="1">
+                        <a:defRPr sz="1500" b="1">
                           <a:solidFill>
                             <a:srgbClr val="FFFFFF"/>
                           </a:solidFill>
@@ -9717,7 +9878,7 @@
                     <a:lstStyle/>
                     <a:p>
                       <a:pPr>
-                        <a:defRPr sz="1600" b="1">
+                        <a:defRPr sz="1500" b="1">
                           <a:solidFill>
                             <a:srgbClr val="FFFFFF"/>
                           </a:solidFill>
@@ -9741,7 +9902,7 @@
                     <a:lstStyle/>
                     <a:p>
                       <a:pPr>
-                        <a:defRPr sz="1600" b="1">
+                        <a:defRPr sz="1500" b="1">
                           <a:solidFill>
                             <a:srgbClr val="FFFFFF"/>
                           </a:solidFill>
@@ -9765,7 +9926,7 @@
                     <a:lstStyle/>
                     <a:p>
                       <a:pPr>
-                        <a:defRPr sz="1600" b="1">
+                        <a:defRPr sz="1500" b="1">
                           <a:solidFill>
                             <a:srgbClr val="FFFFFF"/>
                           </a:solidFill>
@@ -9789,7 +9950,7 @@
                     <a:lstStyle/>
                     <a:p>
                       <a:pPr>
-                        <a:defRPr sz="1600" b="1">
+                        <a:defRPr sz="1500" b="1">
                           <a:solidFill>
                             <a:srgbClr val="FFFFFF"/>
                           </a:solidFill>
@@ -9797,6 +9958,30 @@
                         </a:defRPr>
                       </a:pPr>
                       <a:r>
+                        <a:t>正确未报</a:t>
+                      </a:r>
+                    </a:p>
+                  </a:txBody>
+                  <a:tcPr>
+                    <a:solidFill>
+                      <a:srgbClr val="162A41"/>
+                    </a:solidFill>
+                  </a:tcPr>
+                </a:tc>
+                <a:tc>
+                  <a:txBody>
+                    <a:bodyPr/>
+                    <a:lstStyle/>
+                    <a:p>
+                      <a:pPr>
+                        <a:defRPr sz="1500" b="1">
+                          <a:solidFill>
+                            <a:srgbClr val="FFFFFF"/>
+                          </a:solidFill>
+                          <a:latin typeface="Microsoft YaHei"/>
+                        </a:defRPr>
+                      </a:pPr>
+                      <a:r>
                         <a:t>命中率</a:t>
                       </a:r>
                     </a:p>
@@ -9813,7 +9998,7 @@
                     <a:lstStyle/>
                     <a:p>
                       <a:pPr>
-                        <a:defRPr sz="1600" b="1">
+                        <a:defRPr sz="1500" b="1">
                           <a:solidFill>
                             <a:srgbClr val="FFFFFF"/>
                           </a:solidFill>
@@ -9839,7 +10024,7 @@
                     <a:lstStyle/>
                     <a:p>
                       <a:pPr>
-                        <a:defRPr sz="1600" b="0">
+                        <a:defRPr sz="1500" b="0">
                           <a:solidFill>
                             <a:srgbClr val="162A41"/>
                           </a:solidFill>
@@ -9863,7 +10048,7 @@
                     <a:lstStyle/>
                     <a:p>
                       <a:pPr>
-                        <a:defRPr sz="1600" b="0">
+                        <a:defRPr sz="1500" b="0">
                           <a:solidFill>
                             <a:srgbClr val="162A41"/>
                           </a:solidFill>
@@ -9887,7 +10072,7 @@
                     <a:lstStyle/>
                     <a:p>
                       <a:pPr>
-                        <a:defRPr sz="1600" b="0">
+                        <a:defRPr sz="1500" b="0">
                           <a:solidFill>
                             <a:srgbClr val="162A41"/>
                           </a:solidFill>
@@ -9911,7 +10096,7 @@
                     <a:lstStyle/>
                     <a:p>
                       <a:pPr>
-                        <a:defRPr sz="1600" b="0">
+                        <a:defRPr sz="1500" b="0">
                           <a:solidFill>
                             <a:srgbClr val="162A41"/>
                           </a:solidFill>
@@ -9935,7 +10120,7 @@
                     <a:lstStyle/>
                     <a:p>
                       <a:pPr>
-                        <a:defRPr sz="1600" b="0">
+                        <a:defRPr sz="1500" b="0">
                           <a:solidFill>
                             <a:srgbClr val="162A41"/>
                           </a:solidFill>
@@ -9959,7 +10144,31 @@
                     <a:lstStyle/>
                     <a:p>
                       <a:pPr>
-                        <a:defRPr sz="1600" b="0">
+                        <a:defRPr sz="1500" b="0">
+                          <a:solidFill>
+                            <a:srgbClr val="162A41"/>
+                          </a:solidFill>
+                          <a:latin typeface="Microsoft YaHei"/>
+                        </a:defRPr>
+                      </a:pPr>
+                      <a:r>
+                        <a:t>4</a:t>
+                      </a:r>
+                    </a:p>
+                  </a:txBody>
+                  <a:tcPr>
+                    <a:solidFill>
+                      <a:srgbClr val="EAF1F3"/>
+                    </a:solidFill>
+                  </a:tcPr>
+                </a:tc>
+                <a:tc>
+                  <a:txBody>
+                    <a:bodyPr/>
+                    <a:lstStyle/>
+                    <a:p>
+                      <a:pPr>
+                        <a:defRPr sz="1500" b="0">
                           <a:solidFill>
                             <a:srgbClr val="162A41"/>
                           </a:solidFill>
@@ -9983,7 +10192,7 @@
                     <a:lstStyle/>
                     <a:p>
                       <a:pPr>
-                        <a:defRPr sz="1600" b="0">
+                        <a:defRPr sz="1500" b="0">
                           <a:solidFill>
                             <a:srgbClr val="162A41"/>
                           </a:solidFill>
@@ -10009,7 +10218,7 @@
                     <a:lstStyle/>
                     <a:p>
                       <a:pPr>
-                        <a:defRPr sz="1600" b="0">
+                        <a:defRPr sz="1500" b="0">
                           <a:solidFill>
                             <a:srgbClr val="162A41"/>
                           </a:solidFill>
@@ -10033,7 +10242,7 @@
                     <a:lstStyle/>
                     <a:p>
                       <a:pPr>
-                        <a:defRPr sz="1600" b="0">
+                        <a:defRPr sz="1500" b="0">
                           <a:solidFill>
                             <a:srgbClr val="162A41"/>
                           </a:solidFill>
@@ -10057,7 +10266,7 @@
                     <a:lstStyle/>
                     <a:p>
                       <a:pPr>
-                        <a:defRPr sz="1600" b="0">
+                        <a:defRPr sz="1500" b="0">
                           <a:solidFill>
                             <a:srgbClr val="162A41"/>
                           </a:solidFill>
@@ -10081,7 +10290,7 @@
                     <a:lstStyle/>
                     <a:p>
                       <a:pPr>
-                        <a:defRPr sz="1600" b="0">
+                        <a:defRPr sz="1500" b="0">
                           <a:solidFill>
                             <a:srgbClr val="162A41"/>
                           </a:solidFill>
@@ -10105,7 +10314,7 @@
                     <a:lstStyle/>
                     <a:p>
                       <a:pPr>
-                        <a:defRPr sz="1600" b="0">
+                        <a:defRPr sz="1500" b="0">
                           <a:solidFill>
                             <a:srgbClr val="162A41"/>
                           </a:solidFill>
@@ -10129,7 +10338,31 @@
                     <a:lstStyle/>
                     <a:p>
                       <a:pPr>
-                        <a:defRPr sz="1600" b="0">
+                        <a:defRPr sz="1500" b="0">
+                          <a:solidFill>
+                            <a:srgbClr val="162A41"/>
+                          </a:solidFill>
+                          <a:latin typeface="Microsoft YaHei"/>
+                        </a:defRPr>
+                      </a:pPr>
+                      <a:r>
+                        <a:t>5</a:t>
+                      </a:r>
+                    </a:p>
+                  </a:txBody>
+                  <a:tcPr>
+                    <a:solidFill>
+                      <a:srgbClr val="F8FAFB"/>
+                    </a:solidFill>
+                  </a:tcPr>
+                </a:tc>
+                <a:tc>
+                  <a:txBody>
+                    <a:bodyPr/>
+                    <a:lstStyle/>
+                    <a:p>
+                      <a:pPr>
+                        <a:defRPr sz="1500" b="0">
                           <a:solidFill>
                             <a:srgbClr val="162A41"/>
                           </a:solidFill>
@@ -10153,7 +10386,7 @@
                     <a:lstStyle/>
                     <a:p>
                       <a:pPr>
-                        <a:defRPr sz="1600" b="0">
+                        <a:defRPr sz="1500" b="0">
                           <a:solidFill>
                             <a:srgbClr val="162A41"/>
                           </a:solidFill>
@@ -10179,7 +10412,7 @@
                     <a:lstStyle/>
                     <a:p>
                       <a:pPr>
-                        <a:defRPr sz="1600" b="0">
+                        <a:defRPr sz="1500" b="0">
                           <a:solidFill>
                             <a:srgbClr val="162A41"/>
                           </a:solidFill>
@@ -10203,7 +10436,7 @@
                     <a:lstStyle/>
                     <a:p>
                       <a:pPr>
-                        <a:defRPr sz="1600" b="0">
+                        <a:defRPr sz="1500" b="0">
                           <a:solidFill>
                             <a:srgbClr val="162A41"/>
                           </a:solidFill>
@@ -10227,7 +10460,7 @@
                     <a:lstStyle/>
                     <a:p>
                       <a:pPr>
-                        <a:defRPr sz="1600" b="0">
+                        <a:defRPr sz="1500" b="0">
                           <a:solidFill>
                             <a:srgbClr val="162A41"/>
                           </a:solidFill>
@@ -10251,7 +10484,7 @@
                     <a:lstStyle/>
                     <a:p>
                       <a:pPr>
-                        <a:defRPr sz="1600" b="0">
+                        <a:defRPr sz="1500" b="0">
                           <a:solidFill>
                             <a:srgbClr val="162A41"/>
                           </a:solidFill>
@@ -10275,7 +10508,7 @@
                     <a:lstStyle/>
                     <a:p>
                       <a:pPr>
-                        <a:defRPr sz="1600" b="0">
+                        <a:defRPr sz="1500" b="0">
                           <a:solidFill>
                             <a:srgbClr val="162A41"/>
                           </a:solidFill>
@@ -10299,7 +10532,31 @@
                     <a:lstStyle/>
                     <a:p>
                       <a:pPr>
-                        <a:defRPr sz="1600" b="0">
+                        <a:defRPr sz="1500" b="0">
+                          <a:solidFill>
+                            <a:srgbClr val="162A41"/>
+                          </a:solidFill>
+                          <a:latin typeface="Microsoft YaHei"/>
+                        </a:defRPr>
+                      </a:pPr>
+                      <a:r>
+                        <a:t>6</a:t>
+                      </a:r>
+                    </a:p>
+                  </a:txBody>
+                  <a:tcPr>
+                    <a:solidFill>
+                      <a:srgbClr val="EAF1F3"/>
+                    </a:solidFill>
+                  </a:tcPr>
+                </a:tc>
+                <a:tc>
+                  <a:txBody>
+                    <a:bodyPr/>
+                    <a:lstStyle/>
+                    <a:p>
+                      <a:pPr>
+                        <a:defRPr sz="1500" b="0">
                           <a:solidFill>
                             <a:srgbClr val="162A41"/>
                           </a:solidFill>
@@ -10323,7 +10580,7 @@
                     <a:lstStyle/>
                     <a:p>
                       <a:pPr>
-                        <a:defRPr sz="1600" b="0">
+                        <a:defRPr sz="1500" b="0">
                           <a:solidFill>
                             <a:srgbClr val="162A41"/>
                           </a:solidFill>
@@ -10349,7 +10606,7 @@
                     <a:lstStyle/>
                     <a:p>
                       <a:pPr>
-                        <a:defRPr sz="1600" b="0">
+                        <a:defRPr sz="1500" b="0">
                           <a:solidFill>
                             <a:srgbClr val="162A41"/>
                           </a:solidFill>
@@ -10373,7 +10630,7 @@
                     <a:lstStyle/>
                     <a:p>
                       <a:pPr>
-                        <a:defRPr sz="1600" b="0">
+                        <a:defRPr sz="1500" b="0">
                           <a:solidFill>
                             <a:srgbClr val="162A41"/>
                           </a:solidFill>
@@ -10397,7 +10654,7 @@
                     <a:lstStyle/>
                     <a:p>
                       <a:pPr>
-                        <a:defRPr sz="1600" b="0">
+                        <a:defRPr sz="1500" b="0">
                           <a:solidFill>
                             <a:srgbClr val="162A41"/>
                           </a:solidFill>
@@ -10421,7 +10678,7 @@
                     <a:lstStyle/>
                     <a:p>
                       <a:pPr>
-                        <a:defRPr sz="1600" b="0">
+                        <a:defRPr sz="1500" b="0">
                           <a:solidFill>
                             <a:srgbClr val="162A41"/>
                           </a:solidFill>
@@ -10445,7 +10702,7 @@
                     <a:lstStyle/>
                     <a:p>
                       <a:pPr>
-                        <a:defRPr sz="1600" b="0">
+                        <a:defRPr sz="1500" b="0">
                           <a:solidFill>
                             <a:srgbClr val="162A41"/>
                           </a:solidFill>
@@ -10469,7 +10726,31 @@
                     <a:lstStyle/>
                     <a:p>
                       <a:pPr>
-                        <a:defRPr sz="1600" b="0">
+                        <a:defRPr sz="1500" b="0">
+                          <a:solidFill>
+                            <a:srgbClr val="162A41"/>
+                          </a:solidFill>
+                          <a:latin typeface="Microsoft YaHei"/>
+                        </a:defRPr>
+                      </a:pPr>
+                      <a:r>
+                        <a:t>3</a:t>
+                      </a:r>
+                    </a:p>
+                  </a:txBody>
+                  <a:tcPr>
+                    <a:solidFill>
+                      <a:srgbClr val="F8FAFB"/>
+                    </a:solidFill>
+                  </a:tcPr>
+                </a:tc>
+                <a:tc>
+                  <a:txBody>
+                    <a:bodyPr/>
+                    <a:lstStyle/>
+                    <a:p>
+                      <a:pPr>
+                        <a:defRPr sz="1500" b="0">
                           <a:solidFill>
                             <a:srgbClr val="162A41"/>
                           </a:solidFill>
@@ -10493,7 +10774,7 @@
                     <a:lstStyle/>
                     <a:p>
                       <a:pPr>
-                        <a:defRPr sz="1600" b="0">
+                        <a:defRPr sz="1500" b="0">
                           <a:solidFill>
                             <a:srgbClr val="162A41"/>
                           </a:solidFill>

--- a/组会汇报_2026-09-26/组会汇报_三维动态预警升级版.pptx
+++ b/组会汇报_2026-09-26/组会汇报_三维动态预警升级版.pptx
@@ -17,6 +17,7 @@
     <p:sldId id="265" r:id="rId16"/>
     <p:sldId id="266" r:id="rId17"/>
     <p:sldId id="267" r:id="rId18"/>
+    <p:sldId id="268" r:id="rId19"/>
   </p:sldIdLst>
   <p:sldSz cx="12191695" cy="6858000" type="screen4x3"/>
   <p:notesSz cx="6858000" cy="9144000"/>
@@ -116,168 +117,6 @@
     </a:lvl9pPr>
   </p:defaultTextStyle>
 </p:presentation>
-</file>
-
-<file path=ppt/charts/chart1.xml><?xml version="1.0" encoding="utf-8"?>
-<c:chartSpace xmlns:c="http://schemas.openxmlformats.org/drawingml/2006/chart" xmlns:a="http://schemas.openxmlformats.org/drawingml/2006/main" xmlns:r="http://schemas.openxmlformats.org/officeDocument/2006/relationships">
-  <c:date1904 val="0"/>
-  <c:chart>
-    <c:autoTitleDeleted val="0"/>
-    <c:plotArea>
-      <c:barChart>
-        <c:barDir val="col"/>
-        <c:grouping val="clustered"/>
-        <c:ser>
-          <c:idx val="0"/>
-          <c:order val="0"/>
-          <c:tx>
-            <c:strRef>
-              <c:f>Sheet1!$B$1</c:f>
-              <c:strCache>
-                <c:ptCount val="1"/>
-                <c:pt idx="0">
-                  <c:v>命中率</c:v>
-                </c:pt>
-              </c:strCache>
-            </c:strRef>
-          </c:tx>
-          <c:cat>
-            <c:strRef>
-              <c:f>Sheet1!$A$2:$A$3</c:f>
-              <c:strCache>
-                <c:ptCount val="2"/>
-                <c:pt idx="0">
-                  <c:v>旧问卷规则</c:v>
-                </c:pt>
-                <c:pt idx="1">
-                  <c:v>双源同时收缩</c:v>
-                </c:pt>
-              </c:strCache>
-            </c:strRef>
-          </c:cat>
-          <c:val>
-            <c:numRef>
-              <c:f>Sheet1!$B$2:$B$3</c:f>
-              <c:numCache>
-                <c:formatCode>General</c:formatCode>
-                <c:ptCount val="2"/>
-                <c:pt idx="0">
-                  <c:v>80.0</c:v>
-                </c:pt>
-                <c:pt idx="1">
-                  <c:v>100.0</c:v>
-                </c:pt>
-              </c:numCache>
-            </c:numRef>
-          </c:val>
-        </c:ser>
-        <c:ser>
-          <c:idx val="1"/>
-          <c:order val="1"/>
-          <c:tx>
-            <c:strRef>
-              <c:f>Sheet1!$C$1</c:f>
-              <c:strCache>
-                <c:ptCount val="1"/>
-                <c:pt idx="0">
-                  <c:v>找回率</c:v>
-                </c:pt>
-              </c:strCache>
-            </c:strRef>
-          </c:tx>
-          <c:cat>
-            <c:strRef>
-              <c:f>Sheet1!$A$2:$A$3</c:f>
-              <c:strCache>
-                <c:ptCount val="2"/>
-                <c:pt idx="0">
-                  <c:v>旧问卷规则</c:v>
-                </c:pt>
-                <c:pt idx="1">
-                  <c:v>双源同时收缩</c:v>
-                </c:pt>
-              </c:strCache>
-            </c:strRef>
-          </c:cat>
-          <c:val>
-            <c:numRef>
-              <c:f>Sheet1!$C$2:$C$3</c:f>
-              <c:numCache>
-                <c:formatCode>General</c:formatCode>
-                <c:ptCount val="2"/>
-                <c:pt idx="0">
-                  <c:v>57.1</c:v>
-                </c:pt>
-                <c:pt idx="1">
-                  <c:v>42.9</c:v>
-                </c:pt>
-              </c:numCache>
-            </c:numRef>
-          </c:val>
-        </c:ser>
-        <c:dLbls>
-          <c:numFmt formatCode="0.0&quot;%&quot;" sourceLinked="0"/>
-          <c:dLblPos val="outEnd"/>
-          <c:showLegendKey val="0"/>
-          <c:showVal val="1"/>
-          <c:showCatName val="0"/>
-          <c:showSerName val="0"/>
-          <c:showPercent val="0"/>
-          <c:showBubbleSize val="0"/>
-          <c:showLeaderLines val="1"/>
-        </c:dLbls>
-        <c:axId val="-2068027336"/>
-        <c:axId val="-2113994440"/>
-      </c:barChart>
-      <c:catAx>
-        <c:axId val="-2068027336"/>
-        <c:scaling>
-          <c:orientation val="minMax"/>
-        </c:scaling>
-        <c:delete val="0"/>
-        <c:axPos val="b"/>
-        <c:majorTickMark val="out"/>
-        <c:minorTickMark val="none"/>
-        <c:tickLblPos val="nextTo"/>
-        <c:crossAx val="-2113994440"/>
-        <c:crosses val="autoZero"/>
-        <c:auto val="1"/>
-        <c:lblAlgn val="ctr"/>
-        <c:lblOffset val="100"/>
-        <c:noMultiLvlLbl val="0"/>
-      </c:catAx>
-      <c:valAx>
-        <c:axId val="-2113994440"/>
-        <c:scaling>
-          <c:max val="100.0"/>
-          <c:min val="0.0"/>
-        </c:scaling>
-        <c:delete val="0"/>
-        <c:axPos val="l"/>
-        <c:majorGridlines/>
-        <c:majorTickMark val="out"/>
-        <c:minorTickMark val="none"/>
-        <c:tickLblPos val="nextTo"/>
-        <c:crossAx val="-2068027336"/>
-        <c:crosses val="autoZero"/>
-      </c:valAx>
-    </c:plotArea>
-    <c:dispBlanksAs val="gap"/>
-  </c:chart>
-  <c:txPr>
-    <a:bodyPr/>
-    <a:lstStyle/>
-    <a:p>
-      <a:pPr>
-        <a:defRPr sz="1800"/>
-      </a:pPr>
-      <a:endParaRPr lang="en-US"/>
-    </a:p>
-  </c:txPr>
-  <c:externalData r:id="rId1">
-    <c:autoUpdate val="0"/>
-  </c:externalData>
-</c:chartSpace>
 </file>
 
 <file path=ppt/slideLayouts/slideLayout1.xml><?xml version="1.0" encoding="utf-8"?>
@@ -3342,7 +3181,7 @@
               </a:defRPr>
             </a:pPr>
             <a:r>
-              <a:t>加入 GitHub 评论活动后的规则与回测</a:t>
+              <a:t>扩大技术样本后的近期年度回测</a:t>
             </a:r>
           </a:p>
         </p:txBody>
@@ -3446,7 +3285,7 @@
               </a:defRPr>
             </a:pPr>
             <a:r>
-              <a:t>具体技术说明了信号冲突的价值</a:t>
+              <a:t>当前可用的核查清单</a:t>
             </a:r>
           </a:p>
         </p:txBody>
@@ -3485,7 +3324,7 @@
               </a:defRPr>
             </a:pPr>
             <a:r>
-              <a:t>表中后续评论数只用于事后检验，没有进入当年的预警</a:t>
+              <a:t>依据 2025 年完整问卷与主仓评论；2026 年结果尚未用于回测</a:t>
             </a:r>
           </a:p>
         </p:txBody>
@@ -3538,8 +3377,8 @@
           <p:nvPr/>
         </p:nvGraphicFramePr>
         <p:xfrm>
-          <a:off x="704088" y="1389888"/>
-          <a:ext cx="11155680" cy="3730752"/>
+          <a:off x="667512" y="1252728"/>
+          <a:ext cx="11247120" cy="4535424"/>
         </p:xfrm>
         <a:graphic>
           <a:graphicData uri="http://schemas.openxmlformats.org/drawingml/2006/table">
@@ -3548,13 +3387,13 @@
                 <a:tableStyleId>{5C22544A-7EE6-4342-B048-85BDC9FD1C3A}</a:tableStyleId>
               </a:tblPr>
               <a:tblGrid>
-                <a:gridCol w="2011680"/>
-                <a:gridCol w="3108960"/>
                 <a:gridCol w="2057400"/>
-                <a:gridCol w="2057400"/>
-                <a:gridCol w="1920240"/>
+                <a:gridCol w="1463040"/>
+                <a:gridCol w="1463040"/>
+                <a:gridCol w="4160520"/>
+                <a:gridCol w="2103120"/>
               </a:tblGrid>
-              <a:tr h="621792">
+              <a:tr h="566928">
                 <a:tc>
                   <a:txBody>
                     <a:bodyPr/>
@@ -3593,7 +3432,7 @@
                         </a:defRPr>
                       </a:pPr>
                       <a:r>
-                        <a:t>当年信号</a:t>
+                        <a:t>问卷</a:t>
                       </a:r>
                     </a:p>
                   </a:txBody>
@@ -3617,7 +3456,7 @@
                         </a:defRPr>
                       </a:pPr>
                       <a:r>
-                        <a:t>当年评论</a:t>
+                        <a:t>评论</a:t>
                       </a:r>
                     </a:p>
                   </a:txBody>
@@ -3641,7 +3480,7 @@
                         </a:defRPr>
                       </a:pPr>
                       <a:r>
-                        <a:t>后续评论</a:t>
+                        <a:t>输出</a:t>
                       </a:r>
                     </a:p>
                   </a:txBody>
@@ -3665,7 +3504,7 @@
                         </a:defRPr>
                       </a:pPr>
                       <a:r>
-                        <a:t>实际变化</a:t>
+                        <a:t>使用率</a:t>
                       </a:r>
                     </a:p>
                   </a:txBody>
@@ -3676,7 +3515,7 @@
                   </a:tcPr>
                 </a:tc>
               </a:tr>
-              <a:tr h="621792">
+              <a:tr h="566928">
                 <a:tc>
                   <a:txBody>
                     <a:bodyPr/>
@@ -3691,6 +3530,250 @@
                         </a:defRPr>
                       </a:pPr>
                       <a:r>
+                        <a:t>C#</a:t>
+                      </a:r>
+                    </a:p>
+                  </a:txBody>
+                  <a:tcPr>
+                    <a:solidFill>
+                      <a:srgbClr val="EAF1F3"/>
+                    </a:solidFill>
+                  </a:tcPr>
+                </a:tc>
+                <a:tc>
+                  <a:txBody>
+                    <a:bodyPr/>
+                    <a:lstStyle/>
+                    <a:p>
+                      <a:pPr>
+                        <a:defRPr sz="1600" b="0">
+                          <a:solidFill>
+                            <a:srgbClr val="162A41"/>
+                          </a:solidFill>
+                          <a:latin typeface="Microsoft YaHei"/>
+                        </a:defRPr>
+                      </a:pPr>
+                      <a:r>
+                        <a:t>警报</a:t>
+                      </a:r>
+                    </a:p>
+                  </a:txBody>
+                  <a:tcPr>
+                    <a:solidFill>
+                      <a:srgbClr val="EAF1F3"/>
+                    </a:solidFill>
+                  </a:tcPr>
+                </a:tc>
+                <a:tc>
+                  <a:txBody>
+                    <a:bodyPr/>
+                    <a:lstStyle/>
+                    <a:p>
+                      <a:pPr>
+                        <a:defRPr sz="1600" b="0">
+                          <a:solidFill>
+                            <a:srgbClr val="162A41"/>
+                          </a:solidFill>
+                          <a:latin typeface="Microsoft YaHei"/>
+                        </a:defRPr>
+                      </a:pPr>
+                      <a:r>
+                        <a:t>警报</a:t>
+                      </a:r>
+                    </a:p>
+                  </a:txBody>
+                  <a:tcPr>
+                    <a:solidFill>
+                      <a:srgbClr val="EAF1F3"/>
+                    </a:solidFill>
+                  </a:tcPr>
+                </a:tc>
+                <a:tc>
+                  <a:txBody>
+                    <a:bodyPr/>
+                    <a:lstStyle/>
+                    <a:p>
+                      <a:pPr>
+                        <a:defRPr sz="1600" b="0">
+                          <a:solidFill>
+                            <a:srgbClr val="162A41"/>
+                          </a:solidFill>
+                          <a:latin typeface="Microsoft YaHei"/>
+                        </a:defRPr>
+                      </a:pPr>
+                      <a:r>
+                        <a:t>双源收缩</a:t>
+                      </a:r>
+                    </a:p>
+                  </a:txBody>
+                  <a:tcPr>
+                    <a:solidFill>
+                      <a:srgbClr val="EAF1F3"/>
+                    </a:solidFill>
+                  </a:tcPr>
+                </a:tc>
+                <a:tc>
+                  <a:txBody>
+                    <a:bodyPr/>
+                    <a:lstStyle/>
+                    <a:p>
+                      <a:pPr>
+                        <a:defRPr sz="1600" b="0">
+                          <a:solidFill>
+                            <a:srgbClr val="162A41"/>
+                          </a:solidFill>
+                          <a:latin typeface="Microsoft YaHei"/>
+                        </a:defRPr>
+                      </a:pPr>
+                      <a:r>
+                        <a:t>27.9%</a:t>
+                      </a:r>
+                    </a:p>
+                  </a:txBody>
+                  <a:tcPr>
+                    <a:solidFill>
+                      <a:srgbClr val="EAF1F3"/>
+                    </a:solidFill>
+                  </a:tcPr>
+                </a:tc>
+              </a:tr>
+              <a:tr h="566928">
+                <a:tc>
+                  <a:txBody>
+                    <a:bodyPr/>
+                    <a:lstStyle/>
+                    <a:p>
+                      <a:pPr>
+                        <a:defRPr sz="1600" b="0">
+                          <a:solidFill>
+                            <a:srgbClr val="162A41"/>
+                          </a:solidFill>
+                          <a:latin typeface="Microsoft YaHei"/>
+                        </a:defRPr>
+                      </a:pPr>
+                      <a:r>
+                        <a:t>jQuery</a:t>
+                      </a:r>
+                    </a:p>
+                  </a:txBody>
+                  <a:tcPr>
+                    <a:solidFill>
+                      <a:srgbClr val="F8FAFB"/>
+                    </a:solidFill>
+                  </a:tcPr>
+                </a:tc>
+                <a:tc>
+                  <a:txBody>
+                    <a:bodyPr/>
+                    <a:lstStyle/>
+                    <a:p>
+                      <a:pPr>
+                        <a:defRPr sz="1600" b="0">
+                          <a:solidFill>
+                            <a:srgbClr val="162A41"/>
+                          </a:solidFill>
+                          <a:latin typeface="Microsoft YaHei"/>
+                        </a:defRPr>
+                      </a:pPr>
+                      <a:r>
+                        <a:t>警报</a:t>
+                      </a:r>
+                    </a:p>
+                  </a:txBody>
+                  <a:tcPr>
+                    <a:solidFill>
+                      <a:srgbClr val="F8FAFB"/>
+                    </a:solidFill>
+                  </a:tcPr>
+                </a:tc>
+                <a:tc>
+                  <a:txBody>
+                    <a:bodyPr/>
+                    <a:lstStyle/>
+                    <a:p>
+                      <a:pPr>
+                        <a:defRPr sz="1600" b="0">
+                          <a:solidFill>
+                            <a:srgbClr val="162A41"/>
+                          </a:solidFill>
+                          <a:latin typeface="Microsoft YaHei"/>
+                        </a:defRPr>
+                      </a:pPr>
+                      <a:r>
+                        <a:t>警报</a:t>
+                      </a:r>
+                    </a:p>
+                  </a:txBody>
+                  <a:tcPr>
+                    <a:solidFill>
+                      <a:srgbClr val="F8FAFB"/>
+                    </a:solidFill>
+                  </a:tcPr>
+                </a:tc>
+                <a:tc>
+                  <a:txBody>
+                    <a:bodyPr/>
+                    <a:lstStyle/>
+                    <a:p>
+                      <a:pPr>
+                        <a:defRPr sz="1600" b="0">
+                          <a:solidFill>
+                            <a:srgbClr val="162A41"/>
+                          </a:solidFill>
+                          <a:latin typeface="Microsoft YaHei"/>
+                        </a:defRPr>
+                      </a:pPr>
+                      <a:r>
+                        <a:t>双源收缩</a:t>
+                      </a:r>
+                    </a:p>
+                  </a:txBody>
+                  <a:tcPr>
+                    <a:solidFill>
+                      <a:srgbClr val="F8FAFB"/>
+                    </a:solidFill>
+                  </a:tcPr>
+                </a:tc>
+                <a:tc>
+                  <a:txBody>
+                    <a:bodyPr/>
+                    <a:lstStyle/>
+                    <a:p>
+                      <a:pPr>
+                        <a:defRPr sz="1600" b="0">
+                          <a:solidFill>
+                            <a:srgbClr val="162A41"/>
+                          </a:solidFill>
+                          <a:latin typeface="Microsoft YaHei"/>
+                        </a:defRPr>
+                      </a:pPr>
+                      <a:r>
+                        <a:t>24.1%</a:t>
+                      </a:r>
+                    </a:p>
+                  </a:txBody>
+                  <a:tcPr>
+                    <a:solidFill>
+                      <a:srgbClr val="F8FAFB"/>
+                    </a:solidFill>
+                  </a:tcPr>
+                </a:tc>
+              </a:tr>
+              <a:tr h="566928">
+                <a:tc>
+                  <a:txBody>
+                    <a:bodyPr/>
+                    <a:lstStyle/>
+                    <a:p>
+                      <a:pPr>
+                        <a:defRPr sz="1600" b="0">
+                          <a:solidFill>
+                            <a:srgbClr val="162A41"/>
+                          </a:solidFill>
+                          <a:latin typeface="Microsoft YaHei"/>
+                        </a:defRPr>
+                      </a:pPr>
+                      <a:r>
                         <a:t>Express</a:t>
                       </a:r>
                     </a:p>
@@ -3715,6 +3798,54 @@
                         </a:defRPr>
                       </a:pPr>
                       <a:r>
+                        <a:t>警报</a:t>
+                      </a:r>
+                    </a:p>
+                  </a:txBody>
+                  <a:tcPr>
+                    <a:solidFill>
+                      <a:srgbClr val="EAF1F3"/>
+                    </a:solidFill>
+                  </a:tcPr>
+                </a:tc>
+                <a:tc>
+                  <a:txBody>
+                    <a:bodyPr/>
+                    <a:lstStyle/>
+                    <a:p>
+                      <a:pPr>
+                        <a:defRPr sz="1600" b="0">
+                          <a:solidFill>
+                            <a:srgbClr val="162A41"/>
+                          </a:solidFill>
+                          <a:latin typeface="Microsoft YaHei"/>
+                        </a:defRPr>
+                      </a:pPr>
+                      <a:r>
+                        <a:t>警报</a:t>
+                      </a:r>
+                    </a:p>
+                  </a:txBody>
+                  <a:tcPr>
+                    <a:solidFill>
+                      <a:srgbClr val="EAF1F3"/>
+                    </a:solidFill>
+                  </a:tcPr>
+                </a:tc>
+                <a:tc>
+                  <a:txBody>
+                    <a:bodyPr/>
+                    <a:lstStyle/>
+                    <a:p>
+                      <a:pPr>
+                        <a:defRPr sz="1600" b="0">
+                          <a:solidFill>
+                            <a:srgbClr val="162A41"/>
+                          </a:solidFill>
+                          <a:latin typeface="Microsoft YaHei"/>
+                        </a:defRPr>
+                      </a:pPr>
+                      <a:r>
                         <a:t>双源收缩</a:t>
                       </a:r>
                     </a:p>
@@ -3739,7 +3870,7 @@
                         </a:defRPr>
                       </a:pPr>
                       <a:r>
-                        <a:t>603</a:t>
+                        <a:t>20.5%</a:t>
                       </a:r>
                     </a:p>
                   </a:txBody>
@@ -3749,6 +3880,8 @@
                     </a:solidFill>
                   </a:tcPr>
                 </a:tc>
+              </a:tr>
+              <a:tr h="566928">
                 <a:tc>
                   <a:txBody>
                     <a:bodyPr/>
@@ -3763,7 +3896,129 @@
                         </a:defRPr>
                       </a:pPr>
                       <a:r>
-                        <a:t>424</a:t>
+                        <a:t>Spring Boot</a:t>
+                      </a:r>
+                    </a:p>
+                  </a:txBody>
+                  <a:tcPr>
+                    <a:solidFill>
+                      <a:srgbClr val="F8FAFB"/>
+                    </a:solidFill>
+                  </a:tcPr>
+                </a:tc>
+                <a:tc>
+                  <a:txBody>
+                    <a:bodyPr/>
+                    <a:lstStyle/>
+                    <a:p>
+                      <a:pPr>
+                        <a:defRPr sz="1600" b="0">
+                          <a:solidFill>
+                            <a:srgbClr val="162A41"/>
+                          </a:solidFill>
+                          <a:latin typeface="Microsoft YaHei"/>
+                        </a:defRPr>
+                      </a:pPr>
+                      <a:r>
+                        <a:t>警报</a:t>
+                      </a:r>
+                    </a:p>
+                  </a:txBody>
+                  <a:tcPr>
+                    <a:solidFill>
+                      <a:srgbClr val="F8FAFB"/>
+                    </a:solidFill>
+                  </a:tcPr>
+                </a:tc>
+                <a:tc>
+                  <a:txBody>
+                    <a:bodyPr/>
+                    <a:lstStyle/>
+                    <a:p>
+                      <a:pPr>
+                        <a:defRPr sz="1600" b="0">
+                          <a:solidFill>
+                            <a:srgbClr val="162A41"/>
+                          </a:solidFill>
+                          <a:latin typeface="Microsoft YaHei"/>
+                        </a:defRPr>
+                      </a:pPr>
+                      <a:r>
+                        <a:t>警报</a:t>
+                      </a:r>
+                    </a:p>
+                  </a:txBody>
+                  <a:tcPr>
+                    <a:solidFill>
+                      <a:srgbClr val="F8FAFB"/>
+                    </a:solidFill>
+                  </a:tcPr>
+                </a:tc>
+                <a:tc>
+                  <a:txBody>
+                    <a:bodyPr/>
+                    <a:lstStyle/>
+                    <a:p>
+                      <a:pPr>
+                        <a:defRPr sz="1600" b="0">
+                          <a:solidFill>
+                            <a:srgbClr val="162A41"/>
+                          </a:solidFill>
+                          <a:latin typeface="Microsoft YaHei"/>
+                        </a:defRPr>
+                      </a:pPr>
+                      <a:r>
+                        <a:t>双源收缩</a:t>
+                      </a:r>
+                    </a:p>
+                  </a:txBody>
+                  <a:tcPr>
+                    <a:solidFill>
+                      <a:srgbClr val="F8FAFB"/>
+                    </a:solidFill>
+                  </a:tcPr>
+                </a:tc>
+                <a:tc>
+                  <a:txBody>
+                    <a:bodyPr/>
+                    <a:lstStyle/>
+                    <a:p>
+                      <a:pPr>
+                        <a:defRPr sz="1600" b="0">
+                          <a:solidFill>
+                            <a:srgbClr val="162A41"/>
+                          </a:solidFill>
+                          <a:latin typeface="Microsoft YaHei"/>
+                        </a:defRPr>
+                      </a:pPr>
+                      <a:r>
+                        <a:t>15.1%</a:t>
+                      </a:r>
+                    </a:p>
+                  </a:txBody>
+                  <a:tcPr>
+                    <a:solidFill>
+                      <a:srgbClr val="F8FAFB"/>
+                    </a:solidFill>
+                  </a:tcPr>
+                </a:tc>
+              </a:tr>
+              <a:tr h="566928">
+                <a:tc>
+                  <a:txBody>
+                    <a:bodyPr/>
+                    <a:lstStyle/>
+                    <a:p>
+                      <a:pPr>
+                        <a:defRPr sz="1600" b="0">
+                          <a:solidFill>
+                            <a:srgbClr val="162A41"/>
+                          </a:solidFill>
+                          <a:latin typeface="Microsoft YaHei"/>
+                        </a:defRPr>
+                      </a:pPr>
+                      <a:r>
+                        <a:t>Flask</a:t>
                       </a:r>
                     </a:p>
                   </a:txBody>
@@ -3787,7 +4042,7 @@
                         </a:defRPr>
                       </a:pPr>
                       <a:r>
-                        <a:t>下降</a:t>
+                        <a:t>警报</a:t>
                       </a:r>
                     </a:p>
                   </a:txBody>
@@ -3797,8 +4052,80 @@
                     </a:solidFill>
                   </a:tcPr>
                 </a:tc>
+                <a:tc>
+                  <a:txBody>
+                    <a:bodyPr/>
+                    <a:lstStyle/>
+                    <a:p>
+                      <a:pPr>
+                        <a:defRPr sz="1600" b="0">
+                          <a:solidFill>
+                            <a:srgbClr val="162A41"/>
+                          </a:solidFill>
+                          <a:latin typeface="Microsoft YaHei"/>
+                        </a:defRPr>
+                      </a:pPr>
+                      <a:r>
+                        <a:t>警报</a:t>
+                      </a:r>
+                    </a:p>
+                  </a:txBody>
+                  <a:tcPr>
+                    <a:solidFill>
+                      <a:srgbClr val="EAF1F3"/>
+                    </a:solidFill>
+                  </a:tcPr>
+                </a:tc>
+                <a:tc>
+                  <a:txBody>
+                    <a:bodyPr/>
+                    <a:lstStyle/>
+                    <a:p>
+                      <a:pPr>
+                        <a:defRPr sz="1600" b="0">
+                          <a:solidFill>
+                            <a:srgbClr val="162A41"/>
+                          </a:solidFill>
+                          <a:latin typeface="Microsoft YaHei"/>
+                        </a:defRPr>
+                      </a:pPr>
+                      <a:r>
+                        <a:t>双源收缩</a:t>
+                      </a:r>
+                    </a:p>
+                  </a:txBody>
+                  <a:tcPr>
+                    <a:solidFill>
+                      <a:srgbClr val="EAF1F3"/>
+                    </a:solidFill>
+                  </a:tcPr>
+                </a:tc>
+                <a:tc>
+                  <a:txBody>
+                    <a:bodyPr/>
+                    <a:lstStyle/>
+                    <a:p>
+                      <a:pPr>
+                        <a:defRPr sz="1600" b="0">
+                          <a:solidFill>
+                            <a:srgbClr val="162A41"/>
+                          </a:solidFill>
+                          <a:latin typeface="Microsoft YaHei"/>
+                        </a:defRPr>
+                      </a:pPr>
+                      <a:r>
+                        <a:t>14.8%</a:t>
+                      </a:r>
+                    </a:p>
+                  </a:txBody>
+                  <a:tcPr>
+                    <a:solidFill>
+                      <a:srgbClr val="EAF1F3"/>
+                    </a:solidFill>
+                  </a:tcPr>
+                </a:tc>
               </a:tr>
-              <a:tr h="621792">
+              <a:tr h="566928">
                 <a:tc>
                   <a:txBody>
                     <a:bodyPr/>
@@ -3813,7 +4140,7 @@
                         </a:defRPr>
                       </a:pPr>
                       <a:r>
-                        <a:t>Flask</a:t>
+                        <a:t>Laravel</a:t>
                       </a:r>
                     </a:p>
                   </a:txBody>
@@ -3837,6 +4164,54 @@
                         </a:defRPr>
                       </a:pPr>
                       <a:r>
+                        <a:t>警报</a:t>
+                      </a:r>
+                    </a:p>
+                  </a:txBody>
+                  <a:tcPr>
+                    <a:solidFill>
+                      <a:srgbClr val="F8FAFB"/>
+                    </a:solidFill>
+                  </a:tcPr>
+                </a:tc>
+                <a:tc>
+                  <a:txBody>
+                    <a:bodyPr/>
+                    <a:lstStyle/>
+                    <a:p>
+                      <a:pPr>
+                        <a:defRPr sz="1600" b="0">
+                          <a:solidFill>
+                            <a:srgbClr val="162A41"/>
+                          </a:solidFill>
+                          <a:latin typeface="Microsoft YaHei"/>
+                        </a:defRPr>
+                      </a:pPr>
+                      <a:r>
+                        <a:t>警报</a:t>
+                      </a:r>
+                    </a:p>
+                  </a:txBody>
+                  <a:tcPr>
+                    <a:solidFill>
+                      <a:srgbClr val="F8FAFB"/>
+                    </a:solidFill>
+                  </a:tcPr>
+                </a:tc>
+                <a:tc>
+                  <a:txBody>
+                    <a:bodyPr/>
+                    <a:lstStyle/>
+                    <a:p>
+                      <a:pPr>
+                        <a:defRPr sz="1600" b="0">
+                          <a:solidFill>
+                            <a:srgbClr val="162A41"/>
+                          </a:solidFill>
+                          <a:latin typeface="Microsoft YaHei"/>
+                        </a:defRPr>
+                      </a:pPr>
+                      <a:r>
                         <a:t>双源收缩</a:t>
                       </a:r>
                     </a:p>
@@ -3861,7 +4236,7 @@
                         </a:defRPr>
                       </a:pPr>
                       <a:r>
-                        <a:t>646</a:t>
+                        <a:t>9.2%</a:t>
                       </a:r>
                     </a:p>
                   </a:txBody>
@@ -3871,6 +4246,8 @@
                     </a:solidFill>
                   </a:tcPr>
                 </a:tc>
+              </a:tr>
+              <a:tr h="566928">
                 <a:tc>
                   <a:txBody>
                     <a:bodyPr/>
@@ -3885,13 +4262,13 @@
                         </a:defRPr>
                       </a:pPr>
                       <a:r>
-                        <a:t>420</a:t>
-                      </a:r>
-                    </a:p>
-                  </a:txBody>
-                  <a:tcPr>
-                    <a:solidFill>
-                      <a:srgbClr val="F8FAFB"/>
+                        <a:t>H2</a:t>
+                      </a:r>
+                    </a:p>
+                  </a:txBody>
+                  <a:tcPr>
+                    <a:solidFill>
+                      <a:srgbClr val="EAF1F3"/>
                     </a:solidFill>
                   </a:tcPr>
                 </a:tc>
@@ -3909,18 +4286,16 @@
                         </a:defRPr>
                       </a:pPr>
                       <a:r>
-                        <a:t>下降</a:t>
-                      </a:r>
-                    </a:p>
-                  </a:txBody>
-                  <a:tcPr>
-                    <a:solidFill>
-                      <a:srgbClr val="F8FAFB"/>
-                    </a:solidFill>
-                  </a:tcPr>
-                </a:tc>
-              </a:tr>
-              <a:tr h="621792">
+                        <a:t>警报</a:t>
+                      </a:r>
+                    </a:p>
+                  </a:txBody>
+                  <a:tcPr>
+                    <a:solidFill>
+                      <a:srgbClr val="EAF1F3"/>
+                    </a:solidFill>
+                  </a:tcPr>
+                </a:tc>
                 <a:tc>
                   <a:txBody>
                     <a:bodyPr/>
@@ -3935,7 +4310,7 @@
                         </a:defRPr>
                       </a:pPr>
                       <a:r>
-                        <a:t>Ruby</a:t>
+                        <a:t>警报</a:t>
                       </a:r>
                     </a:p>
                   </a:txBody>
@@ -3959,7 +4334,7 @@
                         </a:defRPr>
                       </a:pPr>
                       <a:r>
-                        <a:t>问卷单源警报</a:t>
+                        <a:t>双源收缩</a:t>
                       </a:r>
                     </a:p>
                   </a:txBody>
@@ -3983,299 +4358,7 @@
                         </a:defRPr>
                       </a:pPr>
                       <a:r>
-                        <a:t>1972</a:t>
-                      </a:r>
-                    </a:p>
-                  </a:txBody>
-                  <a:tcPr>
-                    <a:solidFill>
-                      <a:srgbClr val="EAF1F3"/>
-                    </a:solidFill>
-                  </a:tcPr>
-                </a:tc>
-                <a:tc>
-                  <a:txBody>
-                    <a:bodyPr/>
-                    <a:lstStyle/>
-                    <a:p>
-                      <a:pPr>
-                        <a:defRPr sz="1600" b="0">
-                          <a:solidFill>
-                            <a:srgbClr val="162A41"/>
-                          </a:solidFill>
-                          <a:latin typeface="Microsoft YaHei"/>
-                        </a:defRPr>
-                      </a:pPr>
-                      <a:r>
-                        <a:t>1988</a:t>
-                      </a:r>
-                    </a:p>
-                  </a:txBody>
-                  <a:tcPr>
-                    <a:solidFill>
-                      <a:srgbClr val="EAF1F3"/>
-                    </a:solidFill>
-                  </a:tcPr>
-                </a:tc>
-                <a:tc>
-                  <a:txBody>
-                    <a:bodyPr/>
-                    <a:lstStyle/>
-                    <a:p>
-                      <a:pPr>
-                        <a:defRPr sz="1600" b="0">
-                          <a:solidFill>
-                            <a:srgbClr val="162A41"/>
-                          </a:solidFill>
-                          <a:latin typeface="Microsoft YaHei"/>
-                        </a:defRPr>
-                      </a:pPr>
-                      <a:r>
-                        <a:t>上升</a:t>
-                      </a:r>
-                    </a:p>
-                  </a:txBody>
-                  <a:tcPr>
-                    <a:solidFill>
-                      <a:srgbClr val="EAF1F3"/>
-                    </a:solidFill>
-                  </a:tcPr>
-                </a:tc>
-              </a:tr>
-              <a:tr h="621792">
-                <a:tc>
-                  <a:txBody>
-                    <a:bodyPr/>
-                    <a:lstStyle/>
-                    <a:p>
-                      <a:pPr>
-                        <a:defRPr sz="1600" b="0">
-                          <a:solidFill>
-                            <a:srgbClr val="162A41"/>
-                          </a:solidFill>
-                          <a:latin typeface="Microsoft YaHei"/>
-                        </a:defRPr>
-                      </a:pPr>
-                      <a:r>
-                        <a:t>Kotlin</a:t>
-                      </a:r>
-                    </a:p>
-                  </a:txBody>
-                  <a:tcPr>
-                    <a:solidFill>
-                      <a:srgbClr val="F8FAFB"/>
-                    </a:solidFill>
-                  </a:tcPr>
-                </a:tc>
-                <a:tc>
-                  <a:txBody>
-                    <a:bodyPr/>
-                    <a:lstStyle/>
-                    <a:p>
-                      <a:pPr>
-                        <a:defRPr sz="1600" b="0">
-                          <a:solidFill>
-                            <a:srgbClr val="162A41"/>
-                          </a:solidFill>
-                          <a:latin typeface="Microsoft YaHei"/>
-                        </a:defRPr>
-                      </a:pPr>
-                      <a:r>
-                        <a:t>评论单源警报</a:t>
-                      </a:r>
-                    </a:p>
-                  </a:txBody>
-                  <a:tcPr>
-                    <a:solidFill>
-                      <a:srgbClr val="F8FAFB"/>
-                    </a:solidFill>
-                  </a:tcPr>
-                </a:tc>
-                <a:tc>
-                  <a:txBody>
-                    <a:bodyPr/>
-                    <a:lstStyle/>
-                    <a:p>
-                      <a:pPr>
-                        <a:defRPr sz="1600" b="0">
-                          <a:solidFill>
-                            <a:srgbClr val="162A41"/>
-                          </a:solidFill>
-                          <a:latin typeface="Microsoft YaHei"/>
-                        </a:defRPr>
-                      </a:pPr>
-                      <a:r>
-                        <a:t>831</a:t>
-                      </a:r>
-                    </a:p>
-                  </a:txBody>
-                  <a:tcPr>
-                    <a:solidFill>
-                      <a:srgbClr val="F8FAFB"/>
-                    </a:solidFill>
-                  </a:tcPr>
-                </a:tc>
-                <a:tc>
-                  <a:txBody>
-                    <a:bodyPr/>
-                    <a:lstStyle/>
-                    <a:p>
-                      <a:pPr>
-                        <a:defRPr sz="1600" b="0">
-                          <a:solidFill>
-                            <a:srgbClr val="162A41"/>
-                          </a:solidFill>
-                          <a:latin typeface="Microsoft YaHei"/>
-                        </a:defRPr>
-                      </a:pPr>
-                      <a:r>
-                        <a:t>363</a:t>
-                      </a:r>
-                    </a:p>
-                  </a:txBody>
-                  <a:tcPr>
-                    <a:solidFill>
-                      <a:srgbClr val="F8FAFB"/>
-                    </a:solidFill>
-                  </a:tcPr>
-                </a:tc>
-                <a:tc>
-                  <a:txBody>
-                    <a:bodyPr/>
-                    <a:lstStyle/>
-                    <a:p>
-                      <a:pPr>
-                        <a:defRPr sz="1600" b="0">
-                          <a:solidFill>
-                            <a:srgbClr val="162A41"/>
-                          </a:solidFill>
-                          <a:latin typeface="Microsoft YaHei"/>
-                        </a:defRPr>
-                      </a:pPr>
-                      <a:r>
-                        <a:t>下降</a:t>
-                      </a:r>
-                    </a:p>
-                  </a:txBody>
-                  <a:tcPr>
-                    <a:solidFill>
-                      <a:srgbClr val="F8FAFB"/>
-                    </a:solidFill>
-                  </a:tcPr>
-                </a:tc>
-              </a:tr>
-              <a:tr h="621792">
-                <a:tc>
-                  <a:txBody>
-                    <a:bodyPr/>
-                    <a:lstStyle/>
-                    <a:p>
-                      <a:pPr>
-                        <a:defRPr sz="1600" b="0">
-                          <a:solidFill>
-                            <a:srgbClr val="162A41"/>
-                          </a:solidFill>
-                          <a:latin typeface="Microsoft YaHei"/>
-                        </a:defRPr>
-                      </a:pPr>
-                      <a:r>
-                        <a:t>jQuery</a:t>
-                      </a:r>
-                    </a:p>
-                  </a:txBody>
-                  <a:tcPr>
-                    <a:solidFill>
-                      <a:srgbClr val="EAF1F3"/>
-                    </a:solidFill>
-                  </a:tcPr>
-                </a:tc>
-                <a:tc>
-                  <a:txBody>
-                    <a:bodyPr/>
-                    <a:lstStyle/>
-                    <a:p>
-                      <a:pPr>
-                        <a:defRPr sz="1600" b="0">
-                          <a:solidFill>
-                            <a:srgbClr val="162A41"/>
-                          </a:solidFill>
-                          <a:latin typeface="Microsoft YaHei"/>
-                        </a:defRPr>
-                      </a:pPr>
-                      <a:r>
-                        <a:t>问卷单源警报</a:t>
-                      </a:r>
-                    </a:p>
-                  </a:txBody>
-                  <a:tcPr>
-                    <a:solidFill>
-                      <a:srgbClr val="EAF1F3"/>
-                    </a:solidFill>
-                  </a:tcPr>
-                </a:tc>
-                <a:tc>
-                  <a:txBody>
-                    <a:bodyPr/>
-                    <a:lstStyle/>
-                    <a:p>
-                      <a:pPr>
-                        <a:defRPr sz="1600" b="0">
-                          <a:solidFill>
-                            <a:srgbClr val="162A41"/>
-                          </a:solidFill>
-                          <a:latin typeface="Microsoft YaHei"/>
-                        </a:defRPr>
-                      </a:pPr>
-                      <a:r>
-                        <a:t>464</a:t>
-                      </a:r>
-                    </a:p>
-                  </a:txBody>
-                  <a:tcPr>
-                    <a:solidFill>
-                      <a:srgbClr val="EAF1F3"/>
-                    </a:solidFill>
-                  </a:tcPr>
-                </a:tc>
-                <a:tc>
-                  <a:txBody>
-                    <a:bodyPr/>
-                    <a:lstStyle/>
-                    <a:p>
-                      <a:pPr>
-                        <a:defRPr sz="1600" b="0">
-                          <a:solidFill>
-                            <a:srgbClr val="162A41"/>
-                          </a:solidFill>
-                          <a:latin typeface="Microsoft YaHei"/>
-                        </a:defRPr>
-                      </a:pPr>
-                      <a:r>
-                        <a:t>403</a:t>
-                      </a:r>
-                    </a:p>
-                  </a:txBody>
-                  <a:tcPr>
-                    <a:solidFill>
-                      <a:srgbClr val="EAF1F3"/>
-                    </a:solidFill>
-                  </a:tcPr>
-                </a:tc>
-                <a:tc>
-                  <a:txBody>
-                    <a:bodyPr/>
-                    <a:lstStyle/>
-                    <a:p>
-                      <a:pPr>
-                        <a:defRPr sz="1600" b="0">
-                          <a:solidFill>
-                            <a:srgbClr val="162A41"/>
-                          </a:solidFill>
-                          <a:latin typeface="Microsoft YaHei"/>
-                        </a:defRPr>
-                      </a:pPr>
-                      <a:r>
-                        <a:t>下降</a:t>
+                        <a:t>5.1%</a:t>
                       </a:r>
                     </a:p>
                   </a:txBody>
@@ -4298,8 +4381,8 @@
         </p:nvSpPr>
         <p:spPr>
           <a:xfrm>
-            <a:off x="749808" y="5367528"/>
-            <a:ext cx="10607040" cy="640080"/>
+            <a:off x="749808" y="5980176"/>
+            <a:ext cx="10607040" cy="320040"/>
           </a:xfrm>
           <a:prstGeom prst="rect">
             <a:avLst/>
@@ -4316,7 +4399,7 @@
               <a:spcAft>
                 <a:spcPts val="1000"/>
               </a:spcAft>
-              <a:defRPr sz="1900" b="0">
+              <a:defRPr sz="1600" b="0">
                 <a:solidFill>
                   <a:srgbClr val="007E80"/>
                 </a:solidFill>
@@ -4324,7 +4407,7 @@
               </a:defRPr>
             </a:pPr>
             <a:r>
-              <a:t>Ruby 的问卷警报没有对应评论下降；Kotlin 只有评论警报却随后下降。</a:t>
+              <a:t>共 25 项有两路历史；此处展示优先核查的前 7 项。</a:t>
             </a:r>
           </a:p>
         </p:txBody>
@@ -4389,7 +4472,7 @@
               </a:defRPr>
             </a:pPr>
             <a:r>
-              <a:t>当前可用的核查清单</a:t>
+              <a:t>必须单看 2025 年问卷的整体上移</a:t>
             </a:r>
           </a:p>
         </p:txBody>
@@ -4428,7 +4511,7 @@
               </a:defRPr>
             </a:pPr>
             <a:r>
-              <a:t>依据：code/results/tables/multisignal_warning_v2_latest.csv；使用率只用于同级排序</a:t>
+              <a:t>诊断表：multisignal_recent_survey_shift.csv；survey_coverage_recent.csv</a:t>
             </a:r>
           </a:p>
         </p:txBody>
@@ -4472,1021 +4555,16 @@
           </a:p>
         </p:txBody>
       </p:sp>
-      <p:graphicFrame>
-        <p:nvGraphicFramePr>
-          <p:cNvPr id="5" name="Table 4"/>
-          <p:cNvGraphicFramePr>
-            <a:graphicFrameLocks noGrp="1"/>
-          </p:cNvGraphicFramePr>
-          <p:nvPr/>
-        </p:nvGraphicFramePr>
-        <p:xfrm>
-          <a:off x="740664" y="1307592"/>
-          <a:ext cx="11155680" cy="4242816"/>
-        </p:xfrm>
-        <a:graphic>
-          <a:graphicData uri="http://schemas.openxmlformats.org/drawingml/2006/table">
-            <a:tbl>
-              <a:tblPr firstRow="1" bandRow="1">
-                <a:tableStyleId>{5C22544A-7EE6-4342-B048-85BDC9FD1C3A}</a:tableStyleId>
-              </a:tblPr>
-              <a:tblGrid>
-                <a:gridCol w="2011680"/>
-                <a:gridCol w="1417320"/>
-                <a:gridCol w="1417320"/>
-                <a:gridCol w="4251960"/>
-                <a:gridCol w="2057400"/>
-              </a:tblGrid>
-              <a:tr h="530352">
-                <a:tc>
-                  <a:txBody>
-                    <a:bodyPr/>
-                    <a:lstStyle/>
-                    <a:p>
-                      <a:pPr>
-                        <a:defRPr sz="1500" b="1">
-                          <a:solidFill>
-                            <a:srgbClr val="FFFFFF"/>
-                          </a:solidFill>
-                          <a:latin typeface="Microsoft YaHei"/>
-                        </a:defRPr>
-                      </a:pPr>
-                      <a:r>
-                        <a:t>技术</a:t>
-                      </a:r>
-                    </a:p>
-                  </a:txBody>
-                  <a:tcPr>
-                    <a:solidFill>
-                      <a:srgbClr val="162A41"/>
-                    </a:solidFill>
-                  </a:tcPr>
-                </a:tc>
-                <a:tc>
-                  <a:txBody>
-                    <a:bodyPr/>
-                    <a:lstStyle/>
-                    <a:p>
-                      <a:pPr>
-                        <a:defRPr sz="1500" b="1">
-                          <a:solidFill>
-                            <a:srgbClr val="FFFFFF"/>
-                          </a:solidFill>
-                          <a:latin typeface="Microsoft YaHei"/>
-                        </a:defRPr>
-                      </a:pPr>
-                      <a:r>
-                        <a:t>问卷</a:t>
-                      </a:r>
-                    </a:p>
-                  </a:txBody>
-                  <a:tcPr>
-                    <a:solidFill>
-                      <a:srgbClr val="162A41"/>
-                    </a:solidFill>
-                  </a:tcPr>
-                </a:tc>
-                <a:tc>
-                  <a:txBody>
-                    <a:bodyPr/>
-                    <a:lstStyle/>
-                    <a:p>
-                      <a:pPr>
-                        <a:defRPr sz="1500" b="1">
-                          <a:solidFill>
-                            <a:srgbClr val="FFFFFF"/>
-                          </a:solidFill>
-                          <a:latin typeface="Microsoft YaHei"/>
-                        </a:defRPr>
-                      </a:pPr>
-                      <a:r>
-                        <a:t>评论</a:t>
-                      </a:r>
-                    </a:p>
-                  </a:txBody>
-                  <a:tcPr>
-                    <a:solidFill>
-                      <a:srgbClr val="162A41"/>
-                    </a:solidFill>
-                  </a:tcPr>
-                </a:tc>
-                <a:tc>
-                  <a:txBody>
-                    <a:bodyPr/>
-                    <a:lstStyle/>
-                    <a:p>
-                      <a:pPr>
-                        <a:defRPr sz="1500" b="1">
-                          <a:solidFill>
-                            <a:srgbClr val="FFFFFF"/>
-                          </a:solidFill>
-                          <a:latin typeface="Microsoft YaHei"/>
-                        </a:defRPr>
-                      </a:pPr>
-                      <a:r>
-                        <a:t>输出</a:t>
-                      </a:r>
-                    </a:p>
-                  </a:txBody>
-                  <a:tcPr>
-                    <a:solidFill>
-                      <a:srgbClr val="162A41"/>
-                    </a:solidFill>
-                  </a:tcPr>
-                </a:tc>
-                <a:tc>
-                  <a:txBody>
-                    <a:bodyPr/>
-                    <a:lstStyle/>
-                    <a:p>
-                      <a:pPr>
-                        <a:defRPr sz="1500" b="1">
-                          <a:solidFill>
-                            <a:srgbClr val="FFFFFF"/>
-                          </a:solidFill>
-                          <a:latin typeface="Microsoft YaHei"/>
-                        </a:defRPr>
-                      </a:pPr>
-                      <a:r>
-                        <a:t>使用率</a:t>
-                      </a:r>
-                    </a:p>
-                  </a:txBody>
-                  <a:tcPr>
-                    <a:solidFill>
-                      <a:srgbClr val="162A41"/>
-                    </a:solidFill>
-                  </a:tcPr>
-                </a:tc>
-              </a:tr>
-              <a:tr h="530352">
-                <a:tc>
-                  <a:txBody>
-                    <a:bodyPr/>
-                    <a:lstStyle/>
-                    <a:p>
-                      <a:pPr>
-                        <a:defRPr sz="1500" b="0">
-                          <a:solidFill>
-                            <a:srgbClr val="162A41"/>
-                          </a:solidFill>
-                          <a:latin typeface="Microsoft YaHei"/>
-                        </a:defRPr>
-                      </a:pPr>
-                      <a:r>
-                        <a:t>Express</a:t>
-                      </a:r>
-                    </a:p>
-                  </a:txBody>
-                  <a:tcPr>
-                    <a:solidFill>
-                      <a:srgbClr val="EAF1F3"/>
-                    </a:solidFill>
-                  </a:tcPr>
-                </a:tc>
-                <a:tc>
-                  <a:txBody>
-                    <a:bodyPr/>
-                    <a:lstStyle/>
-                    <a:p>
-                      <a:pPr>
-                        <a:defRPr sz="1500" b="0">
-                          <a:solidFill>
-                            <a:srgbClr val="162A41"/>
-                          </a:solidFill>
-                          <a:latin typeface="Microsoft YaHei"/>
-                        </a:defRPr>
-                      </a:pPr>
-                      <a:r>
-                        <a:t>警报</a:t>
-                      </a:r>
-                    </a:p>
-                  </a:txBody>
-                  <a:tcPr>
-                    <a:solidFill>
-                      <a:srgbClr val="EAF1F3"/>
-                    </a:solidFill>
-                  </a:tcPr>
-                </a:tc>
-                <a:tc>
-                  <a:txBody>
-                    <a:bodyPr/>
-                    <a:lstStyle/>
-                    <a:p>
-                      <a:pPr>
-                        <a:defRPr sz="1500" b="0">
-                          <a:solidFill>
-                            <a:srgbClr val="162A41"/>
-                          </a:solidFill>
-                          <a:latin typeface="Microsoft YaHei"/>
-                        </a:defRPr>
-                      </a:pPr>
-                      <a:r>
-                        <a:t>警报</a:t>
-                      </a:r>
-                    </a:p>
-                  </a:txBody>
-                  <a:tcPr>
-                    <a:solidFill>
-                      <a:srgbClr val="EAF1F3"/>
-                    </a:solidFill>
-                  </a:tcPr>
-                </a:tc>
-                <a:tc>
-                  <a:txBody>
-                    <a:bodyPr/>
-                    <a:lstStyle/>
-                    <a:p>
-                      <a:pPr>
-                        <a:defRPr sz="1500" b="0">
-                          <a:solidFill>
-                            <a:srgbClr val="162A41"/>
-                          </a:solidFill>
-                          <a:latin typeface="Microsoft YaHei"/>
-                        </a:defRPr>
-                      </a:pPr>
-                      <a:r>
-                        <a:t>双源收缩</a:t>
-                      </a:r>
-                    </a:p>
-                  </a:txBody>
-                  <a:tcPr>
-                    <a:solidFill>
-                      <a:srgbClr val="EAF1F3"/>
-                    </a:solidFill>
-                  </a:tcPr>
-                </a:tc>
-                <a:tc>
-                  <a:txBody>
-                    <a:bodyPr/>
-                    <a:lstStyle/>
-                    <a:p>
-                      <a:pPr>
-                        <a:defRPr sz="1500" b="0">
-                          <a:solidFill>
-                            <a:srgbClr val="162A41"/>
-                          </a:solidFill>
-                          <a:latin typeface="Microsoft YaHei"/>
-                        </a:defRPr>
-                      </a:pPr>
-                      <a:r>
-                        <a:t>23.5%</a:t>
-                      </a:r>
-                    </a:p>
-                  </a:txBody>
-                  <a:tcPr>
-                    <a:solidFill>
-                      <a:srgbClr val="EAF1F3"/>
-                    </a:solidFill>
-                  </a:tcPr>
-                </a:tc>
-              </a:tr>
-              <a:tr h="530352">
-                <a:tc>
-                  <a:txBody>
-                    <a:bodyPr/>
-                    <a:lstStyle/>
-                    <a:p>
-                      <a:pPr>
-                        <a:defRPr sz="1500" b="0">
-                          <a:solidFill>
-                            <a:srgbClr val="162A41"/>
-                          </a:solidFill>
-                          <a:latin typeface="Microsoft YaHei"/>
-                        </a:defRPr>
-                      </a:pPr>
-                      <a:r>
-                        <a:t>Flask</a:t>
-                      </a:r>
-                    </a:p>
-                  </a:txBody>
-                  <a:tcPr>
-                    <a:solidFill>
-                      <a:srgbClr val="F8FAFB"/>
-                    </a:solidFill>
-                  </a:tcPr>
-                </a:tc>
-                <a:tc>
-                  <a:txBody>
-                    <a:bodyPr/>
-                    <a:lstStyle/>
-                    <a:p>
-                      <a:pPr>
-                        <a:defRPr sz="1500" b="0">
-                          <a:solidFill>
-                            <a:srgbClr val="162A41"/>
-                          </a:solidFill>
-                          <a:latin typeface="Microsoft YaHei"/>
-                        </a:defRPr>
-                      </a:pPr>
-                      <a:r>
-                        <a:t>警报</a:t>
-                      </a:r>
-                    </a:p>
-                  </a:txBody>
-                  <a:tcPr>
-                    <a:solidFill>
-                      <a:srgbClr val="F8FAFB"/>
-                    </a:solidFill>
-                  </a:tcPr>
-                </a:tc>
-                <a:tc>
-                  <a:txBody>
-                    <a:bodyPr/>
-                    <a:lstStyle/>
-                    <a:p>
-                      <a:pPr>
-                        <a:defRPr sz="1500" b="0">
-                          <a:solidFill>
-                            <a:srgbClr val="162A41"/>
-                          </a:solidFill>
-                          <a:latin typeface="Microsoft YaHei"/>
-                        </a:defRPr>
-                      </a:pPr>
-                      <a:r>
-                        <a:t>警报</a:t>
-                      </a:r>
-                    </a:p>
-                  </a:txBody>
-                  <a:tcPr>
-                    <a:solidFill>
-                      <a:srgbClr val="F8FAFB"/>
-                    </a:solidFill>
-                  </a:tcPr>
-                </a:tc>
-                <a:tc>
-                  <a:txBody>
-                    <a:bodyPr/>
-                    <a:lstStyle/>
-                    <a:p>
-                      <a:pPr>
-                        <a:defRPr sz="1500" b="0">
-                          <a:solidFill>
-                            <a:srgbClr val="162A41"/>
-                          </a:solidFill>
-                          <a:latin typeface="Microsoft YaHei"/>
-                        </a:defRPr>
-                      </a:pPr>
-                      <a:r>
-                        <a:t>双源收缩</a:t>
-                      </a:r>
-                    </a:p>
-                  </a:txBody>
-                  <a:tcPr>
-                    <a:solidFill>
-                      <a:srgbClr val="F8FAFB"/>
-                    </a:solidFill>
-                  </a:tcPr>
-                </a:tc>
-                <a:tc>
-                  <a:txBody>
-                    <a:bodyPr/>
-                    <a:lstStyle/>
-                    <a:p>
-                      <a:pPr>
-                        <a:defRPr sz="1500" b="0">
-                          <a:solidFill>
-                            <a:srgbClr val="162A41"/>
-                          </a:solidFill>
-                          <a:latin typeface="Microsoft YaHei"/>
-                        </a:defRPr>
-                      </a:pPr>
-                      <a:r>
-                        <a:t>14.9%</a:t>
-                      </a:r>
-                    </a:p>
-                  </a:txBody>
-                  <a:tcPr>
-                    <a:solidFill>
-                      <a:srgbClr val="F8FAFB"/>
-                    </a:solidFill>
-                  </a:tcPr>
-                </a:tc>
-              </a:tr>
-              <a:tr h="530352">
-                <a:tc>
-                  <a:txBody>
-                    <a:bodyPr/>
-                    <a:lstStyle/>
-                    <a:p>
-                      <a:pPr>
-                        <a:defRPr sz="1500" b="0">
-                          <a:solidFill>
-                            <a:srgbClr val="162A41"/>
-                          </a:solidFill>
-                          <a:latin typeface="Microsoft YaHei"/>
-                        </a:defRPr>
-                      </a:pPr>
-                      <a:r>
-                        <a:t>jQuery</a:t>
-                      </a:r>
-                    </a:p>
-                  </a:txBody>
-                  <a:tcPr>
-                    <a:solidFill>
-                      <a:srgbClr val="EAF1F3"/>
-                    </a:solidFill>
-                  </a:tcPr>
-                </a:tc>
-                <a:tc>
-                  <a:txBody>
-                    <a:bodyPr/>
-                    <a:lstStyle/>
-                    <a:p>
-                      <a:pPr>
-                        <a:defRPr sz="1500" b="0">
-                          <a:solidFill>
-                            <a:srgbClr val="162A41"/>
-                          </a:solidFill>
-                          <a:latin typeface="Microsoft YaHei"/>
-                        </a:defRPr>
-                      </a:pPr>
-                      <a:r>
-                        <a:t>警报</a:t>
-                      </a:r>
-                    </a:p>
-                  </a:txBody>
-                  <a:tcPr>
-                    <a:solidFill>
-                      <a:srgbClr val="EAF1F3"/>
-                    </a:solidFill>
-                  </a:tcPr>
-                </a:tc>
-                <a:tc>
-                  <a:txBody>
-                    <a:bodyPr/>
-                    <a:lstStyle/>
-                    <a:p>
-                      <a:pPr>
-                        <a:defRPr sz="1500" b="0">
-                          <a:solidFill>
-                            <a:srgbClr val="162A41"/>
-                          </a:solidFill>
-                          <a:latin typeface="Microsoft YaHei"/>
-                        </a:defRPr>
-                      </a:pPr>
-                      <a:r>
-                        <a:t>无</a:t>
-                      </a:r>
-                    </a:p>
-                  </a:txBody>
-                  <a:tcPr>
-                    <a:solidFill>
-                      <a:srgbClr val="EAF1F3"/>
-                    </a:solidFill>
-                  </a:tcPr>
-                </a:tc>
-                <a:tc>
-                  <a:txBody>
-                    <a:bodyPr/>
-                    <a:lstStyle/>
-                    <a:p>
-                      <a:pPr>
-                        <a:defRPr sz="1500" b="0">
-                          <a:solidFill>
-                            <a:srgbClr val="162A41"/>
-                          </a:solidFill>
-                          <a:latin typeface="Microsoft YaHei"/>
-                        </a:defRPr>
-                      </a:pPr>
-                      <a:r>
-                        <a:t>问卷单源警报</a:t>
-                      </a:r>
-                    </a:p>
-                  </a:txBody>
-                  <a:tcPr>
-                    <a:solidFill>
-                      <a:srgbClr val="EAF1F3"/>
-                    </a:solidFill>
-                  </a:tcPr>
-                </a:tc>
-                <a:tc>
-                  <a:txBody>
-                    <a:bodyPr/>
-                    <a:lstStyle/>
-                    <a:p>
-                      <a:pPr>
-                        <a:defRPr sz="1500" b="0">
-                          <a:solidFill>
-                            <a:srgbClr val="162A41"/>
-                          </a:solidFill>
-                          <a:latin typeface="Microsoft YaHei"/>
-                        </a:defRPr>
-                      </a:pPr>
-                      <a:r>
-                        <a:t>29.1%</a:t>
-                      </a:r>
-                    </a:p>
-                  </a:txBody>
-                  <a:tcPr>
-                    <a:solidFill>
-                      <a:srgbClr val="EAF1F3"/>
-                    </a:solidFill>
-                  </a:tcPr>
-                </a:tc>
-              </a:tr>
-              <a:tr h="530352">
-                <a:tc>
-                  <a:txBody>
-                    <a:bodyPr/>
-                    <a:lstStyle/>
-                    <a:p>
-                      <a:pPr>
-                        <a:defRPr sz="1500" b="0">
-                          <a:solidFill>
-                            <a:srgbClr val="162A41"/>
-                          </a:solidFill>
-                          <a:latin typeface="Microsoft YaHei"/>
-                        </a:defRPr>
-                      </a:pPr>
-                      <a:r>
-                        <a:t>Kotlin</a:t>
-                      </a:r>
-                    </a:p>
-                  </a:txBody>
-                  <a:tcPr>
-                    <a:solidFill>
-                      <a:srgbClr val="F8FAFB"/>
-                    </a:solidFill>
-                  </a:tcPr>
-                </a:tc>
-                <a:tc>
-                  <a:txBody>
-                    <a:bodyPr/>
-                    <a:lstStyle/>
-                    <a:p>
-                      <a:pPr>
-                        <a:defRPr sz="1500" b="0">
-                          <a:solidFill>
-                            <a:srgbClr val="162A41"/>
-                          </a:solidFill>
-                          <a:latin typeface="Microsoft YaHei"/>
-                        </a:defRPr>
-                      </a:pPr>
-                      <a:r>
-                        <a:t>无</a:t>
-                      </a:r>
-                    </a:p>
-                  </a:txBody>
-                  <a:tcPr>
-                    <a:solidFill>
-                      <a:srgbClr val="F8FAFB"/>
-                    </a:solidFill>
-                  </a:tcPr>
-                </a:tc>
-                <a:tc>
-                  <a:txBody>
-                    <a:bodyPr/>
-                    <a:lstStyle/>
-                    <a:p>
-                      <a:pPr>
-                        <a:defRPr sz="1500" b="0">
-                          <a:solidFill>
-                            <a:srgbClr val="162A41"/>
-                          </a:solidFill>
-                          <a:latin typeface="Microsoft YaHei"/>
-                        </a:defRPr>
-                      </a:pPr>
-                      <a:r>
-                        <a:t>警报</a:t>
-                      </a:r>
-                    </a:p>
-                  </a:txBody>
-                  <a:tcPr>
-                    <a:solidFill>
-                      <a:srgbClr val="F8FAFB"/>
-                    </a:solidFill>
-                  </a:tcPr>
-                </a:tc>
-                <a:tc>
-                  <a:txBody>
-                    <a:bodyPr/>
-                    <a:lstStyle/>
-                    <a:p>
-                      <a:pPr>
-                        <a:defRPr sz="1500" b="0">
-                          <a:solidFill>
-                            <a:srgbClr val="162A41"/>
-                          </a:solidFill>
-                          <a:latin typeface="Microsoft YaHei"/>
-                        </a:defRPr>
-                      </a:pPr>
-                      <a:r>
-                        <a:t>评论单源警报</a:t>
-                      </a:r>
-                    </a:p>
-                  </a:txBody>
-                  <a:tcPr>
-                    <a:solidFill>
-                      <a:srgbClr val="F8FAFB"/>
-                    </a:solidFill>
-                  </a:tcPr>
-                </a:tc>
-                <a:tc>
-                  <a:txBody>
-                    <a:bodyPr/>
-                    <a:lstStyle/>
-                    <a:p>
-                      <a:pPr>
-                        <a:defRPr sz="1500" b="0">
-                          <a:solidFill>
-                            <a:srgbClr val="162A41"/>
-                          </a:solidFill>
-                          <a:latin typeface="Microsoft YaHei"/>
-                        </a:defRPr>
-                      </a:pPr>
-                      <a:r>
-                        <a:t>9.2%</a:t>
-                      </a:r>
-                    </a:p>
-                  </a:txBody>
-                  <a:tcPr>
-                    <a:solidFill>
-                      <a:srgbClr val="F8FAFB"/>
-                    </a:solidFill>
-                  </a:tcPr>
-                </a:tc>
-              </a:tr>
-              <a:tr h="530352">
-                <a:tc>
-                  <a:txBody>
-                    <a:bodyPr/>
-                    <a:lstStyle/>
-                    <a:p>
-                      <a:pPr>
-                        <a:defRPr sz="1500" b="0">
-                          <a:solidFill>
-                            <a:srgbClr val="162A41"/>
-                          </a:solidFill>
-                          <a:latin typeface="Microsoft YaHei"/>
-                        </a:defRPr>
-                      </a:pPr>
-                      <a:r>
-                        <a:t>Ruby</a:t>
-                      </a:r>
-                    </a:p>
-                  </a:txBody>
-                  <a:tcPr>
-                    <a:solidFill>
-                      <a:srgbClr val="EAF1F3"/>
-                    </a:solidFill>
-                  </a:tcPr>
-                </a:tc>
-                <a:tc>
-                  <a:txBody>
-                    <a:bodyPr/>
-                    <a:lstStyle/>
-                    <a:p>
-                      <a:pPr>
-                        <a:defRPr sz="1500" b="0">
-                          <a:solidFill>
-                            <a:srgbClr val="162A41"/>
-                          </a:solidFill>
-                          <a:latin typeface="Microsoft YaHei"/>
-                        </a:defRPr>
-                      </a:pPr>
-                      <a:r>
-                        <a:t>警报</a:t>
-                      </a:r>
-                    </a:p>
-                  </a:txBody>
-                  <a:tcPr>
-                    <a:solidFill>
-                      <a:srgbClr val="EAF1F3"/>
-                    </a:solidFill>
-                  </a:tcPr>
-                </a:tc>
-                <a:tc>
-                  <a:txBody>
-                    <a:bodyPr/>
-                    <a:lstStyle/>
-                    <a:p>
-                      <a:pPr>
-                        <a:defRPr sz="1500" b="0">
-                          <a:solidFill>
-                            <a:srgbClr val="162A41"/>
-                          </a:solidFill>
-                          <a:latin typeface="Microsoft YaHei"/>
-                        </a:defRPr>
-                      </a:pPr>
-                      <a:r>
-                        <a:t>无</a:t>
-                      </a:r>
-                    </a:p>
-                  </a:txBody>
-                  <a:tcPr>
-                    <a:solidFill>
-                      <a:srgbClr val="EAF1F3"/>
-                    </a:solidFill>
-                  </a:tcPr>
-                </a:tc>
-                <a:tc>
-                  <a:txBody>
-                    <a:bodyPr/>
-                    <a:lstStyle/>
-                    <a:p>
-                      <a:pPr>
-                        <a:defRPr sz="1500" b="0">
-                          <a:solidFill>
-                            <a:srgbClr val="162A41"/>
-                          </a:solidFill>
-                          <a:latin typeface="Microsoft YaHei"/>
-                        </a:defRPr>
-                      </a:pPr>
-                      <a:r>
-                        <a:t>问卷单源警报</a:t>
-                      </a:r>
-                    </a:p>
-                  </a:txBody>
-                  <a:tcPr>
-                    <a:solidFill>
-                      <a:srgbClr val="EAF1F3"/>
-                    </a:solidFill>
-                  </a:tcPr>
-                </a:tc>
-                <a:tc>
-                  <a:txBody>
-                    <a:bodyPr/>
-                    <a:lstStyle/>
-                    <a:p>
-                      <a:pPr>
-                        <a:defRPr sz="1500" b="0">
-                          <a:solidFill>
-                            <a:srgbClr val="162A41"/>
-                          </a:solidFill>
-                          <a:latin typeface="Microsoft YaHei"/>
-                        </a:defRPr>
-                      </a:pPr>
-                      <a:r>
-                        <a:t>6.1%</a:t>
-                      </a:r>
-                    </a:p>
-                  </a:txBody>
-                  <a:tcPr>
-                    <a:solidFill>
-                      <a:srgbClr val="EAF1F3"/>
-                    </a:solidFill>
-                  </a:tcPr>
-                </a:tc>
-              </a:tr>
-              <a:tr h="530352">
-                <a:tc>
-                  <a:txBody>
-                    <a:bodyPr/>
-                    <a:lstStyle/>
-                    <a:p>
-                      <a:pPr>
-                        <a:defRPr sz="1500" b="0">
-                          <a:solidFill>
-                            <a:srgbClr val="162A41"/>
-                          </a:solidFill>
-                          <a:latin typeface="Microsoft YaHei"/>
-                        </a:defRPr>
-                      </a:pPr>
-                      <a:r>
-                        <a:t>Phoenix</a:t>
-                      </a:r>
-                    </a:p>
-                  </a:txBody>
-                  <a:tcPr>
-                    <a:solidFill>
-                      <a:srgbClr val="F8FAFB"/>
-                    </a:solidFill>
-                  </a:tcPr>
-                </a:tc>
-                <a:tc>
-                  <a:txBody>
-                    <a:bodyPr/>
-                    <a:lstStyle/>
-                    <a:p>
-                      <a:pPr>
-                        <a:defRPr sz="1500" b="0">
-                          <a:solidFill>
-                            <a:srgbClr val="162A41"/>
-                          </a:solidFill>
-                          <a:latin typeface="Microsoft YaHei"/>
-                        </a:defRPr>
-                      </a:pPr>
-                      <a:r>
-                        <a:t>不足</a:t>
-                      </a:r>
-                    </a:p>
-                  </a:txBody>
-                  <a:tcPr>
-                    <a:solidFill>
-                      <a:srgbClr val="F8FAFB"/>
-                    </a:solidFill>
-                  </a:tcPr>
-                </a:tc>
-                <a:tc>
-                  <a:txBody>
-                    <a:bodyPr/>
-                    <a:lstStyle/>
-                    <a:p>
-                      <a:pPr>
-                        <a:defRPr sz="1500" b="0">
-                          <a:solidFill>
-                            <a:srgbClr val="162A41"/>
-                          </a:solidFill>
-                          <a:latin typeface="Microsoft YaHei"/>
-                        </a:defRPr>
-                      </a:pPr>
-                      <a:r>
-                        <a:t>警报</a:t>
-                      </a:r>
-                    </a:p>
-                  </a:txBody>
-                  <a:tcPr>
-                    <a:solidFill>
-                      <a:srgbClr val="F8FAFB"/>
-                    </a:solidFill>
-                  </a:tcPr>
-                </a:tc>
-                <a:tc>
-                  <a:txBody>
-                    <a:bodyPr/>
-                    <a:lstStyle/>
-                    <a:p>
-                      <a:pPr>
-                        <a:defRPr sz="1500" b="0">
-                          <a:solidFill>
-                            <a:srgbClr val="162A41"/>
-                          </a:solidFill>
-                          <a:latin typeface="Microsoft YaHei"/>
-                        </a:defRPr>
-                      </a:pPr>
-                      <a:r>
-                        <a:t>问卷历史不足</a:t>
-                      </a:r>
-                    </a:p>
-                  </a:txBody>
-                  <a:tcPr>
-                    <a:solidFill>
-                      <a:srgbClr val="F8FAFB"/>
-                    </a:solidFill>
-                  </a:tcPr>
-                </a:tc>
-                <a:tc>
-                  <a:txBody>
-                    <a:bodyPr/>
-                    <a:lstStyle/>
-                    <a:p>
-                      <a:pPr>
-                        <a:defRPr sz="1500" b="0">
-                          <a:solidFill>
-                            <a:srgbClr val="162A41"/>
-                          </a:solidFill>
-                          <a:latin typeface="Microsoft YaHei"/>
-                        </a:defRPr>
-                      </a:pPr>
-                      <a:r>
-                        <a:t>2.2%</a:t>
-                      </a:r>
-                    </a:p>
-                  </a:txBody>
-                  <a:tcPr>
-                    <a:solidFill>
-                      <a:srgbClr val="F8FAFB"/>
-                    </a:solidFill>
-                  </a:tcPr>
-                </a:tc>
-              </a:tr>
-              <a:tr h="530352">
-                <a:tc>
-                  <a:txBody>
-                    <a:bodyPr/>
-                    <a:lstStyle/>
-                    <a:p>
-                      <a:pPr>
-                        <a:defRPr sz="1500" b="0">
-                          <a:solidFill>
-                            <a:srgbClr val="162A41"/>
-                          </a:solidFill>
-                          <a:latin typeface="Microsoft YaHei"/>
-                        </a:defRPr>
-                      </a:pPr>
-                      <a:r>
-                        <a:t>Fastify</a:t>
-                      </a:r>
-                    </a:p>
-                  </a:txBody>
-                  <a:tcPr>
-                    <a:solidFill>
-                      <a:srgbClr val="EAF1F3"/>
-                    </a:solidFill>
-                  </a:tcPr>
-                </a:tc>
-                <a:tc>
-                  <a:txBody>
-                    <a:bodyPr/>
-                    <a:lstStyle/>
-                    <a:p>
-                      <a:pPr>
-                        <a:defRPr sz="1500" b="0">
-                          <a:solidFill>
-                            <a:srgbClr val="162A41"/>
-                          </a:solidFill>
-                          <a:latin typeface="Microsoft YaHei"/>
-                        </a:defRPr>
-                      </a:pPr>
-                      <a:r>
-                        <a:t>不足</a:t>
-                      </a:r>
-                    </a:p>
-                  </a:txBody>
-                  <a:tcPr>
-                    <a:solidFill>
-                      <a:srgbClr val="EAF1F3"/>
-                    </a:solidFill>
-                  </a:tcPr>
-                </a:tc>
-                <a:tc>
-                  <a:txBody>
-                    <a:bodyPr/>
-                    <a:lstStyle/>
-                    <a:p>
-                      <a:pPr>
-                        <a:defRPr sz="1500" b="0">
-                          <a:solidFill>
-                            <a:srgbClr val="162A41"/>
-                          </a:solidFill>
-                          <a:latin typeface="Microsoft YaHei"/>
-                        </a:defRPr>
-                      </a:pPr>
-                      <a:r>
-                        <a:t>无</a:t>
-                      </a:r>
-                    </a:p>
-                  </a:txBody>
-                  <a:tcPr>
-                    <a:solidFill>
-                      <a:srgbClr val="EAF1F3"/>
-                    </a:solidFill>
-                  </a:tcPr>
-                </a:tc>
-                <a:tc>
-                  <a:txBody>
-                    <a:bodyPr/>
-                    <a:lstStyle/>
-                    <a:p>
-                      <a:pPr>
-                        <a:defRPr sz="1500" b="0">
-                          <a:solidFill>
-                            <a:srgbClr val="162A41"/>
-                          </a:solidFill>
-                          <a:latin typeface="Microsoft YaHei"/>
-                        </a:defRPr>
-                      </a:pPr>
-                      <a:r>
-                        <a:t>问卷历史不足</a:t>
-                      </a:r>
-                    </a:p>
-                  </a:txBody>
-                  <a:tcPr>
-                    <a:solidFill>
-                      <a:srgbClr val="EAF1F3"/>
-                    </a:solidFill>
-                  </a:tcPr>
-                </a:tc>
-                <a:tc>
-                  <a:txBody>
-                    <a:bodyPr/>
-                    <a:lstStyle/>
-                    <a:p>
-                      <a:pPr>
-                        <a:defRPr sz="1500" b="0">
-                          <a:solidFill>
-                            <a:srgbClr val="162A41"/>
-                          </a:solidFill>
-                          <a:latin typeface="Microsoft YaHei"/>
-                        </a:defRPr>
-                      </a:pPr>
-                      <a:r>
-                        <a:t>1.9%</a:t>
-                      </a:r>
-                    </a:p>
-                  </a:txBody>
-                  <a:tcPr>
-                    <a:solidFill>
-                      <a:srgbClr val="EAF1F3"/>
-                    </a:solidFill>
-                  </a:tcPr>
-                </a:tc>
-              </a:tr>
-            </a:tbl>
-          </a:graphicData>
-        </a:graphic>
-      </p:graphicFrame>
-      <p:sp>
-        <p:nvSpPr>
-          <p:cNvPr id="6" name="TextBox 5"/>
+      <p:sp>
+        <p:nvSpPr>
+          <p:cNvPr id="5" name="TextBox 4"/>
           <p:cNvSpPr txBox="1"/>
           <p:nvPr/>
         </p:nvSpPr>
         <p:spPr>
           <a:xfrm>
-            <a:off x="777240" y="5733288"/>
-            <a:ext cx="10515600" cy="384048"/>
+            <a:off x="740664" y="1307592"/>
+            <a:ext cx="10607040" cy="731520"/>
           </a:xfrm>
           <a:prstGeom prst="rect">
             <a:avLst/>
@@ -5503,7 +4581,7 @@
               <a:spcAft>
                 <a:spcPts val="1000"/>
               </a:spcAft>
-              <a:defRPr sz="1800" b="0">
+              <a:defRPr sz="2300" b="1">
                 <a:solidFill>
                   <a:srgbClr val="007E80"/>
                 </a:solidFill>
@@ -5511,7 +4589,163 @@
               </a:defRPr>
             </a:pPr>
             <a:r>
-              <a:t>Express、Flask 优先人工核查；Fastify、Phoenix 的问卷历史不足。</a:t>
+              <a:t>在两年都出现的 101 项技术中，87 项的问卷使用率上升；</a:t>
+            </a:r>
+          </a:p>
+        </p:txBody>
+      </p:sp>
+      <p:sp>
+        <p:nvSpPr>
+          <p:cNvPr id="6" name="TextBox 5"/>
+          <p:cNvSpPr txBox="1"/>
+          <p:nvPr/>
+        </p:nvSpPr>
+        <p:spPr>
+          <a:xfrm>
+            <a:off x="740664" y="2231136"/>
+            <a:ext cx="10607040" cy="777240"/>
+          </a:xfrm>
+          <a:prstGeom prst="rect">
+            <a:avLst/>
+          </a:prstGeom>
+          <a:noFill/>
+        </p:spPr>
+        <p:txBody>
+          <a:bodyPr wrap="square" lIns="18288" rIns="18288" tIns="9144" bIns="9144">
+            <a:spAutoFit/>
+          </a:bodyPr>
+          <a:lstStyle/>
+          <a:p>
+            <a:pPr>
+              <a:spcAft>
+                <a:spcPts val="1000"/>
+              </a:spcAft>
+              <a:defRPr sz="2200" b="0">
+                <a:solidFill>
+                  <a:srgbClr val="162A41"/>
+                </a:solidFill>
+                <a:latin typeface="Microsoft YaHei"/>
+              </a:defRPr>
+            </a:pPr>
+            <a:r>
+              <a:t>Web 框架为 25/25；本轮 2024 年预警对应的 25 项也全部上升。</a:t>
+            </a:r>
+          </a:p>
+        </p:txBody>
+      </p:sp>
+      <p:sp>
+        <p:nvSpPr>
+          <p:cNvPr id="7" name="TextBox 6"/>
+          <p:cNvSpPr txBox="1"/>
+          <p:nvPr/>
+        </p:nvSpPr>
+        <p:spPr>
+          <a:xfrm>
+            <a:off x="740664" y="3401568"/>
+            <a:ext cx="10607040" cy="758952"/>
+          </a:xfrm>
+          <a:prstGeom prst="rect">
+            <a:avLst/>
+          </a:prstGeom>
+          <a:noFill/>
+        </p:spPr>
+        <p:txBody>
+          <a:bodyPr wrap="square" lIns="18288" rIns="18288" tIns="9144" bIns="9144">
+            <a:spAutoFit/>
+          </a:bodyPr>
+          <a:lstStyle/>
+          <a:p>
+            <a:pPr>
+              <a:spcAft>
+                <a:spcPts val="1000"/>
+              </a:spcAft>
+              <a:defRPr sz="2100" b="0">
+                <a:solidFill>
+                  <a:srgbClr val="162A41"/>
+                </a:solidFill>
+                <a:latin typeface="Microsoft YaHei"/>
+              </a:defRPr>
+            </a:pPr>
+            <a:r>
+              <a:t>语言使用题有效回答：2024 年 59,745 人，2025 年 31,671 人。</a:t>
+            </a:r>
+          </a:p>
+        </p:txBody>
+      </p:sp>
+      <p:sp>
+        <p:nvSpPr>
+          <p:cNvPr id="8" name="TextBox 7"/>
+          <p:cNvSpPr txBox="1"/>
+          <p:nvPr/>
+        </p:nvSpPr>
+        <p:spPr>
+          <a:xfrm>
+            <a:off x="740664" y="4526280"/>
+            <a:ext cx="10607040" cy="914400"/>
+          </a:xfrm>
+          <a:prstGeom prst="rect">
+            <a:avLst/>
+          </a:prstGeom>
+          <a:noFill/>
+        </p:spPr>
+        <p:txBody>
+          <a:bodyPr wrap="square" lIns="18288" rIns="18288" tIns="9144" bIns="9144">
+            <a:spAutoFit/>
+          </a:bodyPr>
+          <a:lstStyle/>
+          <a:p>
+            <a:pPr>
+              <a:spcAft>
+                <a:spcPts val="1000"/>
+              </a:spcAft>
+              <a:defRPr sz="2000" b="0">
+                <a:solidFill>
+                  <a:srgbClr val="007E80"/>
+                </a:solidFill>
+                <a:latin typeface="Microsoft YaHei"/>
+              </a:defRPr>
+            </a:pPr>
+            <a:r>
+              <a:t>只看预警年 2022—2023：34 条记录；双源命中率 87.5%，旧规则 81.8%。</a:t>
+            </a:r>
+          </a:p>
+        </p:txBody>
+      </p:sp>
+      <p:sp>
+        <p:nvSpPr>
+          <p:cNvPr id="9" name="TextBox 8"/>
+          <p:cNvSpPr txBox="1"/>
+          <p:nvPr/>
+        </p:nvSpPr>
+        <p:spPr>
+          <a:xfrm>
+            <a:off x="740664" y="5650992"/>
+            <a:ext cx="10607040" cy="594360"/>
+          </a:xfrm>
+          <a:prstGeom prst="rect">
+            <a:avLst/>
+          </a:prstGeom>
+          <a:noFill/>
+        </p:spPr>
+        <p:txBody>
+          <a:bodyPr wrap="square" lIns="18288" rIns="18288" tIns="9144" bIns="9144">
+            <a:spAutoFit/>
+          </a:bodyPr>
+          <a:lstStyle/>
+          <a:p>
+            <a:pPr>
+              <a:spcAft>
+                <a:spcPts val="1000"/>
+              </a:spcAft>
+              <a:defRPr sz="1800" b="0">
+                <a:solidFill>
+                  <a:srgbClr val="C36623"/>
+                </a:solidFill>
+                <a:latin typeface="Microsoft YaHei"/>
+              </a:defRPr>
+            </a:pPr>
+            <a:r>
+              <a:t>这提示调查受访者或选项口径可能变化；不能把整体上移直接解释为技术都增长。</a:t>
             </a:r>
           </a:p>
         </p:txBody>
@@ -5576,7 +4810,7 @@
               </a:defRPr>
             </a:pPr>
             <a:r>
-              <a:t>结论：先做核查排序，再扩大验证</a:t>
+              <a:t>怎样理解这次扩样</a:t>
             </a:r>
           </a:p>
         </p:txBody>
@@ -5615,7 +4849,7 @@
               </a:defRPr>
             </a:pPr>
             <a:r>
-              <a:t>完整方法、逐项预测及限制见研究记录_多源因变量与动态预警.md</a:t>
+              <a:t>方法与筛选限制见研究记录_多源因变量与动态预警.md</a:t>
             </a:r>
           </a:p>
         </p:txBody>
@@ -5667,8 +4901,8 @@
         </p:nvSpPr>
         <p:spPr>
           <a:xfrm>
-            <a:off x="758952" y="1408176"/>
-            <a:ext cx="10652760" cy="694944"/>
+            <a:off x="758952" y="1399032"/>
+            <a:ext cx="10561320" cy="704088"/>
           </a:xfrm>
           <a:prstGeom prst="rect">
             <a:avLst/>
@@ -5685,7 +4919,7 @@
               <a:spcAft>
                 <a:spcPts val="1000"/>
               </a:spcAft>
-              <a:defRPr sz="2300" b="1">
+              <a:defRPr sz="2400" b="1">
                 <a:solidFill>
                   <a:srgbClr val="007E80"/>
                 </a:solidFill>
@@ -5693,7 +4927,7 @@
               </a:defRPr>
             </a:pPr>
             <a:r>
-              <a:t>加入评论量后，双源警报的命中比例提高，误报减少。</a:t>
+              <a:t>样本增加后，先看命中和漏报是否仍能同时接受。</a:t>
             </a:r>
           </a:p>
         </p:txBody>
@@ -5707,46 +4941,7 @@
         <p:spPr>
           <a:xfrm>
             <a:off x="758952" y="2551176"/>
-            <a:ext cx="10561320" cy="914400"/>
-          </a:xfrm>
-          <a:prstGeom prst="rect">
-            <a:avLst/>
-          </a:prstGeom>
-          <a:noFill/>
-        </p:spPr>
-        <p:txBody>
-          <a:bodyPr wrap="square" lIns="18288" rIns="18288" tIns="9144" bIns="9144">
-            <a:spAutoFit/>
-          </a:bodyPr>
-          <a:lstStyle/>
-          <a:p>
-            <a:pPr>
-              <a:spcAft>
-                <a:spcPts val="1000"/>
-              </a:spcAft>
-              <a:defRPr sz="2200" b="0">
-                <a:solidFill>
-                  <a:srgbClr val="C36623"/>
-                </a:solidFill>
-                <a:latin typeface="Microsoft YaHei"/>
-              </a:defRPr>
-            </a:pPr>
-            <a:r>
-              <a:t>它同时漏掉更多下降；五项技术的样本不足以证明总体预测更强。</a:t>
-            </a:r>
-          </a:p>
-        </p:txBody>
-      </p:sp>
-      <p:sp>
-        <p:nvSpPr>
-          <p:cNvPr id="7" name="TextBox 6"/>
-          <p:cNvSpPr txBox="1"/>
-          <p:nvPr/>
-        </p:nvSpPr>
-        <p:spPr>
-          <a:xfrm>
-            <a:off x="758952" y="3941063"/>
-            <a:ext cx="10561320" cy="914400"/>
+            <a:ext cx="10561320" cy="822960"/>
           </a:xfrm>
           <a:prstGeom prst="rect">
             <a:avLst/>
@@ -5771,21 +4966,21 @@
               </a:defRPr>
             </a:pPr>
             <a:r>
-              <a:t>实际用途：把双源收缩排在人工核查前面，单源冲突保留为待查。</a:t>
-            </a:r>
-          </a:p>
-        </p:txBody>
-      </p:sp>
-      <p:sp>
-        <p:nvSpPr>
-          <p:cNvPr id="8" name="TextBox 7"/>
+              <a:t>不同年份的问卷受访者不是同一批人；技术选项与有效回答数也会变化。</a:t>
+            </a:r>
+          </a:p>
+        </p:txBody>
+      </p:sp>
+      <p:sp>
+        <p:nvSpPr>
+          <p:cNvPr id="7" name="TextBox 6"/>
           <p:cNvSpPr txBox="1"/>
           <p:nvPr/>
         </p:nvSpPr>
         <p:spPr>
           <a:xfrm>
-            <a:off x="758952" y="5202936"/>
-            <a:ext cx="10515600" cy="685800"/>
+            <a:off x="758952" y="3776472"/>
+            <a:ext cx="10561320" cy="950976"/>
           </a:xfrm>
           <a:prstGeom prst="rect">
             <a:avLst/>
@@ -5802,7 +4997,7 @@
               <a:spcAft>
                 <a:spcPts val="1000"/>
               </a:spcAft>
-              <a:defRPr sz="2000" b="0">
+              <a:defRPr sz="2100" b="0">
                 <a:solidFill>
                   <a:srgbClr val="162A41"/>
                 </a:solidFill>
@@ -5810,7 +5005,345 @@
               </a:defRPr>
             </a:pPr>
             <a:r>
-              <a:t>下一步：扩充独立仓库，区分机器人与人工评论，并检验新的未来年份。</a:t>
+              <a:t>一个 GitHub 主仓只代表部分社区活动；评论减少不一定意味着技术衰退。</a:t>
+            </a:r>
+          </a:p>
+        </p:txBody>
+      </p:sp>
+      <p:sp>
+        <p:nvSpPr>
+          <p:cNvPr id="8" name="TextBox 7"/>
+          <p:cNvSpPr txBox="1"/>
+          <p:nvPr/>
+        </p:nvSpPr>
+        <p:spPr>
+          <a:xfrm>
+            <a:off x="758952" y="5184648"/>
+            <a:ext cx="10561320" cy="822960"/>
+          </a:xfrm>
+          <a:prstGeom prst="rect">
+            <a:avLst/>
+          </a:prstGeom>
+          <a:noFill/>
+        </p:spPr>
+        <p:txBody>
+          <a:bodyPr wrap="square" lIns="18288" rIns="18288" tIns="9144" bIns="9144">
+            <a:spAutoFit/>
+          </a:bodyPr>
+          <a:lstStyle/>
+          <a:p>
+            <a:pPr>
+              <a:spcAft>
+                <a:spcPts val="1000"/>
+              </a:spcAft>
+              <a:defRPr sz="2000" b="0">
+                <a:solidFill>
+                  <a:srgbClr val="C36623"/>
+                </a:solidFill>
+                <a:latin typeface="Microsoft YaHei"/>
+              </a:defRPr>
+            </a:pPr>
+            <a:r>
+              <a:t>仓库按可核验的完整年度计数纳入，不能代表所有开源技术。</a:t>
+            </a:r>
+          </a:p>
+        </p:txBody>
+      </p:sp>
+    </p:spTree>
+  </p:cSld>
+  <p:clrMapOvr>
+    <a:masterClrMapping/>
+  </p:clrMapOvr>
+</p:sld>
+</file>
+
+<file path=ppt/slides/slide13.xml><?xml version="1.0" encoding="utf-8"?>
+<p:sld xmlns:a="http://schemas.openxmlformats.org/drawingml/2006/main" xmlns:p="http://schemas.openxmlformats.org/presentationml/2006/main" xmlns:r="http://schemas.openxmlformats.org/officeDocument/2006/relationships">
+  <p:cSld>
+    <p:bg>
+      <p:bgPr>
+        <a:solidFill>
+          <a:srgbClr val="F8FAFB"/>
+        </a:solidFill>
+        <a:effectLst/>
+      </p:bgPr>
+    </p:bg>
+    <p:spTree>
+      <p:nvGrpSpPr>
+        <p:cNvPr id="1" name=""/>
+        <p:cNvGrpSpPr/>
+        <p:nvPr/>
+      </p:nvGrpSpPr>
+      <p:grpSpPr/>
+      <p:sp>
+        <p:nvSpPr>
+          <p:cNvPr id="2" name="TextBox 1"/>
+          <p:cNvSpPr txBox="1"/>
+          <p:nvPr/>
+        </p:nvSpPr>
+        <p:spPr>
+          <a:xfrm>
+            <a:off x="594360" y="320040"/>
+            <a:ext cx="10972800" cy="685800"/>
+          </a:xfrm>
+          <a:prstGeom prst="rect">
+            <a:avLst/>
+          </a:prstGeom>
+          <a:noFill/>
+        </p:spPr>
+        <p:txBody>
+          <a:bodyPr wrap="square" lIns="18288" rIns="18288" tIns="9144" bIns="9144">
+            <a:spAutoFit/>
+          </a:bodyPr>
+          <a:lstStyle/>
+          <a:p>
+            <a:pPr>
+              <a:spcAft>
+                <a:spcPts val="1000"/>
+              </a:spcAft>
+              <a:defRPr sz="3100" b="1">
+                <a:solidFill>
+                  <a:srgbClr val="162A41"/>
+                </a:solidFill>
+                <a:latin typeface="Microsoft YaHei"/>
+              </a:defRPr>
+            </a:pPr>
+            <a:r>
+              <a:t>结论：扩大样本后保留有条件的预警用途</a:t>
+            </a:r>
+          </a:p>
+        </p:txBody>
+      </p:sp>
+      <p:sp>
+        <p:nvSpPr>
+          <p:cNvPr id="3" name="TextBox 2"/>
+          <p:cNvSpPr txBox="1"/>
+          <p:nvPr/>
+        </p:nvSpPr>
+        <p:spPr>
+          <a:xfrm>
+            <a:off x="612648" y="6473952"/>
+            <a:ext cx="10881360" cy="201168"/>
+          </a:xfrm>
+          <a:prstGeom prst="rect">
+            <a:avLst/>
+          </a:prstGeom>
+          <a:noFill/>
+        </p:spPr>
+        <p:txBody>
+          <a:bodyPr wrap="square" lIns="18288" rIns="18288" tIns="9144" bIns="9144">
+            <a:spAutoFit/>
+          </a:bodyPr>
+          <a:lstStyle/>
+          <a:p>
+            <a:pPr>
+              <a:spcAft>
+                <a:spcPts val="1000"/>
+              </a:spcAft>
+              <a:defRPr sz="1000" b="0">
+                <a:solidFill>
+                  <a:srgbClr val="5D6872"/>
+                </a:solidFill>
+                <a:latin typeface="Microsoft YaHei"/>
+              </a:defRPr>
+            </a:pPr>
+            <a:r>
+              <a:t>逐项结果、仓库和年份均可在本项目 CSV 中复核</a:t>
+            </a:r>
+          </a:p>
+        </p:txBody>
+      </p:sp>
+      <p:sp>
+        <p:nvSpPr>
+          <p:cNvPr id="4" name="TextBox 3"/>
+          <p:cNvSpPr txBox="1"/>
+          <p:nvPr/>
+        </p:nvSpPr>
+        <p:spPr>
+          <a:xfrm>
+            <a:off x="11292840" y="6473952"/>
+            <a:ext cx="411480" cy="201168"/>
+          </a:xfrm>
+          <a:prstGeom prst="rect">
+            <a:avLst/>
+          </a:prstGeom>
+          <a:noFill/>
+        </p:spPr>
+        <p:txBody>
+          <a:bodyPr wrap="square" lIns="18288" rIns="18288" tIns="9144" bIns="9144">
+            <a:spAutoFit/>
+          </a:bodyPr>
+          <a:lstStyle/>
+          <a:p>
+            <a:pPr algn="r">
+              <a:spcAft>
+                <a:spcPts val="1000"/>
+              </a:spcAft>
+              <a:defRPr sz="1000" b="0">
+                <a:solidFill>
+                  <a:srgbClr val="5D6872"/>
+                </a:solidFill>
+                <a:latin typeface="Microsoft YaHei"/>
+              </a:defRPr>
+            </a:pPr>
+            <a:r>
+              <a:t>13</a:t>
+            </a:r>
+          </a:p>
+        </p:txBody>
+      </p:sp>
+      <p:sp>
+        <p:nvSpPr>
+          <p:cNvPr id="5" name="TextBox 4"/>
+          <p:cNvSpPr txBox="1"/>
+          <p:nvPr/>
+        </p:nvSpPr>
+        <p:spPr>
+          <a:xfrm>
+            <a:off x="758952" y="1380744"/>
+            <a:ext cx="10698480" cy="758952"/>
+          </a:xfrm>
+          <a:prstGeom prst="rect">
+            <a:avLst/>
+          </a:prstGeom>
+          <a:noFill/>
+        </p:spPr>
+        <p:txBody>
+          <a:bodyPr wrap="square" lIns="18288" rIns="18288" tIns="9144" bIns="9144">
+            <a:spAutoFit/>
+          </a:bodyPr>
+          <a:lstStyle/>
+          <a:p>
+            <a:pPr>
+              <a:spcAft>
+                <a:spcPts val="1000"/>
+              </a:spcAft>
+              <a:defRPr sz="2400" b="1">
+                <a:solidFill>
+                  <a:srgbClr val="007E80"/>
+                </a:solidFill>
+                <a:latin typeface="Microsoft YaHei"/>
+              </a:defRPr>
+            </a:pPr>
+            <a:r>
+              <a:t>使用率下降检验：双源命中率 63.6%，找回率 30.4%。</a:t>
+            </a:r>
+          </a:p>
+        </p:txBody>
+      </p:sp>
+      <p:sp>
+        <p:nvSpPr>
+          <p:cNvPr id="6" name="TextBox 5"/>
+          <p:cNvSpPr txBox="1"/>
+          <p:nvPr/>
+        </p:nvSpPr>
+        <p:spPr>
+          <a:xfrm>
+            <a:off x="758952" y="2542032"/>
+            <a:ext cx="10698480" cy="731520"/>
+          </a:xfrm>
+          <a:prstGeom prst="rect">
+            <a:avLst/>
+          </a:prstGeom>
+          <a:noFill/>
+        </p:spPr>
+        <p:txBody>
+          <a:bodyPr wrap="square" lIns="18288" rIns="18288" tIns="9144" bIns="9144">
+            <a:spAutoFit/>
+          </a:bodyPr>
+          <a:lstStyle/>
+          <a:p>
+            <a:pPr>
+              <a:spcAft>
+                <a:spcPts val="1000"/>
+              </a:spcAft>
+              <a:defRPr sz="2300" b="0">
+                <a:solidFill>
+                  <a:srgbClr val="162A41"/>
+                </a:solidFill>
+                <a:latin typeface="Microsoft YaHei"/>
+              </a:defRPr>
+            </a:pPr>
+            <a:r>
+              <a:t>原问卷规则：命中率 45.0%，找回率 39.1%。</a:t>
+            </a:r>
+          </a:p>
+        </p:txBody>
+      </p:sp>
+      <p:sp>
+        <p:nvSpPr>
+          <p:cNvPr id="7" name="TextBox 6"/>
+          <p:cNvSpPr txBox="1"/>
+          <p:nvPr/>
+        </p:nvSpPr>
+        <p:spPr>
+          <a:xfrm>
+            <a:off x="758952" y="3886200"/>
+            <a:ext cx="10561320" cy="932688"/>
+          </a:xfrm>
+          <a:prstGeom prst="rect">
+            <a:avLst/>
+          </a:prstGeom>
+          <a:noFill/>
+        </p:spPr>
+        <p:txBody>
+          <a:bodyPr wrap="square" lIns="18288" rIns="18288" tIns="9144" bIns="9144">
+            <a:spAutoFit/>
+          </a:bodyPr>
+          <a:lstStyle/>
+          <a:p>
+            <a:pPr>
+              <a:spcAft>
+                <a:spcPts val="1000"/>
+              </a:spcAft>
+              <a:defRPr sz="2200" b="0">
+                <a:solidFill>
+                  <a:srgbClr val="162A41"/>
+                </a:solidFill>
+                <a:latin typeface="Microsoft YaHei"/>
+              </a:defRPr>
+            </a:pPr>
+            <a:r>
+              <a:t>双源可用于优先核查的候选；2025 年问卷整体上移使未来稳定性仍待验证。</a:t>
+            </a:r>
+          </a:p>
+        </p:txBody>
+      </p:sp>
+      <p:sp>
+        <p:nvSpPr>
+          <p:cNvPr id="8" name="TextBox 7"/>
+          <p:cNvSpPr txBox="1"/>
+          <p:nvPr/>
+        </p:nvSpPr>
+        <p:spPr>
+          <a:xfrm>
+            <a:off x="758952" y="5276088"/>
+            <a:ext cx="10561320" cy="749808"/>
+          </a:xfrm>
+          <a:prstGeom prst="rect">
+            <a:avLst/>
+          </a:prstGeom>
+          <a:noFill/>
+        </p:spPr>
+        <p:txBody>
+          <a:bodyPr wrap="square" lIns="18288" rIns="18288" tIns="9144" bIns="9144">
+            <a:spAutoFit/>
+          </a:bodyPr>
+          <a:lstStyle/>
+          <a:p>
+            <a:pPr>
+              <a:spcAft>
+                <a:spcPts val="1000"/>
+              </a:spcAft>
+              <a:defRPr sz="1900" b="0">
+                <a:solidFill>
+                  <a:srgbClr val="C36623"/>
+                </a:solidFill>
+                <a:latin typeface="Microsoft YaHei"/>
+              </a:defRPr>
+            </a:pPr>
+            <a:r>
+              <a:t>扩大样本提升了观察范围，不能自动消除样本选择和跨平台口径问题。</a:t>
             </a:r>
           </a:p>
         </p:txBody>
@@ -5875,7 +5408,7 @@
               </a:defRPr>
             </a:pPr>
             <a:r>
-              <a:t>为什么改预警系统</a:t>
+              <a:t>本轮只改样本与年份</a:t>
             </a:r>
           </a:p>
         </p:txBody>
@@ -5914,7 +5447,7 @@
               </a:defRPr>
             </a:pPr>
             <a:r>
-              <a:t>依据：项目原始预警代码及本次双源回测</a:t>
+              <a:t>对照：前版结果 CSV；本轮结果 CSV 与官方调查原始数据</a:t>
             </a:r>
           </a:p>
         </p:txBody>
@@ -5958,16 +5491,484 @@
           </a:p>
         </p:txBody>
       </p:sp>
-      <p:sp>
-        <p:nvSpPr>
-          <p:cNvPr id="5" name="TextBox 4"/>
+      <p:graphicFrame>
+        <p:nvGraphicFramePr>
+          <p:cNvPr id="5" name="Table 4"/>
+          <p:cNvGraphicFramePr>
+            <a:graphicFrameLocks noGrp="1"/>
+          </p:cNvGraphicFramePr>
+          <p:nvPr/>
+        </p:nvGraphicFramePr>
+        <p:xfrm>
+          <a:off x="649224" y="1307592"/>
+          <a:ext cx="11247119" cy="3785616"/>
+        </p:xfrm>
+        <a:graphic>
+          <a:graphicData uri="http://schemas.openxmlformats.org/drawingml/2006/table">
+            <a:tbl>
+              <a:tblPr firstRow="1" bandRow="1">
+                <a:tableStyleId>{5C22544A-7EE6-4342-B048-85BDC9FD1C3A}</a:tableStyleId>
+              </a:tblPr>
+              <a:tblGrid>
+                <a:gridCol w="2926080"/>
+                <a:gridCol w="3977639"/>
+                <a:gridCol w="4343400"/>
+              </a:tblGrid>
+              <a:tr h="630936">
+                <a:tc>
+                  <a:txBody>
+                    <a:bodyPr/>
+                    <a:lstStyle/>
+                    <a:p>
+                      <a:pPr>
+                        <a:defRPr sz="1800" b="1">
+                          <a:solidFill>
+                            <a:srgbClr val="FFFFFF"/>
+                          </a:solidFill>
+                          <a:latin typeface="Microsoft YaHei"/>
+                        </a:defRPr>
+                      </a:pPr>
+                    </a:p>
+                  </a:txBody>
+                  <a:tcPr>
+                    <a:solidFill>
+                      <a:srgbClr val="162A41"/>
+                    </a:solidFill>
+                  </a:tcPr>
+                </a:tc>
+                <a:tc>
+                  <a:txBody>
+                    <a:bodyPr/>
+                    <a:lstStyle/>
+                    <a:p>
+                      <a:pPr>
+                        <a:defRPr sz="1800" b="1">
+                          <a:solidFill>
+                            <a:srgbClr val="FFFFFF"/>
+                          </a:solidFill>
+                          <a:latin typeface="Microsoft YaHei"/>
+                        </a:defRPr>
+                      </a:pPr>
+                      <a:r>
+                        <a:t>前版</a:t>
+                      </a:r>
+                    </a:p>
+                  </a:txBody>
+                  <a:tcPr>
+                    <a:solidFill>
+                      <a:srgbClr val="162A41"/>
+                    </a:solidFill>
+                  </a:tcPr>
+                </a:tc>
+                <a:tc>
+                  <a:txBody>
+                    <a:bodyPr/>
+                    <a:lstStyle/>
+                    <a:p>
+                      <a:pPr>
+                        <a:defRPr sz="1800" b="1">
+                          <a:solidFill>
+                            <a:srgbClr val="FFFFFF"/>
+                          </a:solidFill>
+                          <a:latin typeface="Microsoft YaHei"/>
+                        </a:defRPr>
+                      </a:pPr>
+                      <a:r>
+                        <a:t>本轮</a:t>
+                      </a:r>
+                    </a:p>
+                  </a:txBody>
+                  <a:tcPr>
+                    <a:solidFill>
+                      <a:srgbClr val="162A41"/>
+                    </a:solidFill>
+                  </a:tcPr>
+                </a:tc>
+              </a:tr>
+              <a:tr h="630936">
+                <a:tc>
+                  <a:txBody>
+                    <a:bodyPr/>
+                    <a:lstStyle/>
+                    <a:p>
+                      <a:pPr>
+                        <a:defRPr sz="1800" b="0">
+                          <a:solidFill>
+                            <a:srgbClr val="162A41"/>
+                          </a:solidFill>
+                          <a:latin typeface="Microsoft YaHei"/>
+                        </a:defRPr>
+                      </a:pPr>
+                      <a:r>
+                        <a:t>可评估技术</a:t>
+                      </a:r>
+                    </a:p>
+                  </a:txBody>
+                  <a:tcPr>
+                    <a:solidFill>
+                      <a:srgbClr val="EAF1F3"/>
+                    </a:solidFill>
+                  </a:tcPr>
+                </a:tc>
+                <a:tc>
+                  <a:txBody>
+                    <a:bodyPr/>
+                    <a:lstStyle/>
+                    <a:p>
+                      <a:pPr>
+                        <a:defRPr sz="1800" b="0">
+                          <a:solidFill>
+                            <a:srgbClr val="162A41"/>
+                          </a:solidFill>
+                          <a:latin typeface="Microsoft YaHei"/>
+                        </a:defRPr>
+                      </a:pPr>
+                      <a:r>
+                        <a:t>5 项</a:t>
+                      </a:r>
+                    </a:p>
+                  </a:txBody>
+                  <a:tcPr>
+                    <a:solidFill>
+                      <a:srgbClr val="EAF1F3"/>
+                    </a:solidFill>
+                  </a:tcPr>
+                </a:tc>
+                <a:tc>
+                  <a:txBody>
+                    <a:bodyPr/>
+                    <a:lstStyle/>
+                    <a:p>
+                      <a:pPr>
+                        <a:defRPr sz="1800" b="0">
+                          <a:solidFill>
+                            <a:srgbClr val="162A41"/>
+                          </a:solidFill>
+                          <a:latin typeface="Microsoft YaHei"/>
+                        </a:defRPr>
+                      </a:pPr>
+                      <a:r>
+                        <a:t>27 项</a:t>
+                      </a:r>
+                    </a:p>
+                  </a:txBody>
+                  <a:tcPr>
+                    <a:solidFill>
+                      <a:srgbClr val="EAF1F3"/>
+                    </a:solidFill>
+                  </a:tcPr>
+                </a:tc>
+              </a:tr>
+              <a:tr h="630936">
+                <a:tc>
+                  <a:txBody>
+                    <a:bodyPr/>
+                    <a:lstStyle/>
+                    <a:p>
+                      <a:pPr>
+                        <a:defRPr sz="1800" b="0">
+                          <a:solidFill>
+                            <a:srgbClr val="162A41"/>
+                          </a:solidFill>
+                          <a:latin typeface="Microsoft YaHei"/>
+                        </a:defRPr>
+                      </a:pPr>
+                      <a:r>
+                        <a:t>使用率结果记录</a:t>
+                      </a:r>
+                    </a:p>
+                  </a:txBody>
+                  <a:tcPr>
+                    <a:solidFill>
+                      <a:srgbClr val="F8FAFB"/>
+                    </a:solidFill>
+                  </a:tcPr>
+                </a:tc>
+                <a:tc>
+                  <a:txBody>
+                    <a:bodyPr/>
+                    <a:lstStyle/>
+                    <a:p>
+                      <a:pPr>
+                        <a:defRPr sz="1800" b="0">
+                          <a:solidFill>
+                            <a:srgbClr val="162A41"/>
+                          </a:solidFill>
+                          <a:latin typeface="Microsoft YaHei"/>
+                        </a:defRPr>
+                      </a:pPr>
+                      <a:r>
+                        <a:t>12 条</a:t>
+                      </a:r>
+                    </a:p>
+                  </a:txBody>
+                  <a:tcPr>
+                    <a:solidFill>
+                      <a:srgbClr val="F8FAFB"/>
+                    </a:solidFill>
+                  </a:tcPr>
+                </a:tc>
+                <a:tc>
+                  <a:txBody>
+                    <a:bodyPr/>
+                    <a:lstStyle/>
+                    <a:p>
+                      <a:pPr>
+                        <a:defRPr sz="1800" b="0">
+                          <a:solidFill>
+                            <a:srgbClr val="162A41"/>
+                          </a:solidFill>
+                          <a:latin typeface="Microsoft YaHei"/>
+                        </a:defRPr>
+                      </a:pPr>
+                      <a:r>
+                        <a:t>59 条</a:t>
+                      </a:r>
+                    </a:p>
+                  </a:txBody>
+                  <a:tcPr>
+                    <a:solidFill>
+                      <a:srgbClr val="F8FAFB"/>
+                    </a:solidFill>
+                  </a:tcPr>
+                </a:tc>
+              </a:tr>
+              <a:tr h="630936">
+                <a:tc>
+                  <a:txBody>
+                    <a:bodyPr/>
+                    <a:lstStyle/>
+                    <a:p>
+                      <a:pPr>
+                        <a:defRPr sz="1800" b="0">
+                          <a:solidFill>
+                            <a:srgbClr val="162A41"/>
+                          </a:solidFill>
+                          <a:latin typeface="Microsoft YaHei"/>
+                        </a:defRPr>
+                      </a:pPr>
+                      <a:r>
+                        <a:t>评论量结果记录</a:t>
+                      </a:r>
+                    </a:p>
+                  </a:txBody>
+                  <a:tcPr>
+                    <a:solidFill>
+                      <a:srgbClr val="EAF1F3"/>
+                    </a:solidFill>
+                  </a:tcPr>
+                </a:tc>
+                <a:tc>
+                  <a:txBody>
+                    <a:bodyPr/>
+                    <a:lstStyle/>
+                    <a:p>
+                      <a:pPr>
+                        <a:defRPr sz="1800" b="0">
+                          <a:solidFill>
+                            <a:srgbClr val="162A41"/>
+                          </a:solidFill>
+                          <a:latin typeface="Microsoft YaHei"/>
+                        </a:defRPr>
+                      </a:pPr>
+                      <a:r>
+                        <a:t>17 条</a:t>
+                      </a:r>
+                    </a:p>
+                  </a:txBody>
+                  <a:tcPr>
+                    <a:solidFill>
+                      <a:srgbClr val="EAF1F3"/>
+                    </a:solidFill>
+                  </a:tcPr>
+                </a:tc>
+                <a:tc>
+                  <a:txBody>
+                    <a:bodyPr/>
+                    <a:lstStyle/>
+                    <a:p>
+                      <a:pPr>
+                        <a:defRPr sz="1800" b="0">
+                          <a:solidFill>
+                            <a:srgbClr val="162A41"/>
+                          </a:solidFill>
+                          <a:latin typeface="Microsoft YaHei"/>
+                        </a:defRPr>
+                      </a:pPr>
+                      <a:r>
+                        <a:t>61 条</a:t>
+                      </a:r>
+                    </a:p>
+                  </a:txBody>
+                  <a:tcPr>
+                    <a:solidFill>
+                      <a:srgbClr val="EAF1F3"/>
+                    </a:solidFill>
+                  </a:tcPr>
+                </a:tc>
+              </a:tr>
+              <a:tr h="630936">
+                <a:tc>
+                  <a:txBody>
+                    <a:bodyPr/>
+                    <a:lstStyle/>
+                    <a:p>
+                      <a:pPr>
+                        <a:defRPr sz="1800" b="0">
+                          <a:solidFill>
+                            <a:srgbClr val="162A41"/>
+                          </a:solidFill>
+                          <a:latin typeface="Microsoft YaHei"/>
+                        </a:defRPr>
+                      </a:pPr>
+                      <a:r>
+                        <a:t>预警年</a:t>
+                      </a:r>
+                    </a:p>
+                  </a:txBody>
+                  <a:tcPr>
+                    <a:solidFill>
+                      <a:srgbClr val="F8FAFB"/>
+                    </a:solidFill>
+                  </a:tcPr>
+                </a:tc>
+                <a:tc>
+                  <a:txBody>
+                    <a:bodyPr/>
+                    <a:lstStyle/>
+                    <a:p>
+                      <a:pPr>
+                        <a:defRPr sz="1800" b="0">
+                          <a:solidFill>
+                            <a:srgbClr val="162A41"/>
+                          </a:solidFill>
+                          <a:latin typeface="Microsoft YaHei"/>
+                        </a:defRPr>
+                      </a:pPr>
+                      <a:r>
+                        <a:t>较早的连续年份</a:t>
+                      </a:r>
+                    </a:p>
+                  </a:txBody>
+                  <a:tcPr>
+                    <a:solidFill>
+                      <a:srgbClr val="F8FAFB"/>
+                    </a:solidFill>
+                  </a:tcPr>
+                </a:tc>
+                <a:tc>
+                  <a:txBody>
+                    <a:bodyPr/>
+                    <a:lstStyle/>
+                    <a:p>
+                      <a:pPr>
+                        <a:defRPr sz="1800" b="0">
+                          <a:solidFill>
+                            <a:srgbClr val="162A41"/>
+                          </a:solidFill>
+                          <a:latin typeface="Microsoft YaHei"/>
+                        </a:defRPr>
+                      </a:pPr>
+                      <a:r>
+                        <a:t>2022—2024 年</a:t>
+                      </a:r>
+                    </a:p>
+                  </a:txBody>
+                  <a:tcPr>
+                    <a:solidFill>
+                      <a:srgbClr val="F8FAFB"/>
+                    </a:solidFill>
+                  </a:tcPr>
+                </a:tc>
+              </a:tr>
+              <a:tr h="630936">
+                <a:tc>
+                  <a:txBody>
+                    <a:bodyPr/>
+                    <a:lstStyle/>
+                    <a:p>
+                      <a:pPr>
+                        <a:defRPr sz="1800" b="0">
+                          <a:solidFill>
+                            <a:srgbClr val="162A41"/>
+                          </a:solidFill>
+                          <a:latin typeface="Microsoft YaHei"/>
+                        </a:defRPr>
+                      </a:pPr>
+                      <a:r>
+                        <a:t>最终结果年</a:t>
+                      </a:r>
+                    </a:p>
+                  </a:txBody>
+                  <a:tcPr>
+                    <a:solidFill>
+                      <a:srgbClr val="EAF1F3"/>
+                    </a:solidFill>
+                  </a:tcPr>
+                </a:tc>
+                <a:tc>
+                  <a:txBody>
+                    <a:bodyPr/>
+                    <a:lstStyle/>
+                    <a:p>
+                      <a:pPr>
+                        <a:defRPr sz="1800" b="0">
+                          <a:solidFill>
+                            <a:srgbClr val="162A41"/>
+                          </a:solidFill>
+                          <a:latin typeface="Microsoft YaHei"/>
+                        </a:defRPr>
+                      </a:pPr>
+                      <a:r>
+                        <a:t>截至 2023 年</a:t>
+                      </a:r>
+                    </a:p>
+                  </a:txBody>
+                  <a:tcPr>
+                    <a:solidFill>
+                      <a:srgbClr val="EAF1F3"/>
+                    </a:solidFill>
+                  </a:tcPr>
+                </a:tc>
+                <a:tc>
+                  <a:txBody>
+                    <a:bodyPr/>
+                    <a:lstStyle/>
+                    <a:p>
+                      <a:pPr>
+                        <a:defRPr sz="1800" b="0">
+                          <a:solidFill>
+                            <a:srgbClr val="162A41"/>
+                          </a:solidFill>
+                          <a:latin typeface="Microsoft YaHei"/>
+                        </a:defRPr>
+                      </a:pPr>
+                      <a:r>
+                        <a:t>截至 2025 年</a:t>
+                      </a:r>
+                    </a:p>
+                  </a:txBody>
+                  <a:tcPr>
+                    <a:solidFill>
+                      <a:srgbClr val="EAF1F3"/>
+                    </a:solidFill>
+                  </a:tcPr>
+                </a:tc>
+              </a:tr>
+            </a:tbl>
+          </a:graphicData>
+        </a:graphic>
+      </p:graphicFrame>
+      <p:sp>
+        <p:nvSpPr>
+          <p:cNvPr id="6" name="TextBox 5"/>
           <p:cNvSpPr txBox="1"/>
           <p:nvPr/>
         </p:nvSpPr>
         <p:spPr>
           <a:xfrm>
-            <a:off x="749808" y="1353312"/>
-            <a:ext cx="10607040" cy="822960"/>
+            <a:off x="740664" y="5705856"/>
+            <a:ext cx="10789920" cy="521207"/>
           </a:xfrm>
           <a:prstGeom prst="rect">
             <a:avLst/>
@@ -5984,93 +5985,15 @@
               <a:spcAft>
                 <a:spcPts val="1000"/>
               </a:spcAft>
-              <a:defRPr sz="2500" b="1">
+              <a:defRPr sz="1800" b="0">
                 <a:solidFill>
-                  <a:srgbClr val="162A41"/>
+                  <a:srgbClr val="C36623"/>
                 </a:solidFill>
                 <a:latin typeface="Microsoft YaHei"/>
               </a:defRPr>
             </a:pPr>
             <a:r>
-              <a:t>原系统的使用率、想用率、欣赏率都来自同一份调查。</a:t>
-            </a:r>
-          </a:p>
-        </p:txBody>
-      </p:sp>
-      <p:sp>
-        <p:nvSpPr>
-          <p:cNvPr id="6" name="TextBox 5"/>
-          <p:cNvSpPr txBox="1"/>
-          <p:nvPr/>
-        </p:nvSpPr>
-        <p:spPr>
-          <a:xfrm>
-            <a:off x="749808" y="2633472"/>
-            <a:ext cx="10515600" cy="822960"/>
-          </a:xfrm>
-          <a:prstGeom prst="rect">
-            <a:avLst/>
-          </a:prstGeom>
-          <a:noFill/>
-        </p:spPr>
-        <p:txBody>
-          <a:bodyPr wrap="square" lIns="18288" rIns="18288" tIns="9144" bIns="9144">
-            <a:spAutoFit/>
-          </a:bodyPr>
-          <a:lstStyle/>
-          <a:p>
-            <a:pPr>
-              <a:spcAft>
-                <a:spcPts val="1000"/>
-              </a:spcAft>
-              <a:defRPr sz="2400" b="0">
-                <a:solidFill>
-                  <a:srgbClr val="007E80"/>
-                </a:solidFill>
-                <a:latin typeface="Microsoft YaHei"/>
-              </a:defRPr>
-            </a:pPr>
-            <a:r>
-              <a:t>新增独立的 GitHub 主仓评论量，观察社区讨论是否也在收缩。</a:t>
-            </a:r>
-          </a:p>
-        </p:txBody>
-      </p:sp>
-      <p:sp>
-        <p:nvSpPr>
-          <p:cNvPr id="7" name="TextBox 6"/>
-          <p:cNvSpPr txBox="1"/>
-          <p:nvPr/>
-        </p:nvSpPr>
-        <p:spPr>
-          <a:xfrm>
-            <a:off x="749808" y="4178808"/>
-            <a:ext cx="10607040" cy="914400"/>
-          </a:xfrm>
-          <a:prstGeom prst="rect">
-            <a:avLst/>
-          </a:prstGeom>
-          <a:noFill/>
-        </p:spPr>
-        <p:txBody>
-          <a:bodyPr wrap="square" lIns="18288" rIns="18288" tIns="9144" bIns="9144">
-            <a:spAutoFit/>
-          </a:bodyPr>
-          <a:lstStyle/>
-          <a:p>
-            <a:pPr>
-              <a:spcAft>
-                <a:spcPts val="1000"/>
-              </a:spcAft>
-              <a:defRPr sz="2300" b="0">
-                <a:solidFill>
-                  <a:srgbClr val="162A41"/>
-                </a:solidFill>
-                <a:latin typeface="Microsoft YaHei"/>
-              </a:defRPr>
-            </a:pPr>
-            <a:r>
-              <a:t>目标：把预警变成可操作的核查顺序，并检验它是否比旧规则更准。</a:t>
+              <a:t>两版的规则和命中定义相同；不同样本的百分比不可当作模型提升直接相减。</a:t>
             </a:r>
           </a:p>
         </p:txBody>
@@ -6135,7 +6058,7 @@
               </a:defRPr>
             </a:pPr>
             <a:r>
-              <a:t>新版三维分别看什么</a:t>
+              <a:t>规则保持不变</a:t>
             </a:r>
           </a:p>
         </p:txBody>
@@ -6174,7 +6097,7 @@
               </a:defRPr>
             </a:pPr>
             <a:r>
-              <a:t>问卷指标来自 panel.csv；评论数来自 GitHub 公开 Issue/PR 对话评论</a:t>
+              <a:t>问卷：Stack Overflow；评论：GitHub 主仓 Issue/PR 对话评论</a:t>
             </a:r>
           </a:p>
         </p:txBody>
@@ -6227,8 +6150,8 @@
           <p:nvPr/>
         </p:nvGraphicFramePr>
         <p:xfrm>
-          <a:off x="649224" y="1426464"/>
-          <a:ext cx="11247120" cy="3328416"/>
+          <a:off x="658368" y="1380744"/>
+          <a:ext cx="11247120" cy="3218688"/>
         </p:xfrm>
         <a:graphic>
           <a:graphicData uri="http://schemas.openxmlformats.org/drawingml/2006/table">
@@ -6237,11 +6160,11 @@
                 <a:tableStyleId>{5C22544A-7EE6-4342-B048-85BDC9FD1C3A}</a:tableStyleId>
               </a:tblPr>
               <a:tblGrid>
-                <a:gridCol w="2194560"/>
-                <a:gridCol w="4251960"/>
-                <a:gridCol w="4800600"/>
+                <a:gridCol w="2148840"/>
+                <a:gridCol w="4572000"/>
+                <a:gridCol w="4526280"/>
               </a:tblGrid>
-              <a:tr h="832104">
+              <a:tr h="804672">
                 <a:tc>
                   <a:txBody>
                     <a:bodyPr/>
@@ -6280,7 +6203,7 @@
                         </a:defRPr>
                       </a:pPr>
                       <a:r>
-                        <a:t>具体指标</a:t>
+                        <a:t>当年可用数据</a:t>
                       </a:r>
                     </a:p>
                   </a:txBody>
@@ -6304,7 +6227,7 @@
                         </a:defRPr>
                       </a:pPr>
                       <a:r>
-                        <a:t>在预警中的用途</a:t>
+                        <a:t>作用</a:t>
                       </a:r>
                     </a:p>
                   </a:txBody>
@@ -6315,7 +6238,7 @@
                   </a:tcPr>
                 </a:tc>
               </a:tr>
-              <a:tr h="832104">
+              <a:tr h="804672">
                 <a:tc>
                   <a:txBody>
                     <a:bodyPr/>
@@ -6354,7 +6277,7 @@
                         </a:defRPr>
                       </a:pPr>
                       <a:r>
-                        <a:t>当年问卷使用率</a:t>
+                        <a:t>问卷使用率</a:t>
                       </a:r>
                     </a:p>
                   </a:txBody>
@@ -6378,7 +6301,7 @@
                         </a:defRPr>
                       </a:pPr>
                       <a:r>
-                        <a:t>同级警报中优先核查影响面较大的技术</a:t>
+                        <a:t>同级警报中安排核查顺序</a:t>
                       </a:r>
                     </a:p>
                   </a:txBody>
@@ -6389,7 +6312,7 @@
                   </a:tcPr>
                 </a:tc>
               </a:tr>
-              <a:tr h="832104">
+              <a:tr h="804672">
                 <a:tc>
                   <a:txBody>
                     <a:bodyPr/>
@@ -6452,7 +6375,7 @@
                         </a:defRPr>
                       </a:pPr>
                       <a:r>
-                        <a:t>发出问卷警报</a:t>
+                        <a:t>问卷警报</a:t>
                       </a:r>
                     </a:p>
                   </a:txBody>
@@ -6463,7 +6386,7 @@
                   </a:tcPr>
                 </a:tc>
               </a:tr>
-              <a:tr h="832104">
+              <a:tr h="804672">
                 <a:tc>
                   <a:txBody>
                     <a:bodyPr/>
@@ -6502,7 +6425,7 @@
                         </a:defRPr>
                       </a:pPr>
                       <a:r>
-                        <a:t>主仓评论数较上一年下降</a:t>
+                        <a:t>当年评论量比上年少</a:t>
                       </a:r>
                     </a:p>
                   </a:txBody>
@@ -6526,7 +6449,7 @@
                         </a:defRPr>
                       </a:pPr>
                       <a:r>
-                        <a:t>发出评论警报</a:t>
+                        <a:t>评论警报</a:t>
                       </a:r>
                     </a:p>
                   </a:txBody>
@@ -6549,8 +6472,8 @@
         </p:nvSpPr>
         <p:spPr>
           <a:xfrm>
-            <a:off x="749808" y="5193792"/>
-            <a:ext cx="10607040" cy="640080"/>
+            <a:off x="758952" y="5084064"/>
+            <a:ext cx="10607040" cy="658368"/>
           </a:xfrm>
           <a:prstGeom prst="rect">
             <a:avLst/>
@@ -6569,13 +6492,52 @@
               </a:spcAft>
               <a:defRPr sz="2000" b="0">
                 <a:solidFill>
+                  <a:srgbClr val="007E80"/>
+                </a:solidFill>
+                <a:latin typeface="Microsoft YaHei"/>
+              </a:defRPr>
+            </a:pPr>
+            <a:r>
+              <a:t>双源＝两种警报同时出现；任一信号＝出现其中一种就警报。</a:t>
+            </a:r>
+          </a:p>
+        </p:txBody>
+      </p:sp>
+      <p:sp>
+        <p:nvSpPr>
+          <p:cNvPr id="7" name="TextBox 6"/>
+          <p:cNvSpPr txBox="1"/>
+          <p:nvPr/>
+        </p:nvSpPr>
+        <p:spPr>
+          <a:xfrm>
+            <a:off x="758952" y="5641848"/>
+            <a:ext cx="10607040" cy="566928"/>
+          </a:xfrm>
+          <a:prstGeom prst="rect">
+            <a:avLst/>
+          </a:prstGeom>
+          <a:noFill/>
+        </p:spPr>
+        <p:txBody>
+          <a:bodyPr wrap="square" lIns="18288" rIns="18288" tIns="9144" bIns="9144">
+            <a:spAutoFit/>
+          </a:bodyPr>
+          <a:lstStyle/>
+          <a:p>
+            <a:pPr>
+              <a:spcAft>
+                <a:spcPts val="1000"/>
+              </a:spcAft>
+              <a:defRPr sz="1800" b="0">
+                <a:solidFill>
                   <a:srgbClr val="C36623"/>
                 </a:solidFill>
                 <a:latin typeface="Microsoft YaHei"/>
               </a:defRPr>
             </a:pPr>
             <a:r>
-              <a:t>评论量衡量讨论数量，不等于满意度；使用率用于排序，不冒充衰退概率。</a:t>
+              <a:t>评论量是讨论数量，不代表满意度或技术整体用户规模。</a:t>
             </a:r>
           </a:p>
         </p:txBody>
@@ -6640,7 +6602,7 @@
               </a:defRPr>
             </a:pPr>
             <a:r>
-              <a:t>双源预警怎样发出</a:t>
+              <a:t>怎么检验：先警报，再看下一年</a:t>
             </a:r>
           </a:p>
         </p:txBody>
@@ -6679,7 +6641,7 @@
               </a:defRPr>
             </a:pPr>
             <a:r>
-              <a:t>阈值在回测前固定；只使用当年及以前的信息</a:t>
+              <a:t>源数据：panel_extended.csv；github_comment_yearly.csv</a:t>
             </a:r>
           </a:p>
         </p:txBody>
@@ -6723,534 +6685,16 @@
           </a:p>
         </p:txBody>
       </p:sp>
-      <p:graphicFrame>
-        <p:nvGraphicFramePr>
-          <p:cNvPr id="5" name="Table 4"/>
-          <p:cNvGraphicFramePr>
-            <a:graphicFrameLocks noGrp="1"/>
-          </p:cNvGraphicFramePr>
-          <p:nvPr/>
-        </p:nvGraphicFramePr>
-        <p:xfrm>
-          <a:off x="594360" y="1307592"/>
-          <a:ext cx="11247120" cy="3566160"/>
-        </p:xfrm>
-        <a:graphic>
-          <a:graphicData uri="http://schemas.openxmlformats.org/drawingml/2006/table">
-            <a:tbl>
-              <a:tblPr firstRow="1" bandRow="1">
-                <a:tableStyleId>{5C22544A-7EE6-4342-B048-85BDC9FD1C3A}</a:tableStyleId>
-              </a:tblPr>
-              <a:tblGrid>
-                <a:gridCol w="1920240"/>
-                <a:gridCol w="1920240"/>
-                <a:gridCol w="2423160"/>
-                <a:gridCol w="4983480"/>
-              </a:tblGrid>
-              <a:tr h="713232">
-                <a:tc>
-                  <a:txBody>
-                    <a:bodyPr/>
-                    <a:lstStyle/>
-                    <a:p>
-                      <a:pPr>
-                        <a:defRPr sz="1600" b="1">
-                          <a:solidFill>
-                            <a:srgbClr val="FFFFFF"/>
-                          </a:solidFill>
-                          <a:latin typeface="Microsoft YaHei"/>
-                        </a:defRPr>
-                      </a:pPr>
-                      <a:r>
-                        <a:t>问卷警报</a:t>
-                      </a:r>
-                    </a:p>
-                  </a:txBody>
-                  <a:tcPr>
-                    <a:solidFill>
-                      <a:srgbClr val="162A41"/>
-                    </a:solidFill>
-                  </a:tcPr>
-                </a:tc>
-                <a:tc>
-                  <a:txBody>
-                    <a:bodyPr/>
-                    <a:lstStyle/>
-                    <a:p>
-                      <a:pPr>
-                        <a:defRPr sz="1600" b="1">
-                          <a:solidFill>
-                            <a:srgbClr val="FFFFFF"/>
-                          </a:solidFill>
-                          <a:latin typeface="Microsoft YaHei"/>
-                        </a:defRPr>
-                      </a:pPr>
-                      <a:r>
-                        <a:t>评论警报</a:t>
-                      </a:r>
-                    </a:p>
-                  </a:txBody>
-                  <a:tcPr>
-                    <a:solidFill>
-                      <a:srgbClr val="162A41"/>
-                    </a:solidFill>
-                  </a:tcPr>
-                </a:tc>
-                <a:tc>
-                  <a:txBody>
-                    <a:bodyPr/>
-                    <a:lstStyle/>
-                    <a:p>
-                      <a:pPr>
-                        <a:defRPr sz="1600" b="1">
-                          <a:solidFill>
-                            <a:srgbClr val="FFFFFF"/>
-                          </a:solidFill>
-                          <a:latin typeface="Microsoft YaHei"/>
-                        </a:defRPr>
-                      </a:pPr>
-                      <a:r>
-                        <a:t>输出</a:t>
-                      </a:r>
-                    </a:p>
-                  </a:txBody>
-                  <a:tcPr>
-                    <a:solidFill>
-                      <a:srgbClr val="162A41"/>
-                    </a:solidFill>
-                  </a:tcPr>
-                </a:tc>
-                <a:tc>
-                  <a:txBody>
-                    <a:bodyPr/>
-                    <a:lstStyle/>
-                    <a:p>
-                      <a:pPr>
-                        <a:defRPr sz="1600" b="1">
-                          <a:solidFill>
-                            <a:srgbClr val="FFFFFF"/>
-                          </a:solidFill>
-                          <a:latin typeface="Microsoft YaHei"/>
-                        </a:defRPr>
-                      </a:pPr>
-                      <a:r>
-                        <a:t>核查动作</a:t>
-                      </a:r>
-                    </a:p>
-                  </a:txBody>
-                  <a:tcPr>
-                    <a:solidFill>
-                      <a:srgbClr val="162A41"/>
-                    </a:solidFill>
-                  </a:tcPr>
-                </a:tc>
-              </a:tr>
-              <a:tr h="713232">
-                <a:tc>
-                  <a:txBody>
-                    <a:bodyPr/>
-                    <a:lstStyle/>
-                    <a:p>
-                      <a:pPr>
-                        <a:defRPr sz="1600" b="0">
-                          <a:solidFill>
-                            <a:srgbClr val="162A41"/>
-                          </a:solidFill>
-                          <a:latin typeface="Microsoft YaHei"/>
-                        </a:defRPr>
-                      </a:pPr>
-                      <a:r>
-                        <a:t>有</a:t>
-                      </a:r>
-                    </a:p>
-                  </a:txBody>
-                  <a:tcPr>
-                    <a:solidFill>
-                      <a:srgbClr val="EAF1F3"/>
-                    </a:solidFill>
-                  </a:tcPr>
-                </a:tc>
-                <a:tc>
-                  <a:txBody>
-                    <a:bodyPr/>
-                    <a:lstStyle/>
-                    <a:p>
-                      <a:pPr>
-                        <a:defRPr sz="1600" b="0">
-                          <a:solidFill>
-                            <a:srgbClr val="162A41"/>
-                          </a:solidFill>
-                          <a:latin typeface="Microsoft YaHei"/>
-                        </a:defRPr>
-                      </a:pPr>
-                      <a:r>
-                        <a:t>有</a:t>
-                      </a:r>
-                    </a:p>
-                  </a:txBody>
-                  <a:tcPr>
-                    <a:solidFill>
-                      <a:srgbClr val="EAF1F3"/>
-                    </a:solidFill>
-                  </a:tcPr>
-                </a:tc>
-                <a:tc>
-                  <a:txBody>
-                    <a:bodyPr/>
-                    <a:lstStyle/>
-                    <a:p>
-                      <a:pPr>
-                        <a:defRPr sz="1600" b="0">
-                          <a:solidFill>
-                            <a:srgbClr val="162A41"/>
-                          </a:solidFill>
-                          <a:latin typeface="Microsoft YaHei"/>
-                        </a:defRPr>
-                      </a:pPr>
-                      <a:r>
-                        <a:t>双源收缩</a:t>
-                      </a:r>
-                    </a:p>
-                  </a:txBody>
-                  <a:tcPr>
-                    <a:solidFill>
-                      <a:srgbClr val="EAF1F3"/>
-                    </a:solidFill>
-                  </a:tcPr>
-                </a:tc>
-                <a:tc>
-                  <a:txBody>
-                    <a:bodyPr/>
-                    <a:lstStyle/>
-                    <a:p>
-                      <a:pPr>
-                        <a:defRPr sz="1600" b="0">
-                          <a:solidFill>
-                            <a:srgbClr val="162A41"/>
-                          </a:solidFill>
-                          <a:latin typeface="Microsoft YaHei"/>
-                        </a:defRPr>
-                      </a:pPr>
-                      <a:r>
-                        <a:t>优先人工核查</a:t>
-                      </a:r>
-                    </a:p>
-                  </a:txBody>
-                  <a:tcPr>
-                    <a:solidFill>
-                      <a:srgbClr val="EAF1F3"/>
-                    </a:solidFill>
-                  </a:tcPr>
-                </a:tc>
-              </a:tr>
-              <a:tr h="713232">
-                <a:tc>
-                  <a:txBody>
-                    <a:bodyPr/>
-                    <a:lstStyle/>
-                    <a:p>
-                      <a:pPr>
-                        <a:defRPr sz="1600" b="0">
-                          <a:solidFill>
-                            <a:srgbClr val="162A41"/>
-                          </a:solidFill>
-                          <a:latin typeface="Microsoft YaHei"/>
-                        </a:defRPr>
-                      </a:pPr>
-                      <a:r>
-                        <a:t>有</a:t>
-                      </a:r>
-                    </a:p>
-                  </a:txBody>
-                  <a:tcPr>
-                    <a:solidFill>
-                      <a:srgbClr val="F8FAFB"/>
-                    </a:solidFill>
-                  </a:tcPr>
-                </a:tc>
-                <a:tc>
-                  <a:txBody>
-                    <a:bodyPr/>
-                    <a:lstStyle/>
-                    <a:p>
-                      <a:pPr>
-                        <a:defRPr sz="1600" b="0">
-                          <a:solidFill>
-                            <a:srgbClr val="162A41"/>
-                          </a:solidFill>
-                          <a:latin typeface="Microsoft YaHei"/>
-                        </a:defRPr>
-                      </a:pPr>
-                      <a:r>
-                        <a:t>无</a:t>
-                      </a:r>
-                    </a:p>
-                  </a:txBody>
-                  <a:tcPr>
-                    <a:solidFill>
-                      <a:srgbClr val="F8FAFB"/>
-                    </a:solidFill>
-                  </a:tcPr>
-                </a:tc>
-                <a:tc>
-                  <a:txBody>
-                    <a:bodyPr/>
-                    <a:lstStyle/>
-                    <a:p>
-                      <a:pPr>
-                        <a:defRPr sz="1600" b="0">
-                          <a:solidFill>
-                            <a:srgbClr val="162A41"/>
-                          </a:solidFill>
-                          <a:latin typeface="Microsoft YaHei"/>
-                        </a:defRPr>
-                      </a:pPr>
-                      <a:r>
-                        <a:t>问卷单源警报</a:t>
-                      </a:r>
-                    </a:p>
-                  </a:txBody>
-                  <a:tcPr>
-                    <a:solidFill>
-                      <a:srgbClr val="F8FAFB"/>
-                    </a:solidFill>
-                  </a:tcPr>
-                </a:tc>
-                <a:tc>
-                  <a:txBody>
-                    <a:bodyPr/>
-                    <a:lstStyle/>
-                    <a:p>
-                      <a:pPr>
-                        <a:defRPr sz="1600" b="0">
-                          <a:solidFill>
-                            <a:srgbClr val="162A41"/>
-                          </a:solidFill>
-                          <a:latin typeface="Microsoft YaHei"/>
-                        </a:defRPr>
-                      </a:pPr>
-                      <a:r>
-                        <a:t>检查问卷口径与仓库代表性</a:t>
-                      </a:r>
-                    </a:p>
-                  </a:txBody>
-                  <a:tcPr>
-                    <a:solidFill>
-                      <a:srgbClr val="F8FAFB"/>
-                    </a:solidFill>
-                  </a:tcPr>
-                </a:tc>
-              </a:tr>
-              <a:tr h="713232">
-                <a:tc>
-                  <a:txBody>
-                    <a:bodyPr/>
-                    <a:lstStyle/>
-                    <a:p>
-                      <a:pPr>
-                        <a:defRPr sz="1600" b="0">
-                          <a:solidFill>
-                            <a:srgbClr val="162A41"/>
-                          </a:solidFill>
-                          <a:latin typeface="Microsoft YaHei"/>
-                        </a:defRPr>
-                      </a:pPr>
-                      <a:r>
-                        <a:t>无</a:t>
-                      </a:r>
-                    </a:p>
-                  </a:txBody>
-                  <a:tcPr>
-                    <a:solidFill>
-                      <a:srgbClr val="EAF1F3"/>
-                    </a:solidFill>
-                  </a:tcPr>
-                </a:tc>
-                <a:tc>
-                  <a:txBody>
-                    <a:bodyPr/>
-                    <a:lstStyle/>
-                    <a:p>
-                      <a:pPr>
-                        <a:defRPr sz="1600" b="0">
-                          <a:solidFill>
-                            <a:srgbClr val="162A41"/>
-                          </a:solidFill>
-                          <a:latin typeface="Microsoft YaHei"/>
-                        </a:defRPr>
-                      </a:pPr>
-                      <a:r>
-                        <a:t>有</a:t>
-                      </a:r>
-                    </a:p>
-                  </a:txBody>
-                  <a:tcPr>
-                    <a:solidFill>
-                      <a:srgbClr val="EAF1F3"/>
-                    </a:solidFill>
-                  </a:tcPr>
-                </a:tc>
-                <a:tc>
-                  <a:txBody>
-                    <a:bodyPr/>
-                    <a:lstStyle/>
-                    <a:p>
-                      <a:pPr>
-                        <a:defRPr sz="1600" b="0">
-                          <a:solidFill>
-                            <a:srgbClr val="162A41"/>
-                          </a:solidFill>
-                          <a:latin typeface="Microsoft YaHei"/>
-                        </a:defRPr>
-                      </a:pPr>
-                      <a:r>
-                        <a:t>评论单源警报</a:t>
-                      </a:r>
-                    </a:p>
-                  </a:txBody>
-                  <a:tcPr>
-                    <a:solidFill>
-                      <a:srgbClr val="EAF1F3"/>
-                    </a:solidFill>
-                  </a:tcPr>
-                </a:tc>
-                <a:tc>
-                  <a:txBody>
-                    <a:bodyPr/>
-                    <a:lstStyle/>
-                    <a:p>
-                      <a:pPr>
-                        <a:defRPr sz="1600" b="0">
-                          <a:solidFill>
-                            <a:srgbClr val="162A41"/>
-                          </a:solidFill>
-                          <a:latin typeface="Microsoft YaHei"/>
-                        </a:defRPr>
-                      </a:pPr>
-                      <a:r>
-                        <a:t>检查项目维护及讨论变化</a:t>
-                      </a:r>
-                    </a:p>
-                  </a:txBody>
-                  <a:tcPr>
-                    <a:solidFill>
-                      <a:srgbClr val="EAF1F3"/>
-                    </a:solidFill>
-                  </a:tcPr>
-                </a:tc>
-              </a:tr>
-              <a:tr h="713232">
-                <a:tc>
-                  <a:txBody>
-                    <a:bodyPr/>
-                    <a:lstStyle/>
-                    <a:p>
-                      <a:pPr>
-                        <a:defRPr sz="1600" b="0">
-                          <a:solidFill>
-                            <a:srgbClr val="162A41"/>
-                          </a:solidFill>
-                          <a:latin typeface="Microsoft YaHei"/>
-                        </a:defRPr>
-                      </a:pPr>
-                      <a:r>
-                        <a:t>无</a:t>
-                      </a:r>
-                    </a:p>
-                  </a:txBody>
-                  <a:tcPr>
-                    <a:solidFill>
-                      <a:srgbClr val="F8FAFB"/>
-                    </a:solidFill>
-                  </a:tcPr>
-                </a:tc>
-                <a:tc>
-                  <a:txBody>
-                    <a:bodyPr/>
-                    <a:lstStyle/>
-                    <a:p>
-                      <a:pPr>
-                        <a:defRPr sz="1600" b="0">
-                          <a:solidFill>
-                            <a:srgbClr val="162A41"/>
-                          </a:solidFill>
-                          <a:latin typeface="Microsoft YaHei"/>
-                        </a:defRPr>
-                      </a:pPr>
-                      <a:r>
-                        <a:t>无</a:t>
-                      </a:r>
-                    </a:p>
-                  </a:txBody>
-                  <a:tcPr>
-                    <a:solidFill>
-                      <a:srgbClr val="F8FAFB"/>
-                    </a:solidFill>
-                  </a:tcPr>
-                </a:tc>
-                <a:tc>
-                  <a:txBody>
-                    <a:bodyPr/>
-                    <a:lstStyle/>
-                    <a:p>
-                      <a:pPr>
-                        <a:defRPr sz="1600" b="0">
-                          <a:solidFill>
-                            <a:srgbClr val="162A41"/>
-                          </a:solidFill>
-                          <a:latin typeface="Microsoft YaHei"/>
-                        </a:defRPr>
-                      </a:pPr>
-                      <a:r>
-                        <a:t>暂无收缩信号</a:t>
-                      </a:r>
-                    </a:p>
-                  </a:txBody>
-                  <a:tcPr>
-                    <a:solidFill>
-                      <a:srgbClr val="F8FAFB"/>
-                    </a:solidFill>
-                  </a:tcPr>
-                </a:tc>
-                <a:tc>
-                  <a:txBody>
-                    <a:bodyPr/>
-                    <a:lstStyle/>
-                    <a:p>
-                      <a:pPr>
-                        <a:defRPr sz="1600" b="0">
-                          <a:solidFill>
-                            <a:srgbClr val="162A41"/>
-                          </a:solidFill>
-                          <a:latin typeface="Microsoft YaHei"/>
-                        </a:defRPr>
-                      </a:pPr>
-                      <a:r>
-                        <a:t>继续观察</a:t>
-                      </a:r>
-                    </a:p>
-                  </a:txBody>
-                  <a:tcPr>
-                    <a:solidFill>
-                      <a:srgbClr val="F8FAFB"/>
-                    </a:solidFill>
-                  </a:tcPr>
-                </a:tc>
-              </a:tr>
-            </a:tbl>
-          </a:graphicData>
-        </a:graphic>
-      </p:graphicFrame>
-      <p:sp>
-        <p:nvSpPr>
-          <p:cNvPr id="6" name="TextBox 5"/>
+      <p:sp>
+        <p:nvSpPr>
+          <p:cNvPr id="5" name="TextBox 4"/>
           <p:cNvSpPr txBox="1"/>
           <p:nvPr/>
         </p:nvSpPr>
         <p:spPr>
           <a:xfrm>
-            <a:off x="704088" y="5586984"/>
-            <a:ext cx="10789920" cy="484632"/>
+            <a:off x="758952" y="1353312"/>
+            <a:ext cx="10698480" cy="731520"/>
           </a:xfrm>
           <a:prstGeom prst="rect">
             <a:avLst/>
@@ -7267,7 +6711,85 @@
               <a:spcAft>
                 <a:spcPts val="1000"/>
               </a:spcAft>
-              <a:defRPr sz="1800" b="0">
+              <a:defRPr sz="2300" b="0">
+                <a:solidFill>
+                  <a:srgbClr val="162A41"/>
+                </a:solidFill>
+                <a:latin typeface="Microsoft YaHei"/>
+              </a:defRPr>
+            </a:pPr>
+            <a:r>
+              <a:t>① 用 t－1 年和 t 年的问卷、评论量，决定 t 年是否报警。</a:t>
+            </a:r>
+          </a:p>
+        </p:txBody>
+      </p:sp>
+      <p:sp>
+        <p:nvSpPr>
+          <p:cNvPr id="6" name="TextBox 5"/>
+          <p:cNvSpPr txBox="1"/>
+          <p:nvPr/>
+        </p:nvSpPr>
+        <p:spPr>
+          <a:xfrm>
+            <a:off x="758952" y="2505456"/>
+            <a:ext cx="10698480" cy="731520"/>
+          </a:xfrm>
+          <a:prstGeom prst="rect">
+            <a:avLst/>
+          </a:prstGeom>
+          <a:noFill/>
+        </p:spPr>
+        <p:txBody>
+          <a:bodyPr wrap="square" lIns="18288" rIns="18288" tIns="9144" bIns="9144">
+            <a:spAutoFit/>
+          </a:bodyPr>
+          <a:lstStyle/>
+          <a:p>
+            <a:pPr>
+              <a:spcAft>
+                <a:spcPts val="1000"/>
+              </a:spcAft>
+              <a:defRPr sz="2300" b="0">
+                <a:solidFill>
+                  <a:srgbClr val="162A41"/>
+                </a:solidFill>
+                <a:latin typeface="Microsoft YaHei"/>
+              </a:defRPr>
+            </a:pPr>
+            <a:r>
+              <a:t>② 用 t＋1 年问卷使用率或评论量，核对当年的警报。</a:t>
+            </a:r>
+          </a:p>
+        </p:txBody>
+      </p:sp>
+      <p:sp>
+        <p:nvSpPr>
+          <p:cNvPr id="7" name="TextBox 6"/>
+          <p:cNvSpPr txBox="1"/>
+          <p:nvPr/>
+        </p:nvSpPr>
+        <p:spPr>
+          <a:xfrm>
+            <a:off x="758952" y="3675887"/>
+            <a:ext cx="10698480" cy="1005840"/>
+          </a:xfrm>
+          <a:prstGeom prst="rect">
+            <a:avLst/>
+          </a:prstGeom>
+          <a:noFill/>
+        </p:spPr>
+        <p:txBody>
+          <a:bodyPr wrap="square" lIns="18288" rIns="18288" tIns="9144" bIns="9144">
+            <a:spAutoFit/>
+          </a:bodyPr>
+          <a:lstStyle/>
+          <a:p>
+            <a:pPr>
+              <a:spcAft>
+                <a:spcPts val="1000"/>
+              </a:spcAft>
+              <a:defRPr sz="2200" b="0">
                 <a:solidFill>
                   <a:srgbClr val="007E80"/>
                 </a:solidFill>
@@ -7275,7 +6797,46 @@
               </a:defRPr>
             </a:pPr>
             <a:r>
-              <a:t>历史年份不连续时输出“历史不足”，不把缺数据算成安全。</a:t>
+              <a:t>③ 逐年记录命中、误报、漏报和正确未报；四种规则用同一批有效记录。</a:t>
+            </a:r>
+          </a:p>
+        </p:txBody>
+      </p:sp>
+      <p:sp>
+        <p:nvSpPr>
+          <p:cNvPr id="8" name="TextBox 7"/>
+          <p:cNvSpPr txBox="1"/>
+          <p:nvPr/>
+        </p:nvSpPr>
+        <p:spPr>
+          <a:xfrm>
+            <a:off x="758952" y="5330952"/>
+            <a:ext cx="10698480" cy="786384"/>
+          </a:xfrm>
+          <a:prstGeom prst="rect">
+            <a:avLst/>
+          </a:prstGeom>
+          <a:noFill/>
+        </p:spPr>
+        <p:txBody>
+          <a:bodyPr wrap="square" lIns="18288" rIns="18288" tIns="9144" bIns="9144">
+            <a:spAutoFit/>
+          </a:bodyPr>
+          <a:lstStyle/>
+          <a:p>
+            <a:pPr>
+              <a:spcAft>
+                <a:spcPts val="1000"/>
+              </a:spcAft>
+              <a:defRPr sz="1800" b="0">
+                <a:solidFill>
+                  <a:srgbClr val="C36623"/>
+                </a:solidFill>
+                <a:latin typeface="Microsoft YaHei"/>
+              </a:defRPr>
+            </a:pPr>
+            <a:r>
+              <a:t>2025 年只作已完成的结果年；不把尚未结束的 2026 年当作回测结果。</a:t>
             </a:r>
           </a:p>
         </p:txBody>
@@ -7340,7 +6901,7 @@
               </a:defRPr>
             </a:pPr>
             <a:r>
-              <a:t>数据与检验范围</a:t>
+              <a:t>近期样本到底有多少</a:t>
             </a:r>
           </a:p>
         </p:txBody>
@@ -7379,7 +6940,7 @@
               </a:defRPr>
             </a:pPr>
             <a:r>
-              <a:t>来源：Stack Overflow 技术面板；GitHub 公开评论 API；逐项明细见结果 CSV</a:t>
+              <a:t>完整技术与仓库清单：multisignal_recent_coverage.csv</a:t>
             </a:r>
           </a:p>
         </p:txBody>
@@ -7423,16 +6984,413 @@
           </a:p>
         </p:txBody>
       </p:sp>
-      <p:sp>
-        <p:nvSpPr>
-          <p:cNvPr id="5" name="TextBox 4"/>
+      <p:graphicFrame>
+        <p:nvGraphicFramePr>
+          <p:cNvPr id="5" name="Table 4"/>
+          <p:cNvGraphicFramePr>
+            <a:graphicFrameLocks noGrp="1"/>
+          </p:cNvGraphicFramePr>
+          <p:nvPr/>
+        </p:nvGraphicFramePr>
+        <p:xfrm>
+          <a:off x="768096" y="1389888"/>
+          <a:ext cx="10881360" cy="3474720"/>
+        </p:xfrm>
+        <a:graphic>
+          <a:graphicData uri="http://schemas.openxmlformats.org/drawingml/2006/table">
+            <a:tbl>
+              <a:tblPr firstRow="1" bandRow="1">
+                <a:tableStyleId>{5C22544A-7EE6-4342-B048-85BDC9FD1C3A}</a:tableStyleId>
+              </a:tblPr>
+              <a:tblGrid>
+                <a:gridCol w="3017520"/>
+                <a:gridCol w="3931920"/>
+                <a:gridCol w="3931920"/>
+              </a:tblGrid>
+              <a:tr h="694944">
+                <a:tc>
+                  <a:txBody>
+                    <a:bodyPr/>
+                    <a:lstStyle/>
+                    <a:p>
+                      <a:pPr>
+                        <a:defRPr sz="1900" b="1">
+                          <a:solidFill>
+                            <a:srgbClr val="FFFFFF"/>
+                          </a:solidFill>
+                          <a:latin typeface="Microsoft YaHei"/>
+                        </a:defRPr>
+                      </a:pPr>
+                      <a:r>
+                        <a:t>预警年</a:t>
+                      </a:r>
+                    </a:p>
+                  </a:txBody>
+                  <a:tcPr>
+                    <a:solidFill>
+                      <a:srgbClr val="162A41"/>
+                    </a:solidFill>
+                  </a:tcPr>
+                </a:tc>
+                <a:tc>
+                  <a:txBody>
+                    <a:bodyPr/>
+                    <a:lstStyle/>
+                    <a:p>
+                      <a:pPr>
+                        <a:defRPr sz="1900" b="1">
+                          <a:solidFill>
+                            <a:srgbClr val="FFFFFF"/>
+                          </a:solidFill>
+                          <a:latin typeface="Microsoft YaHei"/>
+                        </a:defRPr>
+                      </a:pPr>
+                      <a:r>
+                        <a:t>使用率可评估</a:t>
+                      </a:r>
+                    </a:p>
+                  </a:txBody>
+                  <a:tcPr>
+                    <a:solidFill>
+                      <a:srgbClr val="162A41"/>
+                    </a:solidFill>
+                  </a:tcPr>
+                </a:tc>
+                <a:tc>
+                  <a:txBody>
+                    <a:bodyPr/>
+                    <a:lstStyle/>
+                    <a:p>
+                      <a:pPr>
+                        <a:defRPr sz="1900" b="1">
+                          <a:solidFill>
+                            <a:srgbClr val="FFFFFF"/>
+                          </a:solidFill>
+                          <a:latin typeface="Microsoft YaHei"/>
+                        </a:defRPr>
+                      </a:pPr>
+                      <a:r>
+                        <a:t>评论量可评估</a:t>
+                      </a:r>
+                    </a:p>
+                  </a:txBody>
+                  <a:tcPr>
+                    <a:solidFill>
+                      <a:srgbClr val="162A41"/>
+                    </a:solidFill>
+                  </a:tcPr>
+                </a:tc>
+              </a:tr>
+              <a:tr h="694944">
+                <a:tc>
+                  <a:txBody>
+                    <a:bodyPr/>
+                    <a:lstStyle/>
+                    <a:p>
+                      <a:pPr>
+                        <a:defRPr sz="1900" b="0">
+                          <a:solidFill>
+                            <a:srgbClr val="162A41"/>
+                          </a:solidFill>
+                          <a:latin typeface="Microsoft YaHei"/>
+                        </a:defRPr>
+                      </a:pPr>
+                      <a:r>
+                        <a:t>2022</a:t>
+                      </a:r>
+                    </a:p>
+                  </a:txBody>
+                  <a:tcPr>
+                    <a:solidFill>
+                      <a:srgbClr val="EAF1F3"/>
+                    </a:solidFill>
+                  </a:tcPr>
+                </a:tc>
+                <a:tc>
+                  <a:txBody>
+                    <a:bodyPr/>
+                    <a:lstStyle/>
+                    <a:p>
+                      <a:pPr>
+                        <a:defRPr sz="1900" b="0">
+                          <a:solidFill>
+                            <a:srgbClr val="162A41"/>
+                          </a:solidFill>
+                          <a:latin typeface="Microsoft YaHei"/>
+                        </a:defRPr>
+                      </a:pPr>
+                      <a:r>
+                        <a:t>15</a:t>
+                      </a:r>
+                    </a:p>
+                  </a:txBody>
+                  <a:tcPr>
+                    <a:solidFill>
+                      <a:srgbClr val="EAF1F3"/>
+                    </a:solidFill>
+                  </a:tcPr>
+                </a:tc>
+                <a:tc>
+                  <a:txBody>
+                    <a:bodyPr/>
+                    <a:lstStyle/>
+                    <a:p>
+                      <a:pPr>
+                        <a:defRPr sz="1900" b="0">
+                          <a:solidFill>
+                            <a:srgbClr val="162A41"/>
+                          </a:solidFill>
+                          <a:latin typeface="Microsoft YaHei"/>
+                        </a:defRPr>
+                      </a:pPr>
+                      <a:r>
+                        <a:t>15</a:t>
+                      </a:r>
+                    </a:p>
+                  </a:txBody>
+                  <a:tcPr>
+                    <a:solidFill>
+                      <a:srgbClr val="EAF1F3"/>
+                    </a:solidFill>
+                  </a:tcPr>
+                </a:tc>
+              </a:tr>
+              <a:tr h="694944">
+                <a:tc>
+                  <a:txBody>
+                    <a:bodyPr/>
+                    <a:lstStyle/>
+                    <a:p>
+                      <a:pPr>
+                        <a:defRPr sz="1900" b="0">
+                          <a:solidFill>
+                            <a:srgbClr val="162A41"/>
+                          </a:solidFill>
+                          <a:latin typeface="Microsoft YaHei"/>
+                        </a:defRPr>
+                      </a:pPr>
+                      <a:r>
+                        <a:t>2023</a:t>
+                      </a:r>
+                    </a:p>
+                  </a:txBody>
+                  <a:tcPr>
+                    <a:solidFill>
+                      <a:srgbClr val="F8FAFB"/>
+                    </a:solidFill>
+                  </a:tcPr>
+                </a:tc>
+                <a:tc>
+                  <a:txBody>
+                    <a:bodyPr/>
+                    <a:lstStyle/>
+                    <a:p>
+                      <a:pPr>
+                        <a:defRPr sz="1900" b="0">
+                          <a:solidFill>
+                            <a:srgbClr val="162A41"/>
+                          </a:solidFill>
+                          <a:latin typeface="Microsoft YaHei"/>
+                        </a:defRPr>
+                      </a:pPr>
+                      <a:r>
+                        <a:t>19</a:t>
+                      </a:r>
+                    </a:p>
+                  </a:txBody>
+                  <a:tcPr>
+                    <a:solidFill>
+                      <a:srgbClr val="F8FAFB"/>
+                    </a:solidFill>
+                  </a:tcPr>
+                </a:tc>
+                <a:tc>
+                  <a:txBody>
+                    <a:bodyPr/>
+                    <a:lstStyle/>
+                    <a:p>
+                      <a:pPr>
+                        <a:defRPr sz="1900" b="0">
+                          <a:solidFill>
+                            <a:srgbClr val="162A41"/>
+                          </a:solidFill>
+                          <a:latin typeface="Microsoft YaHei"/>
+                        </a:defRPr>
+                      </a:pPr>
+                      <a:r>
+                        <a:t>19</a:t>
+                      </a:r>
+                    </a:p>
+                  </a:txBody>
+                  <a:tcPr>
+                    <a:solidFill>
+                      <a:srgbClr val="F8FAFB"/>
+                    </a:solidFill>
+                  </a:tcPr>
+                </a:tc>
+              </a:tr>
+              <a:tr h="694944">
+                <a:tc>
+                  <a:txBody>
+                    <a:bodyPr/>
+                    <a:lstStyle/>
+                    <a:p>
+                      <a:pPr>
+                        <a:defRPr sz="1900" b="0">
+                          <a:solidFill>
+                            <a:srgbClr val="162A41"/>
+                          </a:solidFill>
+                          <a:latin typeface="Microsoft YaHei"/>
+                        </a:defRPr>
+                      </a:pPr>
+                      <a:r>
+                        <a:t>2024</a:t>
+                      </a:r>
+                    </a:p>
+                  </a:txBody>
+                  <a:tcPr>
+                    <a:solidFill>
+                      <a:srgbClr val="EAF1F3"/>
+                    </a:solidFill>
+                  </a:tcPr>
+                </a:tc>
+                <a:tc>
+                  <a:txBody>
+                    <a:bodyPr/>
+                    <a:lstStyle/>
+                    <a:p>
+                      <a:pPr>
+                        <a:defRPr sz="1900" b="0">
+                          <a:solidFill>
+                            <a:srgbClr val="162A41"/>
+                          </a:solidFill>
+                          <a:latin typeface="Microsoft YaHei"/>
+                        </a:defRPr>
+                      </a:pPr>
+                      <a:r>
+                        <a:t>25</a:t>
+                      </a:r>
+                    </a:p>
+                  </a:txBody>
+                  <a:tcPr>
+                    <a:solidFill>
+                      <a:srgbClr val="EAF1F3"/>
+                    </a:solidFill>
+                  </a:tcPr>
+                </a:tc>
+                <a:tc>
+                  <a:txBody>
+                    <a:bodyPr/>
+                    <a:lstStyle/>
+                    <a:p>
+                      <a:pPr>
+                        <a:defRPr sz="1900" b="0">
+                          <a:solidFill>
+                            <a:srgbClr val="162A41"/>
+                          </a:solidFill>
+                          <a:latin typeface="Microsoft YaHei"/>
+                        </a:defRPr>
+                      </a:pPr>
+                      <a:r>
+                        <a:t>27</a:t>
+                      </a:r>
+                    </a:p>
+                  </a:txBody>
+                  <a:tcPr>
+                    <a:solidFill>
+                      <a:srgbClr val="EAF1F3"/>
+                    </a:solidFill>
+                  </a:tcPr>
+                </a:tc>
+              </a:tr>
+              <a:tr h="694944">
+                <a:tc>
+                  <a:txBody>
+                    <a:bodyPr/>
+                    <a:lstStyle/>
+                    <a:p>
+                      <a:pPr>
+                        <a:defRPr sz="1900" b="0">
+                          <a:solidFill>
+                            <a:srgbClr val="162A41"/>
+                          </a:solidFill>
+                          <a:latin typeface="Microsoft YaHei"/>
+                        </a:defRPr>
+                      </a:pPr>
+                      <a:r>
+                        <a:t>合计</a:t>
+                      </a:r>
+                    </a:p>
+                  </a:txBody>
+                  <a:tcPr>
+                    <a:solidFill>
+                      <a:srgbClr val="F8FAFB"/>
+                    </a:solidFill>
+                  </a:tcPr>
+                </a:tc>
+                <a:tc>
+                  <a:txBody>
+                    <a:bodyPr/>
+                    <a:lstStyle/>
+                    <a:p>
+                      <a:pPr>
+                        <a:defRPr sz="1900" b="0">
+                          <a:solidFill>
+                            <a:srgbClr val="162A41"/>
+                          </a:solidFill>
+                          <a:latin typeface="Microsoft YaHei"/>
+                        </a:defRPr>
+                      </a:pPr>
+                      <a:r>
+                        <a:t>59</a:t>
+                      </a:r>
+                    </a:p>
+                  </a:txBody>
+                  <a:tcPr>
+                    <a:solidFill>
+                      <a:srgbClr val="F8FAFB"/>
+                    </a:solidFill>
+                  </a:tcPr>
+                </a:tc>
+                <a:tc>
+                  <a:txBody>
+                    <a:bodyPr/>
+                    <a:lstStyle/>
+                    <a:p>
+                      <a:pPr>
+                        <a:defRPr sz="1900" b="0">
+                          <a:solidFill>
+                            <a:srgbClr val="162A41"/>
+                          </a:solidFill>
+                          <a:latin typeface="Microsoft YaHei"/>
+                        </a:defRPr>
+                      </a:pPr>
+                      <a:r>
+                        <a:t>61</a:t>
+                      </a:r>
+                    </a:p>
+                  </a:txBody>
+                  <a:tcPr>
+                    <a:solidFill>
+                      <a:srgbClr val="F8FAFB"/>
+                    </a:solidFill>
+                  </a:tcPr>
+                </a:tc>
+              </a:tr>
+            </a:tbl>
+          </a:graphicData>
+        </a:graphic>
+      </p:graphicFrame>
+      <p:sp>
+        <p:nvSpPr>
+          <p:cNvPr id="6" name="TextBox 5"/>
           <p:cNvSpPr txBox="1"/>
           <p:nvPr/>
         </p:nvSpPr>
         <p:spPr>
           <a:xfrm>
-            <a:off x="758952" y="1399032"/>
-            <a:ext cx="10515600" cy="548640"/>
+            <a:off x="795528" y="5340096"/>
+            <a:ext cx="10607040" cy="704088"/>
           </a:xfrm>
           <a:prstGeom prst="rect">
             <a:avLst/>
@@ -7449,7 +7407,7 @@
               <a:spcAft>
                 <a:spcPts val="1000"/>
               </a:spcAft>
-              <a:defRPr sz="2700" b="1">
+              <a:defRPr sz="2100" b="0">
                 <a:solidFill>
                   <a:srgbClr val="007E80"/>
                 </a:solidFill>
@@ -7457,21 +7415,21 @@
               </a:defRPr>
             </a:pPr>
             <a:r>
-              <a:t>7 个公开主仓的年度评论数</a:t>
-            </a:r>
-          </a:p>
-        </p:txBody>
-      </p:sp>
-      <p:sp>
-        <p:nvSpPr>
-          <p:cNvPr id="6" name="TextBox 5"/>
+              <a:t>纳入 27 项技术；一项技术在不同预警年可贡献多条记录。</a:t>
+            </a:r>
+          </a:p>
+        </p:txBody>
+      </p:sp>
+      <p:sp>
+        <p:nvSpPr>
+          <p:cNvPr id="7" name="TextBox 6"/>
           <p:cNvSpPr txBox="1"/>
           <p:nvPr/>
         </p:nvSpPr>
         <p:spPr>
           <a:xfrm>
-            <a:off x="758952" y="2276856"/>
-            <a:ext cx="10515600" cy="731520"/>
+            <a:off x="795528" y="5852160"/>
+            <a:ext cx="10607040" cy="438912"/>
           </a:xfrm>
           <a:prstGeom prst="rect">
             <a:avLst/>
@@ -7488,140 +7446,7 @@
               <a:spcAft>
                 <a:spcPts val="1000"/>
               </a:spcAft>
-              <a:defRPr sz="2200" b="0">
-                <a:solidFill>
-                  <a:srgbClr val="162A41"/>
-                </a:solidFill>
-                <a:latin typeface="Microsoft YaHei"/>
-              </a:defRPr>
-            </a:pPr>
-            <a:r>
-              <a:t>其中 5 项技术有连续问卷历史，可比较旧规则和新规则。</a:t>
-            </a:r>
-          </a:p>
-        </p:txBody>
-      </p:sp>
-      <p:sp>
-        <p:nvSpPr>
-          <p:cNvPr id="7" name="TextBox 6"/>
-          <p:cNvSpPr txBox="1"/>
-          <p:nvPr/>
-        </p:nvSpPr>
-        <p:spPr>
-          <a:xfrm>
-            <a:off x="758952" y="3364992"/>
-            <a:ext cx="10652760" cy="1143000"/>
-          </a:xfrm>
-          <a:prstGeom prst="rect">
-            <a:avLst/>
-          </a:prstGeom>
-          <a:noFill/>
-        </p:spPr>
-        <p:txBody>
-          <a:bodyPr wrap="square" lIns="18288" rIns="18288" tIns="9144" bIns="9144">
-            <a:spAutoFit/>
-          </a:bodyPr>
-          <a:lstStyle/>
-          <a:p>
-            <a:pPr>
-              <a:spcAft>
-                <a:spcPts val="1000"/>
-              </a:spcAft>
-              <a:defRPr sz="1800" b="0">
-                <a:solidFill>
-                  <a:srgbClr val="162A41"/>
-                </a:solidFill>
-                <a:latin typeface="Microsoft YaHei"/>
-              </a:defRPr>
-            </a:pPr>
-            <a:r>
-              <a:t>使用率检验：12 条＝Kotlin、Ruby 各 3 条；Express、Flask、jQuery 各 2 条。</a:t>
-            </a:r>
-          </a:p>
-          <a:p>
-            <a:pPr>
-              <a:spcAft>
-                <a:spcPts val="1000"/>
-              </a:spcAft>
-              <a:defRPr sz="1800" b="0">
-                <a:solidFill>
-                  <a:srgbClr val="162A41"/>
-                </a:solidFill>
-                <a:latin typeface="Microsoft YaHei"/>
-              </a:defRPr>
-            </a:pPr>
-            <a:r>
-              <a:t>评论量检验：17 条＝Kotlin、Ruby 各 4 条；Express、Flask、jQuery 各 3 条。</a:t>
-            </a:r>
-          </a:p>
-        </p:txBody>
-      </p:sp>
-      <p:sp>
-        <p:nvSpPr>
-          <p:cNvPr id="8" name="TextBox 7"/>
-          <p:cNvSpPr txBox="1"/>
-          <p:nvPr/>
-        </p:nvSpPr>
-        <p:spPr>
-          <a:xfrm>
-            <a:off x="758952" y="4672584"/>
-            <a:ext cx="10652760" cy="594360"/>
-          </a:xfrm>
-          <a:prstGeom prst="rect">
-            <a:avLst/>
-          </a:prstGeom>
-          <a:noFill/>
-        </p:spPr>
-        <p:txBody>
-          <a:bodyPr wrap="square" lIns="18288" rIns="18288" tIns="9144" bIns="9144">
-            <a:spAutoFit/>
-          </a:bodyPr>
-          <a:lstStyle/>
-          <a:p>
-            <a:pPr>
-              <a:spcAft>
-                <a:spcPts val="1000"/>
-              </a:spcAft>
-              <a:defRPr sz="1700" b="0">
-                <a:solidFill>
-                  <a:srgbClr val="007E80"/>
-                </a:solidFill>
-                <a:latin typeface="Microsoft YaHei"/>
-              </a:defRPr>
-            </a:pPr>
-            <a:r>
-              <a:t>评论量多 5 条：这 5 项技术的 2022 年记录可核对 2023 年评论，缺少对应问卷。</a:t>
-            </a:r>
-          </a:p>
-        </p:txBody>
-      </p:sp>
-      <p:sp>
-        <p:nvSpPr>
-          <p:cNvPr id="9" name="TextBox 8"/>
-          <p:cNvSpPr txBox="1"/>
-          <p:nvPr/>
-        </p:nvSpPr>
-        <p:spPr>
-          <a:xfrm>
-            <a:off x="758952" y="5504688"/>
-            <a:ext cx="10515600" cy="502920"/>
-          </a:xfrm>
-          <a:prstGeom prst="rect">
-            <a:avLst/>
-          </a:prstGeom>
-          <a:noFill/>
-        </p:spPr>
-        <p:txBody>
-          <a:bodyPr wrap="square" lIns="18288" rIns="18288" tIns="9144" bIns="9144">
-            <a:spAutoFit/>
-          </a:bodyPr>
-          <a:lstStyle/>
-          <a:p>
-            <a:pPr>
-              <a:spcAft>
-                <a:spcPts val="1000"/>
-              </a:spcAft>
-              <a:defRPr sz="1800" b="0">
+              <a:defRPr sz="1600" b="0">
                 <a:solidFill>
                   <a:srgbClr val="C36623"/>
                 </a:solidFill>
@@ -7629,7 +7454,7 @@
               </a:defRPr>
             </a:pPr>
             <a:r>
-              <a:t>一项技术每个可检验年份算一条；样本少，百分比只作探索性比较。</a:t>
+              <a:t>只有前一年、当年和下一年所需数据都齐全时，才纳入对应终点。</a:t>
             </a:r>
           </a:p>
         </p:txBody>
@@ -7694,7 +7519,7 @@
               </a:defRPr>
             </a:pPr>
             <a:r>
-              <a:t>旧规则有一定信号，但并不稳定</a:t>
+              <a:t>测试一：下一年使用率是否下降</a:t>
             </a:r>
           </a:p>
         </p:txBody>
@@ -7733,7 +7558,7 @@
               </a:defRPr>
             </a:pPr>
             <a:r>
-              <a:t>来源：code/results/tables/warning_validation_so.csv 及 warning_validation_by_year.csv</a:t>
+              <a:t>59 条技术年度记录；其中 23 条实际下降</a:t>
             </a:r>
           </a:p>
         </p:txBody>
@@ -7786,8 +7611,8 @@
           <p:nvPr/>
         </p:nvGraphicFramePr>
         <p:xfrm>
-          <a:off x="914400" y="1517904"/>
-          <a:ext cx="10652760" cy="2386584"/>
+          <a:off x="566928" y="1417320"/>
+          <a:ext cx="10652760" cy="3246120"/>
         </p:xfrm>
         <a:graphic>
           <a:graphicData uri="http://schemas.openxmlformats.org/drawingml/2006/table">
@@ -7796,25 +7621,32 @@
                 <a:tableStyleId>{5C22544A-7EE6-4342-B048-85BDC9FD1C3A}</a:tableStyleId>
               </a:tblPr>
               <a:tblGrid>
-                <a:gridCol w="2834640"/>
-                <a:gridCol w="3063240"/>
-                <a:gridCol w="2560320"/>
-                <a:gridCol w="2194560"/>
+                <a:gridCol w="2148840"/>
+                <a:gridCol w="914400"/>
+                <a:gridCol w="914400"/>
+                <a:gridCol w="914400"/>
+                <a:gridCol w="914400"/>
+                <a:gridCol w="1463040"/>
+                <a:gridCol w="1691640"/>
+                <a:gridCol w="1691640"/>
               </a:tblGrid>
-              <a:tr h="795528">
-                <a:tc>
-                  <a:txBody>
-                    <a:bodyPr/>
-                    <a:lstStyle/>
-                    <a:p>
-                      <a:pPr>
-                        <a:defRPr sz="1800" b="1">
+              <a:tr h="649224">
+                <a:tc>
+                  <a:txBody>
+                    <a:bodyPr/>
+                    <a:lstStyle/>
+                    <a:p>
+                      <a:pPr>
+                        <a:defRPr sz="1500" b="1">
                           <a:solidFill>
                             <a:srgbClr val="FFFFFF"/>
                           </a:solidFill>
                           <a:latin typeface="Microsoft YaHei"/>
                         </a:defRPr>
                       </a:pPr>
+                      <a:r>
+                        <a:t>规则</a:t>
+                      </a:r>
                     </a:p>
                   </a:txBody>
                   <a:tcPr>
@@ -7829,7 +7661,7 @@
                     <a:lstStyle/>
                     <a:p>
                       <a:pPr>
-                        <a:defRPr sz="1800" b="1">
+                        <a:defRPr sz="1500" b="1">
                           <a:solidFill>
                             <a:srgbClr val="FFFFFF"/>
                           </a:solidFill>
@@ -7837,7 +7669,7 @@
                         </a:defRPr>
                       </a:pPr>
                       <a:r>
-                        <a:t>下一年使用率下降</a:t>
+                        <a:t>警报</a:t>
                       </a:r>
                     </a:p>
                   </a:txBody>
@@ -7853,7 +7685,7 @@
                     <a:lstStyle/>
                     <a:p>
                       <a:pPr>
-                        <a:defRPr sz="1800" b="1">
+                        <a:defRPr sz="1500" b="1">
                           <a:solidFill>
                             <a:srgbClr val="FFFFFF"/>
                           </a:solidFill>
@@ -7861,7 +7693,7 @@
                         </a:defRPr>
                       </a:pPr>
                       <a:r>
-                        <a:t>没有下降</a:t>
+                        <a:t>命中</a:t>
                       </a:r>
                     </a:p>
                   </a:txBody>
@@ -7877,7 +7709,7 @@
                     <a:lstStyle/>
                     <a:p>
                       <a:pPr>
-                        <a:defRPr sz="1800" b="1">
+                        <a:defRPr sz="1500" b="1">
                           <a:solidFill>
                             <a:srgbClr val="FFFFFF"/>
                           </a:solidFill>
@@ -7885,7 +7717,7 @@
                         </a:defRPr>
                       </a:pPr>
                       <a:r>
-                        <a:t>下降比例</a:t>
+                        <a:t>误报</a:t>
                       </a:r>
                     </a:p>
                   </a:txBody>
@@ -7895,23 +7727,119 @@
                     </a:solidFill>
                   </a:tcPr>
                 </a:tc>
+                <a:tc>
+                  <a:txBody>
+                    <a:bodyPr/>
+                    <a:lstStyle/>
+                    <a:p>
+                      <a:pPr>
+                        <a:defRPr sz="1500" b="1">
+                          <a:solidFill>
+                            <a:srgbClr val="FFFFFF"/>
+                          </a:solidFill>
+                          <a:latin typeface="Microsoft YaHei"/>
+                        </a:defRPr>
+                      </a:pPr>
+                      <a:r>
+                        <a:t>漏报</a:t>
+                      </a:r>
+                    </a:p>
+                  </a:txBody>
+                  <a:tcPr>
+                    <a:solidFill>
+                      <a:srgbClr val="162A41"/>
+                    </a:solidFill>
+                  </a:tcPr>
+                </a:tc>
+                <a:tc>
+                  <a:txBody>
+                    <a:bodyPr/>
+                    <a:lstStyle/>
+                    <a:p>
+                      <a:pPr>
+                        <a:defRPr sz="1500" b="1">
+                          <a:solidFill>
+                            <a:srgbClr val="FFFFFF"/>
+                          </a:solidFill>
+                          <a:latin typeface="Microsoft YaHei"/>
+                        </a:defRPr>
+                      </a:pPr>
+                      <a:r>
+                        <a:t>正确未报</a:t>
+                      </a:r>
+                    </a:p>
+                  </a:txBody>
+                  <a:tcPr>
+                    <a:solidFill>
+                      <a:srgbClr val="162A41"/>
+                    </a:solidFill>
+                  </a:tcPr>
+                </a:tc>
+                <a:tc>
+                  <a:txBody>
+                    <a:bodyPr/>
+                    <a:lstStyle/>
+                    <a:p>
+                      <a:pPr>
+                        <a:defRPr sz="1500" b="1">
+                          <a:solidFill>
+                            <a:srgbClr val="FFFFFF"/>
+                          </a:solidFill>
+                          <a:latin typeface="Microsoft YaHei"/>
+                        </a:defRPr>
+                      </a:pPr>
+                      <a:r>
+                        <a:t>命中率</a:t>
+                      </a:r>
+                    </a:p>
+                  </a:txBody>
+                  <a:tcPr>
+                    <a:solidFill>
+                      <a:srgbClr val="162A41"/>
+                    </a:solidFill>
+                  </a:tcPr>
+                </a:tc>
+                <a:tc>
+                  <a:txBody>
+                    <a:bodyPr/>
+                    <a:lstStyle/>
+                    <a:p>
+                      <a:pPr>
+                        <a:defRPr sz="1500" b="1">
+                          <a:solidFill>
+                            <a:srgbClr val="FFFFFF"/>
+                          </a:solidFill>
+                          <a:latin typeface="Microsoft YaHei"/>
+                        </a:defRPr>
+                      </a:pPr>
+                      <a:r>
+                        <a:t>找回率</a:t>
+                      </a:r>
+                    </a:p>
+                  </a:txBody>
+                  <a:tcPr>
+                    <a:solidFill>
+                      <a:srgbClr val="162A41"/>
+                    </a:solidFill>
+                  </a:tcPr>
+                </a:tc>
               </a:tr>
-              <a:tr h="795528">
-                <a:tc>
-                  <a:txBody>
-                    <a:bodyPr/>
-                    <a:lstStyle/>
-                    <a:p>
-                      <a:pPr>
-                        <a:defRPr sz="1800" b="0">
-                          <a:solidFill>
-                            <a:srgbClr val="162A41"/>
-                          </a:solidFill>
-                          <a:latin typeface="Microsoft YaHei"/>
-                        </a:defRPr>
-                      </a:pPr>
-                      <a:r>
-                        <a:t>发出问卷警报</a:t>
+              <a:tr h="649224">
+                <a:tc>
+                  <a:txBody>
+                    <a:bodyPr/>
+                    <a:lstStyle/>
+                    <a:p>
+                      <a:pPr>
+                        <a:defRPr sz="1500" b="0">
+                          <a:solidFill>
+                            <a:srgbClr val="162A41"/>
+                          </a:solidFill>
+                          <a:latin typeface="Microsoft YaHei"/>
+                        </a:defRPr>
+                      </a:pPr>
+                      <a:r>
+                        <a:t>原问卷规则</a:t>
                       </a:r>
                     </a:p>
                   </a:txBody>
@@ -7927,15 +7855,15 @@
                     <a:lstStyle/>
                     <a:p>
                       <a:pPr>
-                        <a:defRPr sz="1800" b="0">
-                          <a:solidFill>
-                            <a:srgbClr val="162A41"/>
-                          </a:solidFill>
-                          <a:latin typeface="Microsoft YaHei"/>
-                        </a:defRPr>
-                      </a:pPr>
-                      <a:r>
-                        <a:t>46</a:t>
+                        <a:defRPr sz="1500" b="0">
+                          <a:solidFill>
+                            <a:srgbClr val="162A41"/>
+                          </a:solidFill>
+                          <a:latin typeface="Microsoft YaHei"/>
+                        </a:defRPr>
+                      </a:pPr>
+                      <a:r>
+                        <a:t>20</a:t>
                       </a:r>
                     </a:p>
                   </a:txBody>
@@ -7951,15 +7879,15 @@
                     <a:lstStyle/>
                     <a:p>
                       <a:pPr>
-                        <a:defRPr sz="1800" b="0">
-                          <a:solidFill>
-                            <a:srgbClr val="162A41"/>
-                          </a:solidFill>
-                          <a:latin typeface="Microsoft YaHei"/>
-                        </a:defRPr>
-                      </a:pPr>
-                      <a:r>
-                        <a:t>23</a:t>
+                        <a:defRPr sz="1500" b="0">
+                          <a:solidFill>
+                            <a:srgbClr val="162A41"/>
+                          </a:solidFill>
+                          <a:latin typeface="Microsoft YaHei"/>
+                        </a:defRPr>
+                      </a:pPr>
+                      <a:r>
+                        <a:t>9</a:t>
                       </a:r>
                     </a:p>
                   </a:txBody>
@@ -7975,15 +7903,15 @@
                     <a:lstStyle/>
                     <a:p>
                       <a:pPr>
-                        <a:defRPr sz="1800" b="0">
-                          <a:solidFill>
-                            <a:srgbClr val="162A41"/>
-                          </a:solidFill>
-                          <a:latin typeface="Microsoft YaHei"/>
-                        </a:defRPr>
-                      </a:pPr>
-                      <a:r>
-                        <a:t>66.7%</a:t>
+                        <a:defRPr sz="1500" b="0">
+                          <a:solidFill>
+                            <a:srgbClr val="162A41"/>
+                          </a:solidFill>
+                          <a:latin typeface="Microsoft YaHei"/>
+                        </a:defRPr>
+                      </a:pPr>
+                      <a:r>
+                        <a:t>11</a:t>
                       </a:r>
                     </a:p>
                   </a:txBody>
@@ -7993,23 +7921,119 @@
                     </a:solidFill>
                   </a:tcPr>
                 </a:tc>
+                <a:tc>
+                  <a:txBody>
+                    <a:bodyPr/>
+                    <a:lstStyle/>
+                    <a:p>
+                      <a:pPr>
+                        <a:defRPr sz="1500" b="0">
+                          <a:solidFill>
+                            <a:srgbClr val="162A41"/>
+                          </a:solidFill>
+                          <a:latin typeface="Microsoft YaHei"/>
+                        </a:defRPr>
+                      </a:pPr>
+                      <a:r>
+                        <a:t>14</a:t>
+                      </a:r>
+                    </a:p>
+                  </a:txBody>
+                  <a:tcPr>
+                    <a:solidFill>
+                      <a:srgbClr val="EAF1F3"/>
+                    </a:solidFill>
+                  </a:tcPr>
+                </a:tc>
+                <a:tc>
+                  <a:txBody>
+                    <a:bodyPr/>
+                    <a:lstStyle/>
+                    <a:p>
+                      <a:pPr>
+                        <a:defRPr sz="1500" b="0">
+                          <a:solidFill>
+                            <a:srgbClr val="162A41"/>
+                          </a:solidFill>
+                          <a:latin typeface="Microsoft YaHei"/>
+                        </a:defRPr>
+                      </a:pPr>
+                      <a:r>
+                        <a:t>25</a:t>
+                      </a:r>
+                    </a:p>
+                  </a:txBody>
+                  <a:tcPr>
+                    <a:solidFill>
+                      <a:srgbClr val="EAF1F3"/>
+                    </a:solidFill>
+                  </a:tcPr>
+                </a:tc>
+                <a:tc>
+                  <a:txBody>
+                    <a:bodyPr/>
+                    <a:lstStyle/>
+                    <a:p>
+                      <a:pPr>
+                        <a:defRPr sz="1500" b="0">
+                          <a:solidFill>
+                            <a:srgbClr val="162A41"/>
+                          </a:solidFill>
+                          <a:latin typeface="Microsoft YaHei"/>
+                        </a:defRPr>
+                      </a:pPr>
+                      <a:r>
+                        <a:t>45.0%</a:t>
+                      </a:r>
+                    </a:p>
+                  </a:txBody>
+                  <a:tcPr>
+                    <a:solidFill>
+                      <a:srgbClr val="EAF1F3"/>
+                    </a:solidFill>
+                  </a:tcPr>
+                </a:tc>
+                <a:tc>
+                  <a:txBody>
+                    <a:bodyPr/>
+                    <a:lstStyle/>
+                    <a:p>
+                      <a:pPr>
+                        <a:defRPr sz="1500" b="0">
+                          <a:solidFill>
+                            <a:srgbClr val="162A41"/>
+                          </a:solidFill>
+                          <a:latin typeface="Microsoft YaHei"/>
+                        </a:defRPr>
+                      </a:pPr>
+                      <a:r>
+                        <a:t>39.1%</a:t>
+                      </a:r>
+                    </a:p>
+                  </a:txBody>
+                  <a:tcPr>
+                    <a:solidFill>
+                      <a:srgbClr val="EAF1F3"/>
+                    </a:solidFill>
+                  </a:tcPr>
+                </a:tc>
               </a:tr>
-              <a:tr h="795528">
-                <a:tc>
-                  <a:txBody>
-                    <a:bodyPr/>
-                    <a:lstStyle/>
-                    <a:p>
-                      <a:pPr>
-                        <a:defRPr sz="1800" b="0">
-                          <a:solidFill>
-                            <a:srgbClr val="162A41"/>
-                          </a:solidFill>
-                          <a:latin typeface="Microsoft YaHei"/>
-                        </a:defRPr>
-                      </a:pPr>
-                      <a:r>
-                        <a:t>没有问卷警报</a:t>
+              <a:tr h="649224">
+                <a:tc>
+                  <a:txBody>
+                    <a:bodyPr/>
+                    <a:lstStyle/>
+                    <a:p>
+                      <a:pPr>
+                        <a:defRPr sz="1500" b="0">
+                          <a:solidFill>
+                            <a:srgbClr val="162A41"/>
+                          </a:solidFill>
+                          <a:latin typeface="Microsoft YaHei"/>
+                        </a:defRPr>
+                      </a:pPr>
+                      <a:r>
+                        <a:t>只看评论</a:t>
                       </a:r>
                     </a:p>
                   </a:txBody>
@@ -8025,15 +8049,15 @@
                     <a:lstStyle/>
                     <a:p>
                       <a:pPr>
-                        <a:defRPr sz="1800" b="0">
-                          <a:solidFill>
-                            <a:srgbClr val="162A41"/>
-                          </a:solidFill>
-                          <a:latin typeface="Microsoft YaHei"/>
-                        </a:defRPr>
-                      </a:pPr>
-                      <a:r>
-                        <a:t>33</a:t>
+                        <a:defRPr sz="1500" b="0">
+                          <a:solidFill>
+                            <a:srgbClr val="162A41"/>
+                          </a:solidFill>
+                          <a:latin typeface="Microsoft YaHei"/>
+                        </a:defRPr>
+                      </a:pPr>
+                      <a:r>
+                        <a:t>36</a:t>
                       </a:r>
                     </a:p>
                   </a:txBody>
@@ -8049,15 +8073,15 @@
                     <a:lstStyle/>
                     <a:p>
                       <a:pPr>
-                        <a:defRPr sz="1800" b="0">
-                          <a:solidFill>
-                            <a:srgbClr val="162A41"/>
-                          </a:solidFill>
-                          <a:latin typeface="Microsoft YaHei"/>
-                        </a:defRPr>
-                      </a:pPr>
-                      <a:r>
-                        <a:t>42</a:t>
+                        <a:defRPr sz="1500" b="0">
+                          <a:solidFill>
+                            <a:srgbClr val="162A41"/>
+                          </a:solidFill>
+                          <a:latin typeface="Microsoft YaHei"/>
+                        </a:defRPr>
+                      </a:pPr>
+                      <a:r>
+                        <a:t>15</a:t>
                       </a:r>
                     </a:p>
                   </a:txBody>
@@ -8073,15 +8097,499 @@
                     <a:lstStyle/>
                     <a:p>
                       <a:pPr>
-                        <a:defRPr sz="1800" b="0">
-                          <a:solidFill>
-                            <a:srgbClr val="162A41"/>
-                          </a:solidFill>
-                          <a:latin typeface="Microsoft YaHei"/>
-                        </a:defRPr>
-                      </a:pPr>
-                      <a:r>
-                        <a:t>44.0%</a:t>
+                        <a:defRPr sz="1500" b="0">
+                          <a:solidFill>
+                            <a:srgbClr val="162A41"/>
+                          </a:solidFill>
+                          <a:latin typeface="Microsoft YaHei"/>
+                        </a:defRPr>
+                      </a:pPr>
+                      <a:r>
+                        <a:t>21</a:t>
+                      </a:r>
+                    </a:p>
+                  </a:txBody>
+                  <a:tcPr>
+                    <a:solidFill>
+                      <a:srgbClr val="F8FAFB"/>
+                    </a:solidFill>
+                  </a:tcPr>
+                </a:tc>
+                <a:tc>
+                  <a:txBody>
+                    <a:bodyPr/>
+                    <a:lstStyle/>
+                    <a:p>
+                      <a:pPr>
+                        <a:defRPr sz="1500" b="0">
+                          <a:solidFill>
+                            <a:srgbClr val="162A41"/>
+                          </a:solidFill>
+                          <a:latin typeface="Microsoft YaHei"/>
+                        </a:defRPr>
+                      </a:pPr>
+                      <a:r>
+                        <a:t>8</a:t>
+                      </a:r>
+                    </a:p>
+                  </a:txBody>
+                  <a:tcPr>
+                    <a:solidFill>
+                      <a:srgbClr val="F8FAFB"/>
+                    </a:solidFill>
+                  </a:tcPr>
+                </a:tc>
+                <a:tc>
+                  <a:txBody>
+                    <a:bodyPr/>
+                    <a:lstStyle/>
+                    <a:p>
+                      <a:pPr>
+                        <a:defRPr sz="1500" b="0">
+                          <a:solidFill>
+                            <a:srgbClr val="162A41"/>
+                          </a:solidFill>
+                          <a:latin typeface="Microsoft YaHei"/>
+                        </a:defRPr>
+                      </a:pPr>
+                      <a:r>
+                        <a:t>15</a:t>
+                      </a:r>
+                    </a:p>
+                  </a:txBody>
+                  <a:tcPr>
+                    <a:solidFill>
+                      <a:srgbClr val="F8FAFB"/>
+                    </a:solidFill>
+                  </a:tcPr>
+                </a:tc>
+                <a:tc>
+                  <a:txBody>
+                    <a:bodyPr/>
+                    <a:lstStyle/>
+                    <a:p>
+                      <a:pPr>
+                        <a:defRPr sz="1500" b="0">
+                          <a:solidFill>
+                            <a:srgbClr val="162A41"/>
+                          </a:solidFill>
+                          <a:latin typeface="Microsoft YaHei"/>
+                        </a:defRPr>
+                      </a:pPr>
+                      <a:r>
+                        <a:t>41.7%</a:t>
+                      </a:r>
+                    </a:p>
+                  </a:txBody>
+                  <a:tcPr>
+                    <a:solidFill>
+                      <a:srgbClr val="F8FAFB"/>
+                    </a:solidFill>
+                  </a:tcPr>
+                </a:tc>
+                <a:tc>
+                  <a:txBody>
+                    <a:bodyPr/>
+                    <a:lstStyle/>
+                    <a:p>
+                      <a:pPr>
+                        <a:defRPr sz="1500" b="0">
+                          <a:solidFill>
+                            <a:srgbClr val="162A41"/>
+                          </a:solidFill>
+                          <a:latin typeface="Microsoft YaHei"/>
+                        </a:defRPr>
+                      </a:pPr>
+                      <a:r>
+                        <a:t>65.2%</a:t>
+                      </a:r>
+                    </a:p>
+                  </a:txBody>
+                  <a:tcPr>
+                    <a:solidFill>
+                      <a:srgbClr val="F8FAFB"/>
+                    </a:solidFill>
+                  </a:tcPr>
+                </a:tc>
+              </a:tr>
+              <a:tr h="649224">
+                <a:tc>
+                  <a:txBody>
+                    <a:bodyPr/>
+                    <a:lstStyle/>
+                    <a:p>
+                      <a:pPr>
+                        <a:defRPr sz="1500" b="0">
+                          <a:solidFill>
+                            <a:srgbClr val="162A41"/>
+                          </a:solidFill>
+                          <a:latin typeface="Microsoft YaHei"/>
+                        </a:defRPr>
+                      </a:pPr>
+                      <a:r>
+                        <a:t>双源同时收缩</a:t>
+                      </a:r>
+                    </a:p>
+                  </a:txBody>
+                  <a:tcPr>
+                    <a:solidFill>
+                      <a:srgbClr val="EAF1F3"/>
+                    </a:solidFill>
+                  </a:tcPr>
+                </a:tc>
+                <a:tc>
+                  <a:txBody>
+                    <a:bodyPr/>
+                    <a:lstStyle/>
+                    <a:p>
+                      <a:pPr>
+                        <a:defRPr sz="1500" b="0">
+                          <a:solidFill>
+                            <a:srgbClr val="162A41"/>
+                          </a:solidFill>
+                          <a:latin typeface="Microsoft YaHei"/>
+                        </a:defRPr>
+                      </a:pPr>
+                      <a:r>
+                        <a:t>11</a:t>
+                      </a:r>
+                    </a:p>
+                  </a:txBody>
+                  <a:tcPr>
+                    <a:solidFill>
+                      <a:srgbClr val="EAF1F3"/>
+                    </a:solidFill>
+                  </a:tcPr>
+                </a:tc>
+                <a:tc>
+                  <a:txBody>
+                    <a:bodyPr/>
+                    <a:lstStyle/>
+                    <a:p>
+                      <a:pPr>
+                        <a:defRPr sz="1500" b="0">
+                          <a:solidFill>
+                            <a:srgbClr val="162A41"/>
+                          </a:solidFill>
+                          <a:latin typeface="Microsoft YaHei"/>
+                        </a:defRPr>
+                      </a:pPr>
+                      <a:r>
+                        <a:t>7</a:t>
+                      </a:r>
+                    </a:p>
+                  </a:txBody>
+                  <a:tcPr>
+                    <a:solidFill>
+                      <a:srgbClr val="EAF1F3"/>
+                    </a:solidFill>
+                  </a:tcPr>
+                </a:tc>
+                <a:tc>
+                  <a:txBody>
+                    <a:bodyPr/>
+                    <a:lstStyle/>
+                    <a:p>
+                      <a:pPr>
+                        <a:defRPr sz="1500" b="0">
+                          <a:solidFill>
+                            <a:srgbClr val="162A41"/>
+                          </a:solidFill>
+                          <a:latin typeface="Microsoft YaHei"/>
+                        </a:defRPr>
+                      </a:pPr>
+                      <a:r>
+                        <a:t>4</a:t>
+                      </a:r>
+                    </a:p>
+                  </a:txBody>
+                  <a:tcPr>
+                    <a:solidFill>
+                      <a:srgbClr val="EAF1F3"/>
+                    </a:solidFill>
+                  </a:tcPr>
+                </a:tc>
+                <a:tc>
+                  <a:txBody>
+                    <a:bodyPr/>
+                    <a:lstStyle/>
+                    <a:p>
+                      <a:pPr>
+                        <a:defRPr sz="1500" b="0">
+                          <a:solidFill>
+                            <a:srgbClr val="162A41"/>
+                          </a:solidFill>
+                          <a:latin typeface="Microsoft YaHei"/>
+                        </a:defRPr>
+                      </a:pPr>
+                      <a:r>
+                        <a:t>16</a:t>
+                      </a:r>
+                    </a:p>
+                  </a:txBody>
+                  <a:tcPr>
+                    <a:solidFill>
+                      <a:srgbClr val="EAF1F3"/>
+                    </a:solidFill>
+                  </a:tcPr>
+                </a:tc>
+                <a:tc>
+                  <a:txBody>
+                    <a:bodyPr/>
+                    <a:lstStyle/>
+                    <a:p>
+                      <a:pPr>
+                        <a:defRPr sz="1500" b="0">
+                          <a:solidFill>
+                            <a:srgbClr val="162A41"/>
+                          </a:solidFill>
+                          <a:latin typeface="Microsoft YaHei"/>
+                        </a:defRPr>
+                      </a:pPr>
+                      <a:r>
+                        <a:t>32</a:t>
+                      </a:r>
+                    </a:p>
+                  </a:txBody>
+                  <a:tcPr>
+                    <a:solidFill>
+                      <a:srgbClr val="EAF1F3"/>
+                    </a:solidFill>
+                  </a:tcPr>
+                </a:tc>
+                <a:tc>
+                  <a:txBody>
+                    <a:bodyPr/>
+                    <a:lstStyle/>
+                    <a:p>
+                      <a:pPr>
+                        <a:defRPr sz="1500" b="0">
+                          <a:solidFill>
+                            <a:srgbClr val="162A41"/>
+                          </a:solidFill>
+                          <a:latin typeface="Microsoft YaHei"/>
+                        </a:defRPr>
+                      </a:pPr>
+                      <a:r>
+                        <a:t>63.6%</a:t>
+                      </a:r>
+                    </a:p>
+                  </a:txBody>
+                  <a:tcPr>
+                    <a:solidFill>
+                      <a:srgbClr val="EAF1F3"/>
+                    </a:solidFill>
+                  </a:tcPr>
+                </a:tc>
+                <a:tc>
+                  <a:txBody>
+                    <a:bodyPr/>
+                    <a:lstStyle/>
+                    <a:p>
+                      <a:pPr>
+                        <a:defRPr sz="1500" b="0">
+                          <a:solidFill>
+                            <a:srgbClr val="162A41"/>
+                          </a:solidFill>
+                          <a:latin typeface="Microsoft YaHei"/>
+                        </a:defRPr>
+                      </a:pPr>
+                      <a:r>
+                        <a:t>30.4%</a:t>
+                      </a:r>
+                    </a:p>
+                  </a:txBody>
+                  <a:tcPr>
+                    <a:solidFill>
+                      <a:srgbClr val="EAF1F3"/>
+                    </a:solidFill>
+                  </a:tcPr>
+                </a:tc>
+              </a:tr>
+              <a:tr h="649224">
+                <a:tc>
+                  <a:txBody>
+                    <a:bodyPr/>
+                    <a:lstStyle/>
+                    <a:p>
+                      <a:pPr>
+                        <a:defRPr sz="1500" b="0">
+                          <a:solidFill>
+                            <a:srgbClr val="162A41"/>
+                          </a:solidFill>
+                          <a:latin typeface="Microsoft YaHei"/>
+                        </a:defRPr>
+                      </a:pPr>
+                      <a:r>
+                        <a:t>任一信号收缩</a:t>
+                      </a:r>
+                    </a:p>
+                  </a:txBody>
+                  <a:tcPr>
+                    <a:solidFill>
+                      <a:srgbClr val="F8FAFB"/>
+                    </a:solidFill>
+                  </a:tcPr>
+                </a:tc>
+                <a:tc>
+                  <a:txBody>
+                    <a:bodyPr/>
+                    <a:lstStyle/>
+                    <a:p>
+                      <a:pPr>
+                        <a:defRPr sz="1500" b="0">
+                          <a:solidFill>
+                            <a:srgbClr val="162A41"/>
+                          </a:solidFill>
+                          <a:latin typeface="Microsoft YaHei"/>
+                        </a:defRPr>
+                      </a:pPr>
+                      <a:r>
+                        <a:t>45</a:t>
+                      </a:r>
+                    </a:p>
+                  </a:txBody>
+                  <a:tcPr>
+                    <a:solidFill>
+                      <a:srgbClr val="F8FAFB"/>
+                    </a:solidFill>
+                  </a:tcPr>
+                </a:tc>
+                <a:tc>
+                  <a:txBody>
+                    <a:bodyPr/>
+                    <a:lstStyle/>
+                    <a:p>
+                      <a:pPr>
+                        <a:defRPr sz="1500" b="0">
+                          <a:solidFill>
+                            <a:srgbClr val="162A41"/>
+                          </a:solidFill>
+                          <a:latin typeface="Microsoft YaHei"/>
+                        </a:defRPr>
+                      </a:pPr>
+                      <a:r>
+                        <a:t>17</a:t>
+                      </a:r>
+                    </a:p>
+                  </a:txBody>
+                  <a:tcPr>
+                    <a:solidFill>
+                      <a:srgbClr val="F8FAFB"/>
+                    </a:solidFill>
+                  </a:tcPr>
+                </a:tc>
+                <a:tc>
+                  <a:txBody>
+                    <a:bodyPr/>
+                    <a:lstStyle/>
+                    <a:p>
+                      <a:pPr>
+                        <a:defRPr sz="1500" b="0">
+                          <a:solidFill>
+                            <a:srgbClr val="162A41"/>
+                          </a:solidFill>
+                          <a:latin typeface="Microsoft YaHei"/>
+                        </a:defRPr>
+                      </a:pPr>
+                      <a:r>
+                        <a:t>28</a:t>
+                      </a:r>
+                    </a:p>
+                  </a:txBody>
+                  <a:tcPr>
+                    <a:solidFill>
+                      <a:srgbClr val="F8FAFB"/>
+                    </a:solidFill>
+                  </a:tcPr>
+                </a:tc>
+                <a:tc>
+                  <a:txBody>
+                    <a:bodyPr/>
+                    <a:lstStyle/>
+                    <a:p>
+                      <a:pPr>
+                        <a:defRPr sz="1500" b="0">
+                          <a:solidFill>
+                            <a:srgbClr val="162A41"/>
+                          </a:solidFill>
+                          <a:latin typeface="Microsoft YaHei"/>
+                        </a:defRPr>
+                      </a:pPr>
+                      <a:r>
+                        <a:t>6</a:t>
+                      </a:r>
+                    </a:p>
+                  </a:txBody>
+                  <a:tcPr>
+                    <a:solidFill>
+                      <a:srgbClr val="F8FAFB"/>
+                    </a:solidFill>
+                  </a:tcPr>
+                </a:tc>
+                <a:tc>
+                  <a:txBody>
+                    <a:bodyPr/>
+                    <a:lstStyle/>
+                    <a:p>
+                      <a:pPr>
+                        <a:defRPr sz="1500" b="0">
+                          <a:solidFill>
+                            <a:srgbClr val="162A41"/>
+                          </a:solidFill>
+                          <a:latin typeface="Microsoft YaHei"/>
+                        </a:defRPr>
+                      </a:pPr>
+                      <a:r>
+                        <a:t>8</a:t>
+                      </a:r>
+                    </a:p>
+                  </a:txBody>
+                  <a:tcPr>
+                    <a:solidFill>
+                      <a:srgbClr val="F8FAFB"/>
+                    </a:solidFill>
+                  </a:tcPr>
+                </a:tc>
+                <a:tc>
+                  <a:txBody>
+                    <a:bodyPr/>
+                    <a:lstStyle/>
+                    <a:p>
+                      <a:pPr>
+                        <a:defRPr sz="1500" b="0">
+                          <a:solidFill>
+                            <a:srgbClr val="162A41"/>
+                          </a:solidFill>
+                          <a:latin typeface="Microsoft YaHei"/>
+                        </a:defRPr>
+                      </a:pPr>
+                      <a:r>
+                        <a:t>37.8%</a:t>
+                      </a:r>
+                    </a:p>
+                  </a:txBody>
+                  <a:tcPr>
+                    <a:solidFill>
+                      <a:srgbClr val="F8FAFB"/>
+                    </a:solidFill>
+                  </a:tcPr>
+                </a:tc>
+                <a:tc>
+                  <a:txBody>
+                    <a:bodyPr/>
+                    <a:lstStyle/>
+                    <a:p>
+                      <a:pPr>
+                        <a:defRPr sz="1500" b="0">
+                          <a:solidFill>
+                            <a:srgbClr val="162A41"/>
+                          </a:solidFill>
+                          <a:latin typeface="Microsoft YaHei"/>
+                        </a:defRPr>
+                      </a:pPr>
+                      <a:r>
+                        <a:t>73.9%</a:t>
                       </a:r>
                     </a:p>
                   </a:txBody>
@@ -8104,8 +8612,8 @@
         </p:nvSpPr>
         <p:spPr>
           <a:xfrm>
-            <a:off x="960120" y="4251960"/>
-            <a:ext cx="10241280" cy="685800"/>
+            <a:off x="676656" y="5056632"/>
+            <a:ext cx="10744200" cy="566928"/>
           </a:xfrm>
           <a:prstGeom prst="rect">
             <a:avLst/>
@@ -8122,7 +8630,7 @@
               <a:spcAft>
                 <a:spcPts val="1000"/>
               </a:spcAft>
-              <a:defRPr sz="2100" b="0">
+              <a:defRPr sz="2000" b="0">
                 <a:solidFill>
                   <a:srgbClr val="007E80"/>
                 </a:solidFill>
@@ -8130,7 +8638,7 @@
               </a:defRPr>
             </a:pPr>
             <a:r>
-              <a:t>共 144 条记录。警报组的下降比例高出 22.7 个百分点。</a:t>
+              <a:t>双源：11 次警报命中 7 次；旧规则：20 次中命中 9 次。</a:t>
             </a:r>
           </a:p>
         </p:txBody>
@@ -8143,8 +8651,8 @@
         </p:nvSpPr>
         <p:spPr>
           <a:xfrm>
-            <a:off x="960120" y="5202936"/>
-            <a:ext cx="10332720" cy="667512"/>
+            <a:off x="676656" y="5669280"/>
+            <a:ext cx="10744200" cy="530352"/>
           </a:xfrm>
           <a:prstGeom prst="rect">
             <a:avLst/>
@@ -8169,7 +8677,7 @@
               </a:defRPr>
             </a:pPr>
             <a:r>
-              <a:t>按年份分开看，结果有反转；旧规则还不能作为稳定的自动判定。</a:t>
+              <a:t>双源漏报 16 次，旧规则漏报 14 次；同时看命中率和找回率。</a:t>
             </a:r>
           </a:p>
         </p:txBody>
@@ -8234,7 +8742,7 @@
               </a:defRPr>
             </a:pPr>
             <a:r>
-              <a:t>测试一：能否筛出下一年使用率下降</a:t>
+              <a:t>测试二：下一年评论量是否下降</a:t>
             </a:r>
           </a:p>
         </p:txBody>
@@ -8273,7 +8781,7 @@
               </a:defRPr>
             </a:pPr>
             <a:r>
-              <a:t>五项技术、12 条可比记录；每行满足：命中＋误报＋漏报＋正确未报＝12</a:t>
+              <a:t>61 条技术年度记录；其中 47 条实际下降</a:t>
             </a:r>
           </a:p>
         </p:txBody>
@@ -8326,7 +8834,7 @@
           <p:nvPr/>
         </p:nvGraphicFramePr>
         <p:xfrm>
-          <a:off x="566928" y="1408176"/>
+          <a:off x="566928" y="1417320"/>
           <a:ext cx="10652760" cy="3246120"/>
         </p:xfrm>
         <a:graphic>
@@ -8554,7 +9062,7 @@
                         </a:defRPr>
                       </a:pPr>
                       <a:r>
-                        <a:t>原规则</a:t>
+                        <a:t>原问卷规则</a:t>
                       </a:r>
                     </a:p>
                   </a:txBody>
@@ -8578,7 +9086,7 @@
                         </a:defRPr>
                       </a:pPr>
                       <a:r>
-                        <a:t>5</a:t>
+                        <a:t>21</a:t>
                       </a:r>
                     </a:p>
                   </a:txBody>
@@ -8602,7 +9110,7 @@
                         </a:defRPr>
                       </a:pPr>
                       <a:r>
-                        <a:t>4</a:t>
+                        <a:t>15</a:t>
                       </a:r>
                     </a:p>
                   </a:txBody>
@@ -8626,7 +9134,7 @@
                         </a:defRPr>
                       </a:pPr>
                       <a:r>
-                        <a:t>1</a:t>
+                        <a:t>6</a:t>
                       </a:r>
                     </a:p>
                   </a:txBody>
@@ -8650,7 +9158,7 @@
                         </a:defRPr>
                       </a:pPr>
                       <a:r>
-                        <a:t>3</a:t>
+                        <a:t>32</a:t>
                       </a:r>
                     </a:p>
                   </a:txBody>
@@ -8674,7 +9182,7 @@
                         </a:defRPr>
                       </a:pPr>
                       <a:r>
-                        <a:t>4</a:t>
+                        <a:t>8</a:t>
                       </a:r>
                     </a:p>
                   </a:txBody>
@@ -8698,7 +9206,7 @@
                         </a:defRPr>
                       </a:pPr>
                       <a:r>
-                        <a:t>80.0%</a:t>
+                        <a:t>71.4%</a:t>
                       </a:r>
                     </a:p>
                   </a:txBody>
@@ -8722,7 +9230,7 @@
                         </a:defRPr>
                       </a:pPr>
                       <a:r>
-                        <a:t>57.1%</a:t>
+                        <a:t>31.9%</a:t>
                       </a:r>
                     </a:p>
                   </a:txBody>
@@ -8772,6 +9280,102 @@
                         </a:defRPr>
                       </a:pPr>
                       <a:r>
+                        <a:t>38</a:t>
+                      </a:r>
+                    </a:p>
+                  </a:txBody>
+                  <a:tcPr>
+                    <a:solidFill>
+                      <a:srgbClr val="F8FAFB"/>
+                    </a:solidFill>
+                  </a:tcPr>
+                </a:tc>
+                <a:tc>
+                  <a:txBody>
+                    <a:bodyPr/>
+                    <a:lstStyle/>
+                    <a:p>
+                      <a:pPr>
+                        <a:defRPr sz="1500" b="0">
+                          <a:solidFill>
+                            <a:srgbClr val="162A41"/>
+                          </a:solidFill>
+                          <a:latin typeface="Microsoft YaHei"/>
+                        </a:defRPr>
+                      </a:pPr>
+                      <a:r>
+                        <a:t>29</a:t>
+                      </a:r>
+                    </a:p>
+                  </a:txBody>
+                  <a:tcPr>
+                    <a:solidFill>
+                      <a:srgbClr val="F8FAFB"/>
+                    </a:solidFill>
+                  </a:tcPr>
+                </a:tc>
+                <a:tc>
+                  <a:txBody>
+                    <a:bodyPr/>
+                    <a:lstStyle/>
+                    <a:p>
+                      <a:pPr>
+                        <a:defRPr sz="1500" b="0">
+                          <a:solidFill>
+                            <a:srgbClr val="162A41"/>
+                          </a:solidFill>
+                          <a:latin typeface="Microsoft YaHei"/>
+                        </a:defRPr>
+                      </a:pPr>
+                      <a:r>
+                        <a:t>9</a:t>
+                      </a:r>
+                    </a:p>
+                  </a:txBody>
+                  <a:tcPr>
+                    <a:solidFill>
+                      <a:srgbClr val="F8FAFB"/>
+                    </a:solidFill>
+                  </a:tcPr>
+                </a:tc>
+                <a:tc>
+                  <a:txBody>
+                    <a:bodyPr/>
+                    <a:lstStyle/>
+                    <a:p>
+                      <a:pPr>
+                        <a:defRPr sz="1500" b="0">
+                          <a:solidFill>
+                            <a:srgbClr val="162A41"/>
+                          </a:solidFill>
+                          <a:latin typeface="Microsoft YaHei"/>
+                        </a:defRPr>
+                      </a:pPr>
+                      <a:r>
+                        <a:t>18</a:t>
+                      </a:r>
+                    </a:p>
+                  </a:txBody>
+                  <a:tcPr>
+                    <a:solidFill>
+                      <a:srgbClr val="F8FAFB"/>
+                    </a:solidFill>
+                  </a:tcPr>
+                </a:tc>
+                <a:tc>
+                  <a:txBody>
+                    <a:bodyPr/>
+                    <a:lstStyle/>
+                    <a:p>
+                      <a:pPr>
+                        <a:defRPr sz="1500" b="0">
+                          <a:solidFill>
+                            <a:srgbClr val="162A41"/>
+                          </a:solidFill>
+                          <a:latin typeface="Microsoft YaHei"/>
+                        </a:defRPr>
+                      </a:pPr>
+                      <a:r>
                         <a:t>5</a:t>
                       </a:r>
                     </a:p>
@@ -8796,7 +9400,7 @@
                         </a:defRPr>
                       </a:pPr>
                       <a:r>
-                        <a:t>3</a:t>
+                        <a:t>76.3%</a:t>
                       </a:r>
                     </a:p>
                   </a:txBody>
@@ -8820,103 +9424,7 @@
                         </a:defRPr>
                       </a:pPr>
                       <a:r>
-                        <a:t>2</a:t>
-                      </a:r>
-                    </a:p>
-                  </a:txBody>
-                  <a:tcPr>
-                    <a:solidFill>
-                      <a:srgbClr val="F8FAFB"/>
-                    </a:solidFill>
-                  </a:tcPr>
-                </a:tc>
-                <a:tc>
-                  <a:txBody>
-                    <a:bodyPr/>
-                    <a:lstStyle/>
-                    <a:p>
-                      <a:pPr>
-                        <a:defRPr sz="1500" b="0">
-                          <a:solidFill>
-                            <a:srgbClr val="162A41"/>
-                          </a:solidFill>
-                          <a:latin typeface="Microsoft YaHei"/>
-                        </a:defRPr>
-                      </a:pPr>
-                      <a:r>
-                        <a:t>4</a:t>
-                      </a:r>
-                    </a:p>
-                  </a:txBody>
-                  <a:tcPr>
-                    <a:solidFill>
-                      <a:srgbClr val="F8FAFB"/>
-                    </a:solidFill>
-                  </a:tcPr>
-                </a:tc>
-                <a:tc>
-                  <a:txBody>
-                    <a:bodyPr/>
-                    <a:lstStyle/>
-                    <a:p>
-                      <a:pPr>
-                        <a:defRPr sz="1500" b="0">
-                          <a:solidFill>
-                            <a:srgbClr val="162A41"/>
-                          </a:solidFill>
-                          <a:latin typeface="Microsoft YaHei"/>
-                        </a:defRPr>
-                      </a:pPr>
-                      <a:r>
-                        <a:t>3</a:t>
-                      </a:r>
-                    </a:p>
-                  </a:txBody>
-                  <a:tcPr>
-                    <a:solidFill>
-                      <a:srgbClr val="F8FAFB"/>
-                    </a:solidFill>
-                  </a:tcPr>
-                </a:tc>
-                <a:tc>
-                  <a:txBody>
-                    <a:bodyPr/>
-                    <a:lstStyle/>
-                    <a:p>
-                      <a:pPr>
-                        <a:defRPr sz="1500" b="0">
-                          <a:solidFill>
-                            <a:srgbClr val="162A41"/>
-                          </a:solidFill>
-                          <a:latin typeface="Microsoft YaHei"/>
-                        </a:defRPr>
-                      </a:pPr>
-                      <a:r>
-                        <a:t>60.0%</a:t>
-                      </a:r>
-                    </a:p>
-                  </a:txBody>
-                  <a:tcPr>
-                    <a:solidFill>
-                      <a:srgbClr val="F8FAFB"/>
-                    </a:solidFill>
-                  </a:tcPr>
-                </a:tc>
-                <a:tc>
-                  <a:txBody>
-                    <a:bodyPr/>
-                    <a:lstStyle/>
-                    <a:p>
-                      <a:pPr>
-                        <a:defRPr sz="1500" b="0">
-                          <a:solidFill>
-                            <a:srgbClr val="162A41"/>
-                          </a:solidFill>
-                          <a:latin typeface="Microsoft YaHei"/>
-                        </a:defRPr>
-                      </a:pPr>
-                      <a:r>
-                        <a:t>42.9%</a:t>
+                        <a:t>61.7%</a:t>
                       </a:r>
                     </a:p>
                   </a:txBody>
@@ -8966,7 +9474,7 @@
                         </a:defRPr>
                       </a:pPr>
                       <a:r>
-                        <a:t>3</a:t>
+                        <a:t>12</a:t>
                       </a:r>
                     </a:p>
                   </a:txBody>
@@ -8990,7 +9498,7 @@
                         </a:defRPr>
                       </a:pPr>
                       <a:r>
-                        <a:t>3</a:t>
+                        <a:t>10</a:t>
                       </a:r>
                     </a:p>
                   </a:txBody>
@@ -9014,7 +9522,7 @@
                         </a:defRPr>
                       </a:pPr>
                       <a:r>
-                        <a:t>0</a:t>
+                        <a:t>2</a:t>
                       </a:r>
                     </a:p>
                   </a:txBody>
@@ -9038,7 +9546,7 @@
                         </a:defRPr>
                       </a:pPr>
                       <a:r>
-                        <a:t>4</a:t>
+                        <a:t>37</a:t>
                       </a:r>
                     </a:p>
                   </a:txBody>
@@ -9062,7 +9570,7 @@
                         </a:defRPr>
                       </a:pPr>
                       <a:r>
-                        <a:t>5</a:t>
+                        <a:t>12</a:t>
                       </a:r>
                     </a:p>
                   </a:txBody>
@@ -9086,7 +9594,7 @@
                         </a:defRPr>
                       </a:pPr>
                       <a:r>
-                        <a:t>100.0%</a:t>
+                        <a:t>83.3%</a:t>
                       </a:r>
                     </a:p>
                   </a:txBody>
@@ -9110,7 +9618,7 @@
                         </a:defRPr>
                       </a:pPr>
                       <a:r>
-                        <a:t>42.9%</a:t>
+                        <a:t>21.3%</a:t>
                       </a:r>
                     </a:p>
                   </a:txBody>
@@ -9160,7 +9668,7 @@
                         </a:defRPr>
                       </a:pPr>
                       <a:r>
-                        <a:t>7</a:t>
+                        <a:t>47</a:t>
                       </a:r>
                     </a:p>
                   </a:txBody>
@@ -9184,7 +9692,7 @@
                         </a:defRPr>
                       </a:pPr>
                       <a:r>
-                        <a:t>4</a:t>
+                        <a:t>34</a:t>
                       </a:r>
                     </a:p>
                   </a:txBody>
@@ -9208,7 +9716,7 @@
                         </a:defRPr>
                       </a:pPr>
                       <a:r>
-                        <a:t>3</a:t>
+                        <a:t>13</a:t>
                       </a:r>
                     </a:p>
                   </a:txBody>
@@ -9232,7 +9740,7 @@
                         </a:defRPr>
                       </a:pPr>
                       <a:r>
-                        <a:t>3</a:t>
+                        <a:t>13</a:t>
                       </a:r>
                     </a:p>
                   </a:txBody>
@@ -9256,7 +9764,7 @@
                         </a:defRPr>
                       </a:pPr>
                       <a:r>
-                        <a:t>2</a:t>
+                        <a:t>1</a:t>
                       </a:r>
                     </a:p>
                   </a:txBody>
@@ -9280,7 +9788,7 @@
                         </a:defRPr>
                       </a:pPr>
                       <a:r>
-                        <a:t>57.1%</a:t>
+                        <a:t>72.3%</a:t>
                       </a:r>
                     </a:p>
                   </a:txBody>
@@ -9304,7 +9812,7 @@
                         </a:defRPr>
                       </a:pPr>
                       <a:r>
-                        <a:t>57.1%</a:t>
+                        <a:t>72.3%</a:t>
                       </a:r>
                     </a:p>
                   </a:txBody>
@@ -9327,8 +9835,8 @@
         </p:nvSpPr>
         <p:spPr>
           <a:xfrm>
-            <a:off x="676656" y="5020056"/>
-            <a:ext cx="10744200" cy="530352"/>
+            <a:off x="676656" y="5056632"/>
+            <a:ext cx="10744200" cy="566928"/>
           </a:xfrm>
           <a:prstGeom prst="rect">
             <a:avLst/>
@@ -9353,7 +9861,7 @@
               </a:defRPr>
             </a:pPr>
             <a:r>
-              <a:t>双源同时收缩：3 次警报都命中；旧规则 5 次中命中 4 次。</a:t>
+              <a:t>双源误报 2 次，旧规则误报 6 次。</a:t>
             </a:r>
           </a:p>
         </p:txBody>
@@ -9366,8 +9874,8 @@
         </p:nvSpPr>
         <p:spPr>
           <a:xfrm>
-            <a:off x="676656" y="5623560"/>
-            <a:ext cx="10698480" cy="484632"/>
+            <a:off x="676656" y="5669280"/>
+            <a:ext cx="10744200" cy="530352"/>
           </a:xfrm>
           <a:prstGeom prst="rect">
             <a:avLst/>
@@ -9392,7 +9900,7 @@
               </a:defRPr>
             </a:pPr>
             <a:r>
-              <a:t>代价：双源规则漏掉 4 次下降，旧规则漏掉 3 次。</a:t>
+              <a:t>双源漏报 37 次，旧规则漏报 32 次。</a:t>
             </a:r>
           </a:p>
         </p:txBody>
@@ -9457,7 +9965,7 @@
               </a:defRPr>
             </a:pPr>
             <a:r>
-              <a:t>命中更准，也可能漏掉更多</a:t>
+              <a:t>分开按年看，避免合并结果掩盖波动</a:t>
             </a:r>
           </a:p>
         </p:txBody>
@@ -9496,7 +10004,7 @@
               </a:defRPr>
             </a:pPr>
             <a:r>
-              <a:t>来源：multisignal_backtest_comparison.csv；该图只比较相同的 12 条记录</a:t>
+              <a:t>下一年使用率结果；逐年明细：multisignal_recent_by_year.csv</a:t>
             </a:r>
           </a:p>
         </p:txBody>
@@ -9542,19 +10050,712 @@
       </p:sp>
       <p:graphicFrame>
         <p:nvGraphicFramePr>
-          <p:cNvPr id="5" name="Chart 4"/>
+          <p:cNvPr id="5" name="Table 4"/>
           <p:cNvGraphicFramePr>
             <a:graphicFrameLocks noGrp="1"/>
           </p:cNvGraphicFramePr>
           <p:nvPr/>
         </p:nvGraphicFramePr>
         <p:xfrm>
-          <a:off x="777240" y="1399032"/>
-          <a:ext cx="6675120" cy="4352544"/>
+          <a:off x="649224" y="1417320"/>
+          <a:ext cx="11064236" cy="3145536"/>
         </p:xfrm>
         <a:graphic>
-          <a:graphicData uri="http://schemas.openxmlformats.org/drawingml/2006/chart">
-            <c:chart xmlns:c="http://schemas.openxmlformats.org/drawingml/2006/chart" r:id="rId2"/>
+          <a:graphicData uri="http://schemas.openxmlformats.org/drawingml/2006/table">
+            <a:tbl>
+              <a:tblPr firstRow="1" bandRow="1">
+                <a:tableStyleId>{5C22544A-7EE6-4342-B048-85BDC9FD1C3A}</a:tableStyleId>
+              </a:tblPr>
+              <a:tblGrid>
+                <a:gridCol w="1325880"/>
+                <a:gridCol w="914400"/>
+                <a:gridCol w="1325880"/>
+                <a:gridCol w="1874519"/>
+                <a:gridCol w="1874519"/>
+                <a:gridCol w="1874519"/>
+                <a:gridCol w="1874519"/>
+              </a:tblGrid>
+              <a:tr h="786384">
+                <a:tc>
+                  <a:txBody>
+                    <a:bodyPr/>
+                    <a:lstStyle/>
+                    <a:p>
+                      <a:pPr>
+                        <a:defRPr sz="1500" b="1">
+                          <a:solidFill>
+                            <a:srgbClr val="FFFFFF"/>
+                          </a:solidFill>
+                          <a:latin typeface="Microsoft YaHei"/>
+                        </a:defRPr>
+                      </a:pPr>
+                      <a:r>
+                        <a:t>预警年</a:t>
+                      </a:r>
+                    </a:p>
+                  </a:txBody>
+                  <a:tcPr>
+                    <a:solidFill>
+                      <a:srgbClr val="162A41"/>
+                    </a:solidFill>
+                  </a:tcPr>
+                </a:tc>
+                <a:tc>
+                  <a:txBody>
+                    <a:bodyPr/>
+                    <a:lstStyle/>
+                    <a:p>
+                      <a:pPr>
+                        <a:defRPr sz="1500" b="1">
+                          <a:solidFill>
+                            <a:srgbClr val="FFFFFF"/>
+                          </a:solidFill>
+                          <a:latin typeface="Microsoft YaHei"/>
+                        </a:defRPr>
+                      </a:pPr>
+                      <a:r>
+                        <a:t>样本</a:t>
+                      </a:r>
+                    </a:p>
+                  </a:txBody>
+                  <a:tcPr>
+                    <a:solidFill>
+                      <a:srgbClr val="162A41"/>
+                    </a:solidFill>
+                  </a:tcPr>
+                </a:tc>
+                <a:tc>
+                  <a:txBody>
+                    <a:bodyPr/>
+                    <a:lstStyle/>
+                    <a:p>
+                      <a:pPr>
+                        <a:defRPr sz="1500" b="1">
+                          <a:solidFill>
+                            <a:srgbClr val="FFFFFF"/>
+                          </a:solidFill>
+                          <a:latin typeface="Microsoft YaHei"/>
+                        </a:defRPr>
+                      </a:pPr>
+                      <a:r>
+                        <a:t>实际下降</a:t>
+                      </a:r>
+                    </a:p>
+                  </a:txBody>
+                  <a:tcPr>
+                    <a:solidFill>
+                      <a:srgbClr val="162A41"/>
+                    </a:solidFill>
+                  </a:tcPr>
+                </a:tc>
+                <a:tc>
+                  <a:txBody>
+                    <a:bodyPr/>
+                    <a:lstStyle/>
+                    <a:p>
+                      <a:pPr>
+                        <a:defRPr sz="1500" b="1">
+                          <a:solidFill>
+                            <a:srgbClr val="FFFFFF"/>
+                          </a:solidFill>
+                          <a:latin typeface="Microsoft YaHei"/>
+                        </a:defRPr>
+                      </a:pPr>
+                      <a:r>
+                        <a:t>旧规则命中率</a:t>
+                      </a:r>
+                    </a:p>
+                  </a:txBody>
+                  <a:tcPr>
+                    <a:solidFill>
+                      <a:srgbClr val="162A41"/>
+                    </a:solidFill>
+                  </a:tcPr>
+                </a:tc>
+                <a:tc>
+                  <a:txBody>
+                    <a:bodyPr/>
+                    <a:lstStyle/>
+                    <a:p>
+                      <a:pPr>
+                        <a:defRPr sz="1500" b="1">
+                          <a:solidFill>
+                            <a:srgbClr val="FFFFFF"/>
+                          </a:solidFill>
+                          <a:latin typeface="Microsoft YaHei"/>
+                        </a:defRPr>
+                      </a:pPr>
+                      <a:r>
+                        <a:t>旧规则找回率</a:t>
+                      </a:r>
+                    </a:p>
+                  </a:txBody>
+                  <a:tcPr>
+                    <a:solidFill>
+                      <a:srgbClr val="162A41"/>
+                    </a:solidFill>
+                  </a:tcPr>
+                </a:tc>
+                <a:tc>
+                  <a:txBody>
+                    <a:bodyPr/>
+                    <a:lstStyle/>
+                    <a:p>
+                      <a:pPr>
+                        <a:defRPr sz="1500" b="1">
+                          <a:solidFill>
+                            <a:srgbClr val="FFFFFF"/>
+                          </a:solidFill>
+                          <a:latin typeface="Microsoft YaHei"/>
+                        </a:defRPr>
+                      </a:pPr>
+                      <a:r>
+                        <a:t>双源命中率</a:t>
+                      </a:r>
+                    </a:p>
+                  </a:txBody>
+                  <a:tcPr>
+                    <a:solidFill>
+                      <a:srgbClr val="162A41"/>
+                    </a:solidFill>
+                  </a:tcPr>
+                </a:tc>
+                <a:tc>
+                  <a:txBody>
+                    <a:bodyPr/>
+                    <a:lstStyle/>
+                    <a:p>
+                      <a:pPr>
+                        <a:defRPr sz="1500" b="1">
+                          <a:solidFill>
+                            <a:srgbClr val="FFFFFF"/>
+                          </a:solidFill>
+                          <a:latin typeface="Microsoft YaHei"/>
+                        </a:defRPr>
+                      </a:pPr>
+                      <a:r>
+                        <a:t>双源找回率</a:t>
+                      </a:r>
+                    </a:p>
+                  </a:txBody>
+                  <a:tcPr>
+                    <a:solidFill>
+                      <a:srgbClr val="162A41"/>
+                    </a:solidFill>
+                  </a:tcPr>
+                </a:tc>
+              </a:tr>
+              <a:tr h="786384">
+                <a:tc>
+                  <a:txBody>
+                    <a:bodyPr/>
+                    <a:lstStyle/>
+                    <a:p>
+                      <a:pPr>
+                        <a:defRPr sz="1500" b="0">
+                          <a:solidFill>
+                            <a:srgbClr val="162A41"/>
+                          </a:solidFill>
+                          <a:latin typeface="Microsoft YaHei"/>
+                        </a:defRPr>
+                      </a:pPr>
+                      <a:r>
+                        <a:t>2022</a:t>
+                      </a:r>
+                    </a:p>
+                  </a:txBody>
+                  <a:tcPr>
+                    <a:solidFill>
+                      <a:srgbClr val="EAF1F3"/>
+                    </a:solidFill>
+                  </a:tcPr>
+                </a:tc>
+                <a:tc>
+                  <a:txBody>
+                    <a:bodyPr/>
+                    <a:lstStyle/>
+                    <a:p>
+                      <a:pPr>
+                        <a:defRPr sz="1500" b="0">
+                          <a:solidFill>
+                            <a:srgbClr val="162A41"/>
+                          </a:solidFill>
+                          <a:latin typeface="Microsoft YaHei"/>
+                        </a:defRPr>
+                      </a:pPr>
+                      <a:r>
+                        <a:t>15</a:t>
+                      </a:r>
+                    </a:p>
+                  </a:txBody>
+                  <a:tcPr>
+                    <a:solidFill>
+                      <a:srgbClr val="EAF1F3"/>
+                    </a:solidFill>
+                  </a:tcPr>
+                </a:tc>
+                <a:tc>
+                  <a:txBody>
+                    <a:bodyPr/>
+                    <a:lstStyle/>
+                    <a:p>
+                      <a:pPr>
+                        <a:defRPr sz="1500" b="0">
+                          <a:solidFill>
+                            <a:srgbClr val="162A41"/>
+                          </a:solidFill>
+                          <a:latin typeface="Microsoft YaHei"/>
+                        </a:defRPr>
+                      </a:pPr>
+                      <a:r>
+                        <a:t>10</a:t>
+                      </a:r>
+                    </a:p>
+                  </a:txBody>
+                  <a:tcPr>
+                    <a:solidFill>
+                      <a:srgbClr val="EAF1F3"/>
+                    </a:solidFill>
+                  </a:tcPr>
+                </a:tc>
+                <a:tc>
+                  <a:txBody>
+                    <a:bodyPr/>
+                    <a:lstStyle/>
+                    <a:p>
+                      <a:pPr>
+                        <a:defRPr sz="1500" b="0">
+                          <a:solidFill>
+                            <a:srgbClr val="162A41"/>
+                          </a:solidFill>
+                          <a:latin typeface="Microsoft YaHei"/>
+                        </a:defRPr>
+                      </a:pPr>
+                      <a:r>
+                        <a:t>80.0%</a:t>
+                      </a:r>
+                    </a:p>
+                  </a:txBody>
+                  <a:tcPr>
+                    <a:solidFill>
+                      <a:srgbClr val="EAF1F3"/>
+                    </a:solidFill>
+                  </a:tcPr>
+                </a:tc>
+                <a:tc>
+                  <a:txBody>
+                    <a:bodyPr/>
+                    <a:lstStyle/>
+                    <a:p>
+                      <a:pPr>
+                        <a:defRPr sz="1500" b="0">
+                          <a:solidFill>
+                            <a:srgbClr val="162A41"/>
+                          </a:solidFill>
+                          <a:latin typeface="Microsoft YaHei"/>
+                        </a:defRPr>
+                      </a:pPr>
+                      <a:r>
+                        <a:t>40.0%</a:t>
+                      </a:r>
+                    </a:p>
+                  </a:txBody>
+                  <a:tcPr>
+                    <a:solidFill>
+                      <a:srgbClr val="EAF1F3"/>
+                    </a:solidFill>
+                  </a:tcPr>
+                </a:tc>
+                <a:tc>
+                  <a:txBody>
+                    <a:bodyPr/>
+                    <a:lstStyle/>
+                    <a:p>
+                      <a:pPr>
+                        <a:defRPr sz="1500" b="0">
+                          <a:solidFill>
+                            <a:srgbClr val="162A41"/>
+                          </a:solidFill>
+                          <a:latin typeface="Microsoft YaHei"/>
+                        </a:defRPr>
+                      </a:pPr>
+                      <a:r>
+                        <a:t>100.0%</a:t>
+                      </a:r>
+                    </a:p>
+                  </a:txBody>
+                  <a:tcPr>
+                    <a:solidFill>
+                      <a:srgbClr val="EAF1F3"/>
+                    </a:solidFill>
+                  </a:tcPr>
+                </a:tc>
+                <a:tc>
+                  <a:txBody>
+                    <a:bodyPr/>
+                    <a:lstStyle/>
+                    <a:p>
+                      <a:pPr>
+                        <a:defRPr sz="1500" b="0">
+                          <a:solidFill>
+                            <a:srgbClr val="162A41"/>
+                          </a:solidFill>
+                          <a:latin typeface="Microsoft YaHei"/>
+                        </a:defRPr>
+                      </a:pPr>
+                      <a:r>
+                        <a:t>30.0%</a:t>
+                      </a:r>
+                    </a:p>
+                  </a:txBody>
+                  <a:tcPr>
+                    <a:solidFill>
+                      <a:srgbClr val="EAF1F3"/>
+                    </a:solidFill>
+                  </a:tcPr>
+                </a:tc>
+              </a:tr>
+              <a:tr h="786384">
+                <a:tc>
+                  <a:txBody>
+                    <a:bodyPr/>
+                    <a:lstStyle/>
+                    <a:p>
+                      <a:pPr>
+                        <a:defRPr sz="1500" b="0">
+                          <a:solidFill>
+                            <a:srgbClr val="162A41"/>
+                          </a:solidFill>
+                          <a:latin typeface="Microsoft YaHei"/>
+                        </a:defRPr>
+                      </a:pPr>
+                      <a:r>
+                        <a:t>2023</a:t>
+                      </a:r>
+                    </a:p>
+                  </a:txBody>
+                  <a:tcPr>
+                    <a:solidFill>
+                      <a:srgbClr val="F8FAFB"/>
+                    </a:solidFill>
+                  </a:tcPr>
+                </a:tc>
+                <a:tc>
+                  <a:txBody>
+                    <a:bodyPr/>
+                    <a:lstStyle/>
+                    <a:p>
+                      <a:pPr>
+                        <a:defRPr sz="1500" b="0">
+                          <a:solidFill>
+                            <a:srgbClr val="162A41"/>
+                          </a:solidFill>
+                          <a:latin typeface="Microsoft YaHei"/>
+                        </a:defRPr>
+                      </a:pPr>
+                      <a:r>
+                        <a:t>19</a:t>
+                      </a:r>
+                    </a:p>
+                  </a:txBody>
+                  <a:tcPr>
+                    <a:solidFill>
+                      <a:srgbClr val="F8FAFB"/>
+                    </a:solidFill>
+                  </a:tcPr>
+                </a:tc>
+                <a:tc>
+                  <a:txBody>
+                    <a:bodyPr/>
+                    <a:lstStyle/>
+                    <a:p>
+                      <a:pPr>
+                        <a:defRPr sz="1500" b="0">
+                          <a:solidFill>
+                            <a:srgbClr val="162A41"/>
+                          </a:solidFill>
+                          <a:latin typeface="Microsoft YaHei"/>
+                        </a:defRPr>
+                      </a:pPr>
+                      <a:r>
+                        <a:t>13</a:t>
+                      </a:r>
+                    </a:p>
+                  </a:txBody>
+                  <a:tcPr>
+                    <a:solidFill>
+                      <a:srgbClr val="F8FAFB"/>
+                    </a:solidFill>
+                  </a:tcPr>
+                </a:tc>
+                <a:tc>
+                  <a:txBody>
+                    <a:bodyPr/>
+                    <a:lstStyle/>
+                    <a:p>
+                      <a:pPr>
+                        <a:defRPr sz="1500" b="0">
+                          <a:solidFill>
+                            <a:srgbClr val="162A41"/>
+                          </a:solidFill>
+                          <a:latin typeface="Microsoft YaHei"/>
+                        </a:defRPr>
+                      </a:pPr>
+                      <a:r>
+                        <a:t>83.3%</a:t>
+                      </a:r>
+                    </a:p>
+                  </a:txBody>
+                  <a:tcPr>
+                    <a:solidFill>
+                      <a:srgbClr val="F8FAFB"/>
+                    </a:solidFill>
+                  </a:tcPr>
+                </a:tc>
+                <a:tc>
+                  <a:txBody>
+                    <a:bodyPr/>
+                    <a:lstStyle/>
+                    <a:p>
+                      <a:pPr>
+                        <a:defRPr sz="1500" b="0">
+                          <a:solidFill>
+                            <a:srgbClr val="162A41"/>
+                          </a:solidFill>
+                          <a:latin typeface="Microsoft YaHei"/>
+                        </a:defRPr>
+                      </a:pPr>
+                      <a:r>
+                        <a:t>38.5%</a:t>
+                      </a:r>
+                    </a:p>
+                  </a:txBody>
+                  <a:tcPr>
+                    <a:solidFill>
+                      <a:srgbClr val="F8FAFB"/>
+                    </a:solidFill>
+                  </a:tcPr>
+                </a:tc>
+                <a:tc>
+                  <a:txBody>
+                    <a:bodyPr/>
+                    <a:lstStyle/>
+                    <a:p>
+                      <a:pPr>
+                        <a:defRPr sz="1500" b="0">
+                          <a:solidFill>
+                            <a:srgbClr val="162A41"/>
+                          </a:solidFill>
+                          <a:latin typeface="Microsoft YaHei"/>
+                        </a:defRPr>
+                      </a:pPr>
+                      <a:r>
+                        <a:t>80.0%</a:t>
+                      </a:r>
+                    </a:p>
+                  </a:txBody>
+                  <a:tcPr>
+                    <a:solidFill>
+                      <a:srgbClr val="F8FAFB"/>
+                    </a:solidFill>
+                  </a:tcPr>
+                </a:tc>
+                <a:tc>
+                  <a:txBody>
+                    <a:bodyPr/>
+                    <a:lstStyle/>
+                    <a:p>
+                      <a:pPr>
+                        <a:defRPr sz="1500" b="0">
+                          <a:solidFill>
+                            <a:srgbClr val="162A41"/>
+                          </a:solidFill>
+                          <a:latin typeface="Microsoft YaHei"/>
+                        </a:defRPr>
+                      </a:pPr>
+                      <a:r>
+                        <a:t>30.8%</a:t>
+                      </a:r>
+                    </a:p>
+                  </a:txBody>
+                  <a:tcPr>
+                    <a:solidFill>
+                      <a:srgbClr val="F8FAFB"/>
+                    </a:solidFill>
+                  </a:tcPr>
+                </a:tc>
+              </a:tr>
+              <a:tr h="786384">
+                <a:tc>
+                  <a:txBody>
+                    <a:bodyPr/>
+                    <a:lstStyle/>
+                    <a:p>
+                      <a:pPr>
+                        <a:defRPr sz="1500" b="0">
+                          <a:solidFill>
+                            <a:srgbClr val="162A41"/>
+                          </a:solidFill>
+                          <a:latin typeface="Microsoft YaHei"/>
+                        </a:defRPr>
+                      </a:pPr>
+                      <a:r>
+                        <a:t>2024</a:t>
+                      </a:r>
+                    </a:p>
+                  </a:txBody>
+                  <a:tcPr>
+                    <a:solidFill>
+                      <a:srgbClr val="EAF1F3"/>
+                    </a:solidFill>
+                  </a:tcPr>
+                </a:tc>
+                <a:tc>
+                  <a:txBody>
+                    <a:bodyPr/>
+                    <a:lstStyle/>
+                    <a:p>
+                      <a:pPr>
+                        <a:defRPr sz="1500" b="0">
+                          <a:solidFill>
+                            <a:srgbClr val="162A41"/>
+                          </a:solidFill>
+                          <a:latin typeface="Microsoft YaHei"/>
+                        </a:defRPr>
+                      </a:pPr>
+                      <a:r>
+                        <a:t>25</a:t>
+                      </a:r>
+                    </a:p>
+                  </a:txBody>
+                  <a:tcPr>
+                    <a:solidFill>
+                      <a:srgbClr val="EAF1F3"/>
+                    </a:solidFill>
+                  </a:tcPr>
+                </a:tc>
+                <a:tc>
+                  <a:txBody>
+                    <a:bodyPr/>
+                    <a:lstStyle/>
+                    <a:p>
+                      <a:pPr>
+                        <a:defRPr sz="1500" b="0">
+                          <a:solidFill>
+                            <a:srgbClr val="162A41"/>
+                          </a:solidFill>
+                          <a:latin typeface="Microsoft YaHei"/>
+                        </a:defRPr>
+                      </a:pPr>
+                      <a:r>
+                        <a:t>0</a:t>
+                      </a:r>
+                    </a:p>
+                  </a:txBody>
+                  <a:tcPr>
+                    <a:solidFill>
+                      <a:srgbClr val="EAF1F3"/>
+                    </a:solidFill>
+                  </a:tcPr>
+                </a:tc>
+                <a:tc>
+                  <a:txBody>
+                    <a:bodyPr/>
+                    <a:lstStyle/>
+                    <a:p>
+                      <a:pPr>
+                        <a:defRPr sz="1500" b="0">
+                          <a:solidFill>
+                            <a:srgbClr val="162A41"/>
+                          </a:solidFill>
+                          <a:latin typeface="Microsoft YaHei"/>
+                        </a:defRPr>
+                      </a:pPr>
+                      <a:r>
+                        <a:t>0.0%</a:t>
+                      </a:r>
+                    </a:p>
+                  </a:txBody>
+                  <a:tcPr>
+                    <a:solidFill>
+                      <a:srgbClr val="EAF1F3"/>
+                    </a:solidFill>
+                  </a:tcPr>
+                </a:tc>
+                <a:tc>
+                  <a:txBody>
+                    <a:bodyPr/>
+                    <a:lstStyle/>
+                    <a:p>
+                      <a:pPr>
+                        <a:defRPr sz="1500" b="0">
+                          <a:solidFill>
+                            <a:srgbClr val="162A41"/>
+                          </a:solidFill>
+                          <a:latin typeface="Microsoft YaHei"/>
+                        </a:defRPr>
+                      </a:pPr>
+                      <a:r>
+                        <a:t>—</a:t>
+                      </a:r>
+                    </a:p>
+                  </a:txBody>
+                  <a:tcPr>
+                    <a:solidFill>
+                      <a:srgbClr val="EAF1F3"/>
+                    </a:solidFill>
+                  </a:tcPr>
+                </a:tc>
+                <a:tc>
+                  <a:txBody>
+                    <a:bodyPr/>
+                    <a:lstStyle/>
+                    <a:p>
+                      <a:pPr>
+                        <a:defRPr sz="1500" b="0">
+                          <a:solidFill>
+                            <a:srgbClr val="162A41"/>
+                          </a:solidFill>
+                          <a:latin typeface="Microsoft YaHei"/>
+                        </a:defRPr>
+                      </a:pPr>
+                      <a:r>
+                        <a:t>0.0%</a:t>
+                      </a:r>
+                    </a:p>
+                  </a:txBody>
+                  <a:tcPr>
+                    <a:solidFill>
+                      <a:srgbClr val="EAF1F3"/>
+                    </a:solidFill>
+                  </a:tcPr>
+                </a:tc>
+                <a:tc>
+                  <a:txBody>
+                    <a:bodyPr/>
+                    <a:lstStyle/>
+                    <a:p>
+                      <a:pPr>
+                        <a:defRPr sz="1500" b="0">
+                          <a:solidFill>
+                            <a:srgbClr val="162A41"/>
+                          </a:solidFill>
+                          <a:latin typeface="Microsoft YaHei"/>
+                        </a:defRPr>
+                      </a:pPr>
+                      <a:r>
+                        <a:t>—</a:t>
+                      </a:r>
+                    </a:p>
+                  </a:txBody>
+                  <a:tcPr>
+                    <a:solidFill>
+                      <a:srgbClr val="EAF1F3"/>
+                    </a:solidFill>
+                  </a:tcPr>
+                </a:tc>
+              </a:tr>
+            </a:tbl>
           </a:graphicData>
         </a:graphic>
       </p:graphicFrame>
@@ -9566,8 +10767,8 @@
         </p:nvSpPr>
         <p:spPr>
           <a:xfrm>
-            <a:off x="7662672" y="1655064"/>
-            <a:ext cx="3749039" cy="1828800"/>
+            <a:off x="749808" y="5056632"/>
+            <a:ext cx="10607040" cy="841248"/>
           </a:xfrm>
           <a:prstGeom prst="rect">
             <a:avLst/>
@@ -9584,62 +10785,7 @@
               <a:spcAft>
                 <a:spcPts val="1000"/>
               </a:spcAft>
-              <a:defRPr sz="1800" b="0">
-                <a:solidFill>
-                  <a:srgbClr val="162A41"/>
-                </a:solidFill>
-                <a:latin typeface="Microsoft YaHei"/>
-              </a:defRPr>
-            </a:pPr>
-            <a:r>
-              <a:t>蓝色：命中率，警报有多准。</a:t>
-            </a:r>
-          </a:p>
-          <a:p>
-            <a:pPr>
-              <a:spcAft>
-                <a:spcPts val="1000"/>
-              </a:spcAft>
-              <a:defRPr sz="1800" b="0">
-                <a:solidFill>
-                  <a:srgbClr val="162A41"/>
-                </a:solidFill>
-                <a:latin typeface="Microsoft YaHei"/>
-              </a:defRPr>
-            </a:pPr>
-            <a:r>
-              <a:t>红色：找回率，下降检出多少。</a:t>
-            </a:r>
-          </a:p>
-        </p:txBody>
-      </p:sp>
-      <p:sp>
-        <p:nvSpPr>
-          <p:cNvPr id="7" name="TextBox 6"/>
-          <p:cNvSpPr txBox="1"/>
-          <p:nvPr/>
-        </p:nvSpPr>
-        <p:spPr>
-          <a:xfrm>
-            <a:off x="7662672" y="4233672"/>
-            <a:ext cx="3794760" cy="1325880"/>
-          </a:xfrm>
-          <a:prstGeom prst="rect">
-            <a:avLst/>
-          </a:prstGeom>
-          <a:noFill/>
-        </p:spPr>
-        <p:txBody>
-          <a:bodyPr wrap="square" lIns="18288" rIns="18288" tIns="9144" bIns="9144">
-            <a:spAutoFit/>
-          </a:bodyPr>
-          <a:lstStyle/>
-          <a:p>
-            <a:pPr>
-              <a:spcAft>
-                <a:spcPts val="1000"/>
-              </a:spcAft>
-              <a:defRPr sz="1800" b="0">
+              <a:defRPr sz="1900" b="0">
                 <a:solidFill>
                   <a:srgbClr val="C36623"/>
                 </a:solidFill>
@@ -9647,7 +10793,7 @@
               </a:defRPr>
             </a:pPr>
             <a:r>
-              <a:t>双源规则适合排人工核查的优先级，尚不能替代广覆盖监测。</a:t>
+              <a:t>2024 年这组技术没有下一年下降；找回率的分母为零，故显示“—”。</a:t>
             </a:r>
           </a:p>
         </p:txBody>
@@ -9712,7 +10858,7 @@
               </a:defRPr>
             </a:pPr>
             <a:r>
-              <a:t>测试二：能否筛出下一年评论量下降</a:t>
+              <a:t>看几条真实记录如何判定</a:t>
             </a:r>
           </a:p>
         </p:txBody>
@@ -9751,7 +10897,7 @@
               </a:defRPr>
             </a:pPr>
             <a:r>
-              <a:t>五项技术、17 条可比记录；每行满足：命中＋误报＋漏报＋正确未报＝17</a:t>
+              <a:t>示例取自 2024 年预警；2025 年问卷结果只用于事后核验</a:t>
             </a:r>
           </a:p>
         </p:txBody>
@@ -9804,8 +10950,8 @@
           <p:nvPr/>
         </p:nvGraphicFramePr>
         <p:xfrm>
-          <a:off x="566928" y="1408176"/>
-          <a:ext cx="10652760" cy="3246120"/>
+          <a:off x="667512" y="1371600"/>
+          <a:ext cx="11247120" cy="4288536"/>
         </p:xfrm>
         <a:graphic>
           <a:graphicData uri="http://schemas.openxmlformats.org/drawingml/2006/table">
@@ -9814,23 +10960,20 @@
                 <a:tableStyleId>{5C22544A-7EE6-4342-B048-85BDC9FD1C3A}</a:tableStyleId>
               </a:tblPr>
               <a:tblGrid>
-                <a:gridCol w="2148840"/>
-                <a:gridCol w="914400"/>
-                <a:gridCol w="914400"/>
-                <a:gridCol w="914400"/>
-                <a:gridCol w="914400"/>
-                <a:gridCol w="1463040"/>
-                <a:gridCol w="1691640"/>
-                <a:gridCol w="1691640"/>
+                <a:gridCol w="2194560"/>
+                <a:gridCol w="1554480"/>
+                <a:gridCol w="1554480"/>
+                <a:gridCol w="3474720"/>
+                <a:gridCol w="2468880"/>
               </a:tblGrid>
-              <a:tr h="649224">
-                <a:tc>
-                  <a:txBody>
-                    <a:bodyPr/>
-                    <a:lstStyle/>
-                    <a:p>
-                      <a:pPr>
-                        <a:defRPr sz="1500" b="1">
+              <a:tr h="612648">
+                <a:tc>
+                  <a:txBody>
+                    <a:bodyPr/>
+                    <a:lstStyle/>
+                    <a:p>
+                      <a:pPr>
+                        <a:defRPr sz="1600" b="1">
                           <a:solidFill>
                             <a:srgbClr val="FFFFFF"/>
                           </a:solidFill>
@@ -9838,7 +10981,7 @@
                         </a:defRPr>
                       </a:pPr>
                       <a:r>
-                        <a:t>规则</a:t>
+                        <a:t>技术</a:t>
                       </a:r>
                     </a:p>
                   </a:txBody>
@@ -9854,7 +10997,7 @@
                     <a:lstStyle/>
                     <a:p>
                       <a:pPr>
-                        <a:defRPr sz="1500" b="1">
+                        <a:defRPr sz="1600" b="1">
                           <a:solidFill>
                             <a:srgbClr val="FFFFFF"/>
                           </a:solidFill>
@@ -9862,177 +11005,349 @@
                         </a:defRPr>
                       </a:pPr>
                       <a:r>
+                        <a:t>当年问卷</a:t>
+                      </a:r>
+                    </a:p>
+                  </a:txBody>
+                  <a:tcPr>
+                    <a:solidFill>
+                      <a:srgbClr val="162A41"/>
+                    </a:solidFill>
+                  </a:tcPr>
+                </a:tc>
+                <a:tc>
+                  <a:txBody>
+                    <a:bodyPr/>
+                    <a:lstStyle/>
+                    <a:p>
+                      <a:pPr>
+                        <a:defRPr sz="1600" b="1">
+                          <a:solidFill>
+                            <a:srgbClr val="FFFFFF"/>
+                          </a:solidFill>
+                          <a:latin typeface="Microsoft YaHei"/>
+                        </a:defRPr>
+                      </a:pPr>
+                      <a:r>
+                        <a:t>当年评论</a:t>
+                      </a:r>
+                    </a:p>
+                  </a:txBody>
+                  <a:tcPr>
+                    <a:solidFill>
+                      <a:srgbClr val="162A41"/>
+                    </a:solidFill>
+                  </a:tcPr>
+                </a:tc>
+                <a:tc>
+                  <a:txBody>
+                    <a:bodyPr/>
+                    <a:lstStyle/>
+                    <a:p>
+                      <a:pPr>
+                        <a:defRPr sz="1600" b="1">
+                          <a:solidFill>
+                            <a:srgbClr val="FFFFFF"/>
+                          </a:solidFill>
+                          <a:latin typeface="Microsoft YaHei"/>
+                        </a:defRPr>
+                      </a:pPr>
+                      <a:r>
+                        <a:t>当年输出</a:t>
+                      </a:r>
+                    </a:p>
+                  </a:txBody>
+                  <a:tcPr>
+                    <a:solidFill>
+                      <a:srgbClr val="162A41"/>
+                    </a:solidFill>
+                  </a:tcPr>
+                </a:tc>
+                <a:tc>
+                  <a:txBody>
+                    <a:bodyPr/>
+                    <a:lstStyle/>
+                    <a:p>
+                      <a:pPr>
+                        <a:defRPr sz="1600" b="1">
+                          <a:solidFill>
+                            <a:srgbClr val="FFFFFF"/>
+                          </a:solidFill>
+                          <a:latin typeface="Microsoft YaHei"/>
+                        </a:defRPr>
+                      </a:pPr>
+                      <a:r>
+                        <a:t>后续使用率</a:t>
+                      </a:r>
+                    </a:p>
+                  </a:txBody>
+                  <a:tcPr>
+                    <a:solidFill>
+                      <a:srgbClr val="162A41"/>
+                    </a:solidFill>
+                  </a:tcPr>
+                </a:tc>
+              </a:tr>
+              <a:tr h="612648">
+                <a:tc>
+                  <a:txBody>
+                    <a:bodyPr/>
+                    <a:lstStyle/>
+                    <a:p>
+                      <a:pPr>
+                        <a:defRPr sz="1600" b="0">
+                          <a:solidFill>
+                            <a:srgbClr val="162A41"/>
+                          </a:solidFill>
+                          <a:latin typeface="Microsoft YaHei"/>
+                        </a:defRPr>
+                      </a:pPr>
+                      <a:r>
+                        <a:t>jQuery</a:t>
+                      </a:r>
+                    </a:p>
+                  </a:txBody>
+                  <a:tcPr>
+                    <a:solidFill>
+                      <a:srgbClr val="EAF1F3"/>
+                    </a:solidFill>
+                  </a:tcPr>
+                </a:tc>
+                <a:tc>
+                  <a:txBody>
+                    <a:bodyPr/>
+                    <a:lstStyle/>
+                    <a:p>
+                      <a:pPr>
+                        <a:defRPr sz="1600" b="0">
+                          <a:solidFill>
+                            <a:srgbClr val="162A41"/>
+                          </a:solidFill>
+                          <a:latin typeface="Microsoft YaHei"/>
+                        </a:defRPr>
+                      </a:pPr>
+                      <a:r>
                         <a:t>警报</a:t>
                       </a:r>
                     </a:p>
                   </a:txBody>
                   <a:tcPr>
                     <a:solidFill>
-                      <a:srgbClr val="162A41"/>
-                    </a:solidFill>
-                  </a:tcPr>
-                </a:tc>
-                <a:tc>
-                  <a:txBody>
-                    <a:bodyPr/>
-                    <a:lstStyle/>
-                    <a:p>
-                      <a:pPr>
-                        <a:defRPr sz="1500" b="1">
-                          <a:solidFill>
-                            <a:srgbClr val="FFFFFF"/>
-                          </a:solidFill>
-                          <a:latin typeface="Microsoft YaHei"/>
-                        </a:defRPr>
-                      </a:pPr>
-                      <a:r>
-                        <a:t>命中</a:t>
-                      </a:r>
-                    </a:p>
-                  </a:txBody>
-                  <a:tcPr>
-                    <a:solidFill>
-                      <a:srgbClr val="162A41"/>
-                    </a:solidFill>
-                  </a:tcPr>
-                </a:tc>
-                <a:tc>
-                  <a:txBody>
-                    <a:bodyPr/>
-                    <a:lstStyle/>
-                    <a:p>
-                      <a:pPr>
-                        <a:defRPr sz="1500" b="1">
-                          <a:solidFill>
-                            <a:srgbClr val="FFFFFF"/>
-                          </a:solidFill>
-                          <a:latin typeface="Microsoft YaHei"/>
-                        </a:defRPr>
-                      </a:pPr>
-                      <a:r>
-                        <a:t>误报</a:t>
-                      </a:r>
-                    </a:p>
-                  </a:txBody>
-                  <a:tcPr>
-                    <a:solidFill>
-                      <a:srgbClr val="162A41"/>
-                    </a:solidFill>
-                  </a:tcPr>
-                </a:tc>
-                <a:tc>
-                  <a:txBody>
-                    <a:bodyPr/>
-                    <a:lstStyle/>
-                    <a:p>
-                      <a:pPr>
-                        <a:defRPr sz="1500" b="1">
-                          <a:solidFill>
-                            <a:srgbClr val="FFFFFF"/>
-                          </a:solidFill>
-                          <a:latin typeface="Microsoft YaHei"/>
-                        </a:defRPr>
-                      </a:pPr>
-                      <a:r>
-                        <a:t>漏报</a:t>
-                      </a:r>
-                    </a:p>
-                  </a:txBody>
-                  <a:tcPr>
-                    <a:solidFill>
-                      <a:srgbClr val="162A41"/>
-                    </a:solidFill>
-                  </a:tcPr>
-                </a:tc>
-                <a:tc>
-                  <a:txBody>
-                    <a:bodyPr/>
-                    <a:lstStyle/>
-                    <a:p>
-                      <a:pPr>
-                        <a:defRPr sz="1500" b="1">
-                          <a:solidFill>
-                            <a:srgbClr val="FFFFFF"/>
-                          </a:solidFill>
-                          <a:latin typeface="Microsoft YaHei"/>
-                        </a:defRPr>
-                      </a:pPr>
-                      <a:r>
-                        <a:t>正确未报</a:t>
-                      </a:r>
-                    </a:p>
-                  </a:txBody>
-                  <a:tcPr>
-                    <a:solidFill>
-                      <a:srgbClr val="162A41"/>
-                    </a:solidFill>
-                  </a:tcPr>
-                </a:tc>
-                <a:tc>
-                  <a:txBody>
-                    <a:bodyPr/>
-                    <a:lstStyle/>
-                    <a:p>
-                      <a:pPr>
-                        <a:defRPr sz="1500" b="1">
-                          <a:solidFill>
-                            <a:srgbClr val="FFFFFF"/>
-                          </a:solidFill>
-                          <a:latin typeface="Microsoft YaHei"/>
-                        </a:defRPr>
-                      </a:pPr>
-                      <a:r>
-                        <a:t>命中率</a:t>
-                      </a:r>
-                    </a:p>
-                  </a:txBody>
-                  <a:tcPr>
-                    <a:solidFill>
-                      <a:srgbClr val="162A41"/>
-                    </a:solidFill>
-                  </a:tcPr>
-                </a:tc>
-                <a:tc>
-                  <a:txBody>
-                    <a:bodyPr/>
-                    <a:lstStyle/>
-                    <a:p>
-                      <a:pPr>
-                        <a:defRPr sz="1500" b="1">
-                          <a:solidFill>
-                            <a:srgbClr val="FFFFFF"/>
-                          </a:solidFill>
-                          <a:latin typeface="Microsoft YaHei"/>
-                        </a:defRPr>
-                      </a:pPr>
-                      <a:r>
-                        <a:t>找回率</a:t>
-                      </a:r>
-                    </a:p>
-                  </a:txBody>
-                  <a:tcPr>
-                    <a:solidFill>
-                      <a:srgbClr val="162A41"/>
+                      <a:srgbClr val="EAF1F3"/>
+                    </a:solidFill>
+                  </a:tcPr>
+                </a:tc>
+                <a:tc>
+                  <a:txBody>
+                    <a:bodyPr/>
+                    <a:lstStyle/>
+                    <a:p>
+                      <a:pPr>
+                        <a:defRPr sz="1600" b="0">
+                          <a:solidFill>
+                            <a:srgbClr val="162A41"/>
+                          </a:solidFill>
+                          <a:latin typeface="Microsoft YaHei"/>
+                        </a:defRPr>
+                      </a:pPr>
+                      <a:r>
+                        <a:t>警报</a:t>
+                      </a:r>
+                    </a:p>
+                  </a:txBody>
+                  <a:tcPr>
+                    <a:solidFill>
+                      <a:srgbClr val="EAF1F3"/>
+                    </a:solidFill>
+                  </a:tcPr>
+                </a:tc>
+                <a:tc>
+                  <a:txBody>
+                    <a:bodyPr/>
+                    <a:lstStyle/>
+                    <a:p>
+                      <a:pPr>
+                        <a:defRPr sz="1600" b="0">
+                          <a:solidFill>
+                            <a:srgbClr val="162A41"/>
+                          </a:solidFill>
+                          <a:latin typeface="Microsoft YaHei"/>
+                        </a:defRPr>
+                      </a:pPr>
+                      <a:r>
+                        <a:t>双源收缩</a:t>
+                      </a:r>
+                    </a:p>
+                  </a:txBody>
+                  <a:tcPr>
+                    <a:solidFill>
+                      <a:srgbClr val="EAF1F3"/>
+                    </a:solidFill>
+                  </a:tcPr>
+                </a:tc>
+                <a:tc>
+                  <a:txBody>
+                    <a:bodyPr/>
+                    <a:lstStyle/>
+                    <a:p>
+                      <a:pPr>
+                        <a:defRPr sz="1600" b="0">
+                          <a:solidFill>
+                            <a:srgbClr val="162A41"/>
+                          </a:solidFill>
+                          <a:latin typeface="Microsoft YaHei"/>
+                        </a:defRPr>
+                      </a:pPr>
+                      <a:r>
+                        <a:t>未下降</a:t>
+                      </a:r>
+                    </a:p>
+                  </a:txBody>
+                  <a:tcPr>
+                    <a:solidFill>
+                      <a:srgbClr val="EAF1F3"/>
                     </a:solidFill>
                   </a:tcPr>
                 </a:tc>
               </a:tr>
-              <a:tr h="649224">
-                <a:tc>
-                  <a:txBody>
-                    <a:bodyPr/>
-                    <a:lstStyle/>
-                    <a:p>
-                      <a:pPr>
-                        <a:defRPr sz="1500" b="0">
-                          <a:solidFill>
-                            <a:srgbClr val="162A41"/>
-                          </a:solidFill>
-                          <a:latin typeface="Microsoft YaHei"/>
-                        </a:defRPr>
-                      </a:pPr>
-                      <a:r>
-                        <a:t>原规则</a:t>
+              <a:tr h="612648">
+                <a:tc>
+                  <a:txBody>
+                    <a:bodyPr/>
+                    <a:lstStyle/>
+                    <a:p>
+                      <a:pPr>
+                        <a:defRPr sz="1600" b="0">
+                          <a:solidFill>
+                            <a:srgbClr val="162A41"/>
+                          </a:solidFill>
+                          <a:latin typeface="Microsoft YaHei"/>
+                        </a:defRPr>
+                      </a:pPr>
+                      <a:r>
+                        <a:t>Flask</a:t>
+                      </a:r>
+                    </a:p>
+                  </a:txBody>
+                  <a:tcPr>
+                    <a:solidFill>
+                      <a:srgbClr val="F8FAFB"/>
+                    </a:solidFill>
+                  </a:tcPr>
+                </a:tc>
+                <a:tc>
+                  <a:txBody>
+                    <a:bodyPr/>
+                    <a:lstStyle/>
+                    <a:p>
+                      <a:pPr>
+                        <a:defRPr sz="1600" b="0">
+                          <a:solidFill>
+                            <a:srgbClr val="162A41"/>
+                          </a:solidFill>
+                          <a:latin typeface="Microsoft YaHei"/>
+                        </a:defRPr>
+                      </a:pPr>
+                      <a:r>
+                        <a:t>警报</a:t>
+                      </a:r>
+                    </a:p>
+                  </a:txBody>
+                  <a:tcPr>
+                    <a:solidFill>
+                      <a:srgbClr val="F8FAFB"/>
+                    </a:solidFill>
+                  </a:tcPr>
+                </a:tc>
+                <a:tc>
+                  <a:txBody>
+                    <a:bodyPr/>
+                    <a:lstStyle/>
+                    <a:p>
+                      <a:pPr>
+                        <a:defRPr sz="1600" b="0">
+                          <a:solidFill>
+                            <a:srgbClr val="162A41"/>
+                          </a:solidFill>
+                          <a:latin typeface="Microsoft YaHei"/>
+                        </a:defRPr>
+                      </a:pPr>
+                      <a:r>
+                        <a:t>警报</a:t>
+                      </a:r>
+                    </a:p>
+                  </a:txBody>
+                  <a:tcPr>
+                    <a:solidFill>
+                      <a:srgbClr val="F8FAFB"/>
+                    </a:solidFill>
+                  </a:tcPr>
+                </a:tc>
+                <a:tc>
+                  <a:txBody>
+                    <a:bodyPr/>
+                    <a:lstStyle/>
+                    <a:p>
+                      <a:pPr>
+                        <a:defRPr sz="1600" b="0">
+                          <a:solidFill>
+                            <a:srgbClr val="162A41"/>
+                          </a:solidFill>
+                          <a:latin typeface="Microsoft YaHei"/>
+                        </a:defRPr>
+                      </a:pPr>
+                      <a:r>
+                        <a:t>双源收缩</a:t>
+                      </a:r>
+                    </a:p>
+                  </a:txBody>
+                  <a:tcPr>
+                    <a:solidFill>
+                      <a:srgbClr val="F8FAFB"/>
+                    </a:solidFill>
+                  </a:tcPr>
+                </a:tc>
+                <a:tc>
+                  <a:txBody>
+                    <a:bodyPr/>
+                    <a:lstStyle/>
+                    <a:p>
+                      <a:pPr>
+                        <a:defRPr sz="1600" b="0">
+                          <a:solidFill>
+                            <a:srgbClr val="162A41"/>
+                          </a:solidFill>
+                          <a:latin typeface="Microsoft YaHei"/>
+                        </a:defRPr>
+                      </a:pPr>
+                      <a:r>
+                        <a:t>未下降</a:t>
+                      </a:r>
+                    </a:p>
+                  </a:txBody>
+                  <a:tcPr>
+                    <a:solidFill>
+                      <a:srgbClr val="F8FAFB"/>
+                    </a:solidFill>
+                  </a:tcPr>
+                </a:tc>
+              </a:tr>
+              <a:tr h="612648">
+                <a:tc>
+                  <a:txBody>
+                    <a:bodyPr/>
+                    <a:lstStyle/>
+                    <a:p>
+                      <a:pPr>
+                        <a:defRPr sz="1600" b="0">
+                          <a:solidFill>
+                            <a:srgbClr val="162A41"/>
+                          </a:solidFill>
+                          <a:latin typeface="Microsoft YaHei"/>
+                        </a:defRPr>
+                      </a:pPr>
+                      <a:r>
+                        <a:t>Spring Boot</a:t>
                       </a:r>
                     </a:p>
                   </a:txBody>
@@ -10048,15 +11363,15 @@
                     <a:lstStyle/>
                     <a:p>
                       <a:pPr>
-                        <a:defRPr sz="1500" b="0">
-                          <a:solidFill>
-                            <a:srgbClr val="162A41"/>
-                          </a:solidFill>
-                          <a:latin typeface="Microsoft YaHei"/>
-                        </a:defRPr>
-                      </a:pPr>
-                      <a:r>
-                        <a:t>9</a:t>
+                        <a:defRPr sz="1600" b="0">
+                          <a:solidFill>
+                            <a:srgbClr val="162A41"/>
+                          </a:solidFill>
+                          <a:latin typeface="Microsoft YaHei"/>
+                        </a:defRPr>
+                      </a:pPr>
+                      <a:r>
+                        <a:t>警报</a:t>
                       </a:r>
                     </a:p>
                   </a:txBody>
@@ -10072,15 +11387,15 @@
                     <a:lstStyle/>
                     <a:p>
                       <a:pPr>
-                        <a:defRPr sz="1500" b="0">
-                          <a:solidFill>
-                            <a:srgbClr val="162A41"/>
-                          </a:solidFill>
-                          <a:latin typeface="Microsoft YaHei"/>
-                        </a:defRPr>
-                      </a:pPr>
-                      <a:r>
-                        <a:t>6</a:t>
+                        <a:defRPr sz="1600" b="0">
+                          <a:solidFill>
+                            <a:srgbClr val="162A41"/>
+                          </a:solidFill>
+                          <a:latin typeface="Microsoft YaHei"/>
+                        </a:defRPr>
+                      </a:pPr>
+                      <a:r>
+                        <a:t>警报</a:t>
                       </a:r>
                     </a:p>
                   </a:txBody>
@@ -10096,15 +11411,15 @@
                     <a:lstStyle/>
                     <a:p>
                       <a:pPr>
-                        <a:defRPr sz="1500" b="0">
-                          <a:solidFill>
-                            <a:srgbClr val="162A41"/>
-                          </a:solidFill>
-                          <a:latin typeface="Microsoft YaHei"/>
-                        </a:defRPr>
-                      </a:pPr>
-                      <a:r>
-                        <a:t>3</a:t>
+                        <a:defRPr sz="1600" b="0">
+                          <a:solidFill>
+                            <a:srgbClr val="162A41"/>
+                          </a:solidFill>
+                          <a:latin typeface="Microsoft YaHei"/>
+                        </a:defRPr>
+                      </a:pPr>
+                      <a:r>
+                        <a:t>双源收缩</a:t>
                       </a:r>
                     </a:p>
                   </a:txBody>
@@ -10120,15 +11435,15 @@
                     <a:lstStyle/>
                     <a:p>
                       <a:pPr>
-                        <a:defRPr sz="1500" b="0">
-                          <a:solidFill>
-                            <a:srgbClr val="162A41"/>
-                          </a:solidFill>
-                          <a:latin typeface="Microsoft YaHei"/>
-                        </a:defRPr>
-                      </a:pPr>
-                      <a:r>
-                        <a:t>4</a:t>
+                        <a:defRPr sz="1600" b="0">
+                          <a:solidFill>
+                            <a:srgbClr val="162A41"/>
+                          </a:solidFill>
+                          <a:latin typeface="Microsoft YaHei"/>
+                        </a:defRPr>
+                      </a:pPr>
+                      <a:r>
+                        <a:t>未下降</a:t>
                       </a:r>
                     </a:p>
                   </a:txBody>
@@ -10138,21 +11453,145 @@
                     </a:solidFill>
                   </a:tcPr>
                 </a:tc>
-                <a:tc>
-                  <a:txBody>
-                    <a:bodyPr/>
-                    <a:lstStyle/>
-                    <a:p>
-                      <a:pPr>
-                        <a:defRPr sz="1500" b="0">
-                          <a:solidFill>
-                            <a:srgbClr val="162A41"/>
-                          </a:solidFill>
-                          <a:latin typeface="Microsoft YaHei"/>
-                        </a:defRPr>
-                      </a:pPr>
-                      <a:r>
-                        <a:t>4</a:t>
+              </a:tr>
+              <a:tr h="612648">
+                <a:tc>
+                  <a:txBody>
+                    <a:bodyPr/>
+                    <a:lstStyle/>
+                    <a:p>
+                      <a:pPr>
+                        <a:defRPr sz="1600" b="0">
+                          <a:solidFill>
+                            <a:srgbClr val="162A41"/>
+                          </a:solidFill>
+                          <a:latin typeface="Microsoft YaHei"/>
+                        </a:defRPr>
+                      </a:pPr>
+                      <a:r>
+                        <a:t>C#</a:t>
+                      </a:r>
+                    </a:p>
+                  </a:txBody>
+                  <a:tcPr>
+                    <a:solidFill>
+                      <a:srgbClr val="F8FAFB"/>
+                    </a:solidFill>
+                  </a:tcPr>
+                </a:tc>
+                <a:tc>
+                  <a:txBody>
+                    <a:bodyPr/>
+                    <a:lstStyle/>
+                    <a:p>
+                      <a:pPr>
+                        <a:defRPr sz="1600" b="0">
+                          <a:solidFill>
+                            <a:srgbClr val="162A41"/>
+                          </a:solidFill>
+                          <a:latin typeface="Microsoft YaHei"/>
+                        </a:defRPr>
+                      </a:pPr>
+                      <a:r>
+                        <a:t>警报</a:t>
+                      </a:r>
+                    </a:p>
+                  </a:txBody>
+                  <a:tcPr>
+                    <a:solidFill>
+                      <a:srgbClr val="F8FAFB"/>
+                    </a:solidFill>
+                  </a:tcPr>
+                </a:tc>
+                <a:tc>
+                  <a:txBody>
+                    <a:bodyPr/>
+                    <a:lstStyle/>
+                    <a:p>
+                      <a:pPr>
+                        <a:defRPr sz="1600" b="0">
+                          <a:solidFill>
+                            <a:srgbClr val="162A41"/>
+                          </a:solidFill>
+                          <a:latin typeface="Microsoft YaHei"/>
+                        </a:defRPr>
+                      </a:pPr>
+                      <a:r>
+                        <a:t>无</a:t>
+                      </a:r>
+                    </a:p>
+                  </a:txBody>
+                  <a:tcPr>
+                    <a:solidFill>
+                      <a:srgbClr val="F8FAFB"/>
+                    </a:solidFill>
+                  </a:tcPr>
+                </a:tc>
+                <a:tc>
+                  <a:txBody>
+                    <a:bodyPr/>
+                    <a:lstStyle/>
+                    <a:p>
+                      <a:pPr>
+                        <a:defRPr sz="1600" b="0">
+                          <a:solidFill>
+                            <a:srgbClr val="162A41"/>
+                          </a:solidFill>
+                          <a:latin typeface="Microsoft YaHei"/>
+                        </a:defRPr>
+                      </a:pPr>
+                      <a:r>
+                        <a:t>问卷单源警报</a:t>
+                      </a:r>
+                    </a:p>
+                  </a:txBody>
+                  <a:tcPr>
+                    <a:solidFill>
+                      <a:srgbClr val="F8FAFB"/>
+                    </a:solidFill>
+                  </a:tcPr>
+                </a:tc>
+                <a:tc>
+                  <a:txBody>
+                    <a:bodyPr/>
+                    <a:lstStyle/>
+                    <a:p>
+                      <a:pPr>
+                        <a:defRPr sz="1600" b="0">
+                          <a:solidFill>
+                            <a:srgbClr val="162A41"/>
+                          </a:solidFill>
+                          <a:latin typeface="Microsoft YaHei"/>
+                        </a:defRPr>
+                      </a:pPr>
+                      <a:r>
+                        <a:t>未下降</a:t>
+                      </a:r>
+                    </a:p>
+                  </a:txBody>
+                  <a:tcPr>
+                    <a:solidFill>
+                      <a:srgbClr val="F8FAFB"/>
+                    </a:solidFill>
+                  </a:tcPr>
+                </a:tc>
+              </a:tr>
+              <a:tr h="612648">
+                <a:tc>
+                  <a:txBody>
+                    <a:bodyPr/>
+                    <a:lstStyle/>
+                    <a:p>
+                      <a:pPr>
+                        <a:defRPr sz="1600" b="0">
+                          <a:solidFill>
+                            <a:srgbClr val="162A41"/>
+                          </a:solidFill>
+                          <a:latin typeface="Microsoft YaHei"/>
+                        </a:defRPr>
+                      </a:pPr>
+                      <a:r>
+                        <a:t>Redis</a:t>
                       </a:r>
                     </a:p>
                   </a:txBody>
@@ -10168,15 +11607,15 @@
                     <a:lstStyle/>
                     <a:p>
                       <a:pPr>
-                        <a:defRPr sz="1500" b="0">
-                          <a:solidFill>
-                            <a:srgbClr val="162A41"/>
-                          </a:solidFill>
-                          <a:latin typeface="Microsoft YaHei"/>
-                        </a:defRPr>
-                      </a:pPr>
-                      <a:r>
-                        <a:t>66.7%</a:t>
+                        <a:defRPr sz="1600" b="0">
+                          <a:solidFill>
+                            <a:srgbClr val="162A41"/>
+                          </a:solidFill>
+                          <a:latin typeface="Microsoft YaHei"/>
+                        </a:defRPr>
+                      </a:pPr>
+                      <a:r>
+                        <a:t>无</a:t>
                       </a:r>
                     </a:p>
                   </a:txBody>
@@ -10192,15 +11631,15 @@
                     <a:lstStyle/>
                     <a:p>
                       <a:pPr>
-                        <a:defRPr sz="1500" b="0">
-                          <a:solidFill>
-                            <a:srgbClr val="162A41"/>
-                          </a:solidFill>
-                          <a:latin typeface="Microsoft YaHei"/>
-                        </a:defRPr>
-                      </a:pPr>
-                      <a:r>
-                        <a:t>60.0%</a:t>
+                        <a:defRPr sz="1600" b="0">
+                          <a:solidFill>
+                            <a:srgbClr val="162A41"/>
+                          </a:solidFill>
+                          <a:latin typeface="Microsoft YaHei"/>
+                        </a:defRPr>
+                      </a:pPr>
+                      <a:r>
+                        <a:t>警报</a:t>
                       </a:r>
                     </a:p>
                   </a:txBody>
@@ -10210,23 +11649,71 @@
                     </a:solidFill>
                   </a:tcPr>
                 </a:tc>
+                <a:tc>
+                  <a:txBody>
+                    <a:bodyPr/>
+                    <a:lstStyle/>
+                    <a:p>
+                      <a:pPr>
+                        <a:defRPr sz="1600" b="0">
+                          <a:solidFill>
+                            <a:srgbClr val="162A41"/>
+                          </a:solidFill>
+                          <a:latin typeface="Microsoft YaHei"/>
+                        </a:defRPr>
+                      </a:pPr>
+                      <a:r>
+                        <a:t>评论单源警报</a:t>
+                      </a:r>
+                    </a:p>
+                  </a:txBody>
+                  <a:tcPr>
+                    <a:solidFill>
+                      <a:srgbClr val="EAF1F3"/>
+                    </a:solidFill>
+                  </a:tcPr>
+                </a:tc>
+                <a:tc>
+                  <a:txBody>
+                    <a:bodyPr/>
+                    <a:lstStyle/>
+                    <a:p>
+                      <a:pPr>
+                        <a:defRPr sz="1600" b="0">
+                          <a:solidFill>
+                            <a:srgbClr val="162A41"/>
+                          </a:solidFill>
+                          <a:latin typeface="Microsoft YaHei"/>
+                        </a:defRPr>
+                      </a:pPr>
+                      <a:r>
+                        <a:t>未下降</a:t>
+                      </a:r>
+                    </a:p>
+                  </a:txBody>
+                  <a:tcPr>
+                    <a:solidFill>
+                      <a:srgbClr val="EAF1F3"/>
+                    </a:solidFill>
+                  </a:tcPr>
+                </a:tc>
               </a:tr>
-              <a:tr h="649224">
-                <a:tc>
-                  <a:txBody>
-                    <a:bodyPr/>
-                    <a:lstStyle/>
-                    <a:p>
-                      <a:pPr>
-                        <a:defRPr sz="1500" b="0">
-                          <a:solidFill>
-                            <a:srgbClr val="162A41"/>
-                          </a:solidFill>
-                          <a:latin typeface="Microsoft YaHei"/>
-                        </a:defRPr>
-                      </a:pPr>
-                      <a:r>
-                        <a:t>只看评论</a:t>
+              <a:tr h="612648">
+                <a:tc>
+                  <a:txBody>
+                    <a:bodyPr/>
+                    <a:lstStyle/>
+                    <a:p>
+                      <a:pPr>
+                        <a:defRPr sz="1600" b="0">
+                          <a:solidFill>
+                            <a:srgbClr val="162A41"/>
+                          </a:solidFill>
+                          <a:latin typeface="Microsoft YaHei"/>
+                        </a:defRPr>
+                      </a:pPr>
+                      <a:r>
+                        <a:t>Express</a:t>
                       </a:r>
                     </a:p>
                   </a:txBody>
@@ -10242,15 +11729,15 @@
                     <a:lstStyle/>
                     <a:p>
                       <a:pPr>
-                        <a:defRPr sz="1500" b="0">
-                          <a:solidFill>
-                            <a:srgbClr val="162A41"/>
-                          </a:solidFill>
-                          <a:latin typeface="Microsoft YaHei"/>
-                        </a:defRPr>
-                      </a:pPr>
-                      <a:r>
-                        <a:t>8</a:t>
+                        <a:defRPr sz="1600" b="0">
+                          <a:solidFill>
+                            <a:srgbClr val="162A41"/>
+                          </a:solidFill>
+                          <a:latin typeface="Microsoft YaHei"/>
+                        </a:defRPr>
+                      </a:pPr>
+                      <a:r>
+                        <a:t>警报</a:t>
                       </a:r>
                     </a:p>
                   </a:txBody>
@@ -10266,15 +11753,15 @@
                     <a:lstStyle/>
                     <a:p>
                       <a:pPr>
-                        <a:defRPr sz="1500" b="0">
-                          <a:solidFill>
-                            <a:srgbClr val="162A41"/>
-                          </a:solidFill>
-                          <a:latin typeface="Microsoft YaHei"/>
-                        </a:defRPr>
-                      </a:pPr>
-                      <a:r>
-                        <a:t>6</a:t>
+                        <a:defRPr sz="1600" b="0">
+                          <a:solidFill>
+                            <a:srgbClr val="162A41"/>
+                          </a:solidFill>
+                          <a:latin typeface="Microsoft YaHei"/>
+                        </a:defRPr>
+                      </a:pPr>
+                      <a:r>
+                        <a:t>无</a:t>
                       </a:r>
                     </a:p>
                   </a:txBody>
@@ -10290,15 +11777,15 @@
                     <a:lstStyle/>
                     <a:p>
                       <a:pPr>
-                        <a:defRPr sz="1500" b="0">
-                          <a:solidFill>
-                            <a:srgbClr val="162A41"/>
-                          </a:solidFill>
-                          <a:latin typeface="Microsoft YaHei"/>
-                        </a:defRPr>
-                      </a:pPr>
-                      <a:r>
-                        <a:t>2</a:t>
+                        <a:defRPr sz="1600" b="0">
+                          <a:solidFill>
+                            <a:srgbClr val="162A41"/>
+                          </a:solidFill>
+                          <a:latin typeface="Microsoft YaHei"/>
+                        </a:defRPr>
+                      </a:pPr>
+                      <a:r>
+                        <a:t>问卷单源警报</a:t>
                       </a:r>
                     </a:p>
                   </a:txBody>
@@ -10314,475 +11801,15 @@
                     <a:lstStyle/>
                     <a:p>
                       <a:pPr>
-                        <a:defRPr sz="1500" b="0">
-                          <a:solidFill>
-                            <a:srgbClr val="162A41"/>
-                          </a:solidFill>
-                          <a:latin typeface="Microsoft YaHei"/>
-                        </a:defRPr>
-                      </a:pPr>
-                      <a:r>
-                        <a:t>4</a:t>
-                      </a:r>
-                    </a:p>
-                  </a:txBody>
-                  <a:tcPr>
-                    <a:solidFill>
-                      <a:srgbClr val="F8FAFB"/>
-                    </a:solidFill>
-                  </a:tcPr>
-                </a:tc>
-                <a:tc>
-                  <a:txBody>
-                    <a:bodyPr/>
-                    <a:lstStyle/>
-                    <a:p>
-                      <a:pPr>
-                        <a:defRPr sz="1500" b="0">
-                          <a:solidFill>
-                            <a:srgbClr val="162A41"/>
-                          </a:solidFill>
-                          <a:latin typeface="Microsoft YaHei"/>
-                        </a:defRPr>
-                      </a:pPr>
-                      <a:r>
-                        <a:t>5</a:t>
-                      </a:r>
-                    </a:p>
-                  </a:txBody>
-                  <a:tcPr>
-                    <a:solidFill>
-                      <a:srgbClr val="F8FAFB"/>
-                    </a:solidFill>
-                  </a:tcPr>
-                </a:tc>
-                <a:tc>
-                  <a:txBody>
-                    <a:bodyPr/>
-                    <a:lstStyle/>
-                    <a:p>
-                      <a:pPr>
-                        <a:defRPr sz="1500" b="0">
-                          <a:solidFill>
-                            <a:srgbClr val="162A41"/>
-                          </a:solidFill>
-                          <a:latin typeface="Microsoft YaHei"/>
-                        </a:defRPr>
-                      </a:pPr>
-                      <a:r>
-                        <a:t>75.0%</a:t>
-                      </a:r>
-                    </a:p>
-                  </a:txBody>
-                  <a:tcPr>
-                    <a:solidFill>
-                      <a:srgbClr val="F8FAFB"/>
-                    </a:solidFill>
-                  </a:tcPr>
-                </a:tc>
-                <a:tc>
-                  <a:txBody>
-                    <a:bodyPr/>
-                    <a:lstStyle/>
-                    <a:p>
-                      <a:pPr>
-                        <a:defRPr sz="1500" b="0">
-                          <a:solidFill>
-                            <a:srgbClr val="162A41"/>
-                          </a:solidFill>
-                          <a:latin typeface="Microsoft YaHei"/>
-                        </a:defRPr>
-                      </a:pPr>
-                      <a:r>
-                        <a:t>60.0%</a:t>
-                      </a:r>
-                    </a:p>
-                  </a:txBody>
-                  <a:tcPr>
-                    <a:solidFill>
-                      <a:srgbClr val="F8FAFB"/>
-                    </a:solidFill>
-                  </a:tcPr>
-                </a:tc>
-              </a:tr>
-              <a:tr h="649224">
-                <a:tc>
-                  <a:txBody>
-                    <a:bodyPr/>
-                    <a:lstStyle/>
-                    <a:p>
-                      <a:pPr>
-                        <a:defRPr sz="1500" b="0">
-                          <a:solidFill>
-                            <a:srgbClr val="162A41"/>
-                          </a:solidFill>
-                          <a:latin typeface="Microsoft YaHei"/>
-                        </a:defRPr>
-                      </a:pPr>
-                      <a:r>
-                        <a:t>双源同时收缩</a:t>
-                      </a:r>
-                    </a:p>
-                  </a:txBody>
-                  <a:tcPr>
-                    <a:solidFill>
-                      <a:srgbClr val="EAF1F3"/>
-                    </a:solidFill>
-                  </a:tcPr>
-                </a:tc>
-                <a:tc>
-                  <a:txBody>
-                    <a:bodyPr/>
-                    <a:lstStyle/>
-                    <a:p>
-                      <a:pPr>
-                        <a:defRPr sz="1500" b="0">
-                          <a:solidFill>
-                            <a:srgbClr val="162A41"/>
-                          </a:solidFill>
-                          <a:latin typeface="Microsoft YaHei"/>
-                        </a:defRPr>
-                      </a:pPr>
-                      <a:r>
-                        <a:t>5</a:t>
-                      </a:r>
-                    </a:p>
-                  </a:txBody>
-                  <a:tcPr>
-                    <a:solidFill>
-                      <a:srgbClr val="EAF1F3"/>
-                    </a:solidFill>
-                  </a:tcPr>
-                </a:tc>
-                <a:tc>
-                  <a:txBody>
-                    <a:bodyPr/>
-                    <a:lstStyle/>
-                    <a:p>
-                      <a:pPr>
-                        <a:defRPr sz="1500" b="0">
-                          <a:solidFill>
-                            <a:srgbClr val="162A41"/>
-                          </a:solidFill>
-                          <a:latin typeface="Microsoft YaHei"/>
-                        </a:defRPr>
-                      </a:pPr>
-                      <a:r>
-                        <a:t>4</a:t>
-                      </a:r>
-                    </a:p>
-                  </a:txBody>
-                  <a:tcPr>
-                    <a:solidFill>
-                      <a:srgbClr val="EAF1F3"/>
-                    </a:solidFill>
-                  </a:tcPr>
-                </a:tc>
-                <a:tc>
-                  <a:txBody>
-                    <a:bodyPr/>
-                    <a:lstStyle/>
-                    <a:p>
-                      <a:pPr>
-                        <a:defRPr sz="1500" b="0">
-                          <a:solidFill>
-                            <a:srgbClr val="162A41"/>
-                          </a:solidFill>
-                          <a:latin typeface="Microsoft YaHei"/>
-                        </a:defRPr>
-                      </a:pPr>
-                      <a:r>
-                        <a:t>1</a:t>
-                      </a:r>
-                    </a:p>
-                  </a:txBody>
-                  <a:tcPr>
-                    <a:solidFill>
-                      <a:srgbClr val="EAF1F3"/>
-                    </a:solidFill>
-                  </a:tcPr>
-                </a:tc>
-                <a:tc>
-                  <a:txBody>
-                    <a:bodyPr/>
-                    <a:lstStyle/>
-                    <a:p>
-                      <a:pPr>
-                        <a:defRPr sz="1500" b="0">
-                          <a:solidFill>
-                            <a:srgbClr val="162A41"/>
-                          </a:solidFill>
-                          <a:latin typeface="Microsoft YaHei"/>
-                        </a:defRPr>
-                      </a:pPr>
-                      <a:r>
-                        <a:t>6</a:t>
-                      </a:r>
-                    </a:p>
-                  </a:txBody>
-                  <a:tcPr>
-                    <a:solidFill>
-                      <a:srgbClr val="EAF1F3"/>
-                    </a:solidFill>
-                  </a:tcPr>
-                </a:tc>
-                <a:tc>
-                  <a:txBody>
-                    <a:bodyPr/>
-                    <a:lstStyle/>
-                    <a:p>
-                      <a:pPr>
-                        <a:defRPr sz="1500" b="0">
-                          <a:solidFill>
-                            <a:srgbClr val="162A41"/>
-                          </a:solidFill>
-                          <a:latin typeface="Microsoft YaHei"/>
-                        </a:defRPr>
-                      </a:pPr>
-                      <a:r>
-                        <a:t>6</a:t>
-                      </a:r>
-                    </a:p>
-                  </a:txBody>
-                  <a:tcPr>
-                    <a:solidFill>
-                      <a:srgbClr val="EAF1F3"/>
-                    </a:solidFill>
-                  </a:tcPr>
-                </a:tc>
-                <a:tc>
-                  <a:txBody>
-                    <a:bodyPr/>
-                    <a:lstStyle/>
-                    <a:p>
-                      <a:pPr>
-                        <a:defRPr sz="1500" b="0">
-                          <a:solidFill>
-                            <a:srgbClr val="162A41"/>
-                          </a:solidFill>
-                          <a:latin typeface="Microsoft YaHei"/>
-                        </a:defRPr>
-                      </a:pPr>
-                      <a:r>
-                        <a:t>80.0%</a:t>
-                      </a:r>
-                    </a:p>
-                  </a:txBody>
-                  <a:tcPr>
-                    <a:solidFill>
-                      <a:srgbClr val="EAF1F3"/>
-                    </a:solidFill>
-                  </a:tcPr>
-                </a:tc>
-                <a:tc>
-                  <a:txBody>
-                    <a:bodyPr/>
-                    <a:lstStyle/>
-                    <a:p>
-                      <a:pPr>
-                        <a:defRPr sz="1500" b="0">
-                          <a:solidFill>
-                            <a:srgbClr val="162A41"/>
-                          </a:solidFill>
-                          <a:latin typeface="Microsoft YaHei"/>
-                        </a:defRPr>
-                      </a:pPr>
-                      <a:r>
-                        <a:t>40.0%</a:t>
-                      </a:r>
-                    </a:p>
-                  </a:txBody>
-                  <a:tcPr>
-                    <a:solidFill>
-                      <a:srgbClr val="EAF1F3"/>
-                    </a:solidFill>
-                  </a:tcPr>
-                </a:tc>
-              </a:tr>
-              <a:tr h="649224">
-                <a:tc>
-                  <a:txBody>
-                    <a:bodyPr/>
-                    <a:lstStyle/>
-                    <a:p>
-                      <a:pPr>
-                        <a:defRPr sz="1500" b="0">
-                          <a:solidFill>
-                            <a:srgbClr val="162A41"/>
-                          </a:solidFill>
-                          <a:latin typeface="Microsoft YaHei"/>
-                        </a:defRPr>
-                      </a:pPr>
-                      <a:r>
-                        <a:t>任一信号收缩</a:t>
-                      </a:r>
-                    </a:p>
-                  </a:txBody>
-                  <a:tcPr>
-                    <a:solidFill>
-                      <a:srgbClr val="F8FAFB"/>
-                    </a:solidFill>
-                  </a:tcPr>
-                </a:tc>
-                <a:tc>
-                  <a:txBody>
-                    <a:bodyPr/>
-                    <a:lstStyle/>
-                    <a:p>
-                      <a:pPr>
-                        <a:defRPr sz="1500" b="0">
-                          <a:solidFill>
-                            <a:srgbClr val="162A41"/>
-                          </a:solidFill>
-                          <a:latin typeface="Microsoft YaHei"/>
-                        </a:defRPr>
-                      </a:pPr>
-                      <a:r>
-                        <a:t>12</a:t>
-                      </a:r>
-                    </a:p>
-                  </a:txBody>
-                  <a:tcPr>
-                    <a:solidFill>
-                      <a:srgbClr val="F8FAFB"/>
-                    </a:solidFill>
-                  </a:tcPr>
-                </a:tc>
-                <a:tc>
-                  <a:txBody>
-                    <a:bodyPr/>
-                    <a:lstStyle/>
-                    <a:p>
-                      <a:pPr>
-                        <a:defRPr sz="1500" b="0">
-                          <a:solidFill>
-                            <a:srgbClr val="162A41"/>
-                          </a:solidFill>
-                          <a:latin typeface="Microsoft YaHei"/>
-                        </a:defRPr>
-                      </a:pPr>
-                      <a:r>
-                        <a:t>8</a:t>
-                      </a:r>
-                    </a:p>
-                  </a:txBody>
-                  <a:tcPr>
-                    <a:solidFill>
-                      <a:srgbClr val="F8FAFB"/>
-                    </a:solidFill>
-                  </a:tcPr>
-                </a:tc>
-                <a:tc>
-                  <a:txBody>
-                    <a:bodyPr/>
-                    <a:lstStyle/>
-                    <a:p>
-                      <a:pPr>
-                        <a:defRPr sz="1500" b="0">
-                          <a:solidFill>
-                            <a:srgbClr val="162A41"/>
-                          </a:solidFill>
-                          <a:latin typeface="Microsoft YaHei"/>
-                        </a:defRPr>
-                      </a:pPr>
-                      <a:r>
-                        <a:t>4</a:t>
-                      </a:r>
-                    </a:p>
-                  </a:txBody>
-                  <a:tcPr>
-                    <a:solidFill>
-                      <a:srgbClr val="F8FAFB"/>
-                    </a:solidFill>
-                  </a:tcPr>
-                </a:tc>
-                <a:tc>
-                  <a:txBody>
-                    <a:bodyPr/>
-                    <a:lstStyle/>
-                    <a:p>
-                      <a:pPr>
-                        <a:defRPr sz="1500" b="0">
-                          <a:solidFill>
-                            <a:srgbClr val="162A41"/>
-                          </a:solidFill>
-                          <a:latin typeface="Microsoft YaHei"/>
-                        </a:defRPr>
-                      </a:pPr>
-                      <a:r>
-                        <a:t>2</a:t>
-                      </a:r>
-                    </a:p>
-                  </a:txBody>
-                  <a:tcPr>
-                    <a:solidFill>
-                      <a:srgbClr val="F8FAFB"/>
-                    </a:solidFill>
-                  </a:tcPr>
-                </a:tc>
-                <a:tc>
-                  <a:txBody>
-                    <a:bodyPr/>
-                    <a:lstStyle/>
-                    <a:p>
-                      <a:pPr>
-                        <a:defRPr sz="1500" b="0">
-                          <a:solidFill>
-                            <a:srgbClr val="162A41"/>
-                          </a:solidFill>
-                          <a:latin typeface="Microsoft YaHei"/>
-                        </a:defRPr>
-                      </a:pPr>
-                      <a:r>
-                        <a:t>3</a:t>
-                      </a:r>
-                    </a:p>
-                  </a:txBody>
-                  <a:tcPr>
-                    <a:solidFill>
-                      <a:srgbClr val="F8FAFB"/>
-                    </a:solidFill>
-                  </a:tcPr>
-                </a:tc>
-                <a:tc>
-                  <a:txBody>
-                    <a:bodyPr/>
-                    <a:lstStyle/>
-                    <a:p>
-                      <a:pPr>
-                        <a:defRPr sz="1500" b="0">
-                          <a:solidFill>
-                            <a:srgbClr val="162A41"/>
-                          </a:solidFill>
-                          <a:latin typeface="Microsoft YaHei"/>
-                        </a:defRPr>
-                      </a:pPr>
-                      <a:r>
-                        <a:t>66.7%</a:t>
-                      </a:r>
-                    </a:p>
-                  </a:txBody>
-                  <a:tcPr>
-                    <a:solidFill>
-                      <a:srgbClr val="F8FAFB"/>
-                    </a:solidFill>
-                  </a:tcPr>
-                </a:tc>
-                <a:tc>
-                  <a:txBody>
-                    <a:bodyPr/>
-                    <a:lstStyle/>
-                    <a:p>
-                      <a:pPr>
-                        <a:defRPr sz="1500" b="0">
-                          <a:solidFill>
-                            <a:srgbClr val="162A41"/>
-                          </a:solidFill>
-                          <a:latin typeface="Microsoft YaHei"/>
-                        </a:defRPr>
-                      </a:pPr>
-                      <a:r>
-                        <a:t>80.0%</a:t>
+                        <a:defRPr sz="1600" b="0">
+                          <a:solidFill>
+                            <a:srgbClr val="162A41"/>
+                          </a:solidFill>
+                          <a:latin typeface="Microsoft YaHei"/>
+                        </a:defRPr>
+                      </a:pPr>
+                      <a:r>
+                        <a:t>未下降</a:t>
                       </a:r>
                     </a:p>
                   </a:txBody>
@@ -10805,8 +11832,8 @@
         </p:nvSpPr>
         <p:spPr>
           <a:xfrm>
-            <a:off x="676656" y="5020056"/>
-            <a:ext cx="10744200" cy="530352"/>
+            <a:off x="758952" y="5861304"/>
+            <a:ext cx="10515600" cy="420624"/>
           </a:xfrm>
           <a:prstGeom prst="rect">
             <a:avLst/>
@@ -10823,7 +11850,7 @@
               <a:spcAft>
                 <a:spcPts val="1000"/>
               </a:spcAft>
-              <a:defRPr sz="2000" b="0">
+              <a:defRPr sz="1700" b="0">
                 <a:solidFill>
                   <a:srgbClr val="007E80"/>
                 </a:solidFill>
@@ -10831,46 +11858,7 @@
               </a:defRPr>
             </a:pPr>
             <a:r>
-              <a:t>双源规则误报更少（1 次对 3 次），但漏报更多（6 次对 4 次）。</a:t>
-            </a:r>
-          </a:p>
-        </p:txBody>
-      </p:sp>
-      <p:sp>
-        <p:nvSpPr>
-          <p:cNvPr id="7" name="TextBox 6"/>
-          <p:cNvSpPr txBox="1"/>
-          <p:nvPr/>
-        </p:nvSpPr>
-        <p:spPr>
-          <a:xfrm>
-            <a:off x="676656" y="5623560"/>
-            <a:ext cx="10698480" cy="484632"/>
-          </a:xfrm>
-          <a:prstGeom prst="rect">
-            <a:avLst/>
-          </a:prstGeom>
-          <a:noFill/>
-        </p:spPr>
-        <p:txBody>
-          <a:bodyPr wrap="square" lIns="18288" rIns="18288" tIns="9144" bIns="9144">
-            <a:spAutoFit/>
-          </a:bodyPr>
-          <a:lstStyle/>
-          <a:p>
-            <a:pPr>
-              <a:spcAft>
-                <a:spcPts val="1000"/>
-              </a:spcAft>
-              <a:defRPr sz="1900" b="0">
-                <a:solidFill>
-                  <a:srgbClr val="C36623"/>
-                </a:solidFill>
-                <a:latin typeface="Microsoft YaHei"/>
-              </a:defRPr>
-            </a:pPr>
-            <a:r>
-              <a:t>只要任一信号收缩就警报，可找回 8/10 次下降，但会发出 4 次误报。</a:t>
+              <a:t>本页仅示例决策过程；总体结论以全部记录的回测表为准。</a:t>
             </a:r>
           </a:p>
         </p:txBody>

--- a/组会汇报_2026-09-26/组会汇报_三维动态预警升级版.pptx
+++ b/组会汇报_2026-09-26/组会汇报_三维动态预警升级版.pptx
@@ -3285,7 +3285,7 @@
               </a:defRPr>
             </a:pPr>
             <a:r>
-              <a:t>当前可用的核查清单</a:t>
+              <a:t>待核查清单：尚未验证</a:t>
             </a:r>
           </a:p>
         </p:txBody>
@@ -4407,7 +4407,7 @@
               </a:defRPr>
             </a:pPr>
             <a:r>
-              <a:t>共 25 项有两路历史；此处展示优先核查的前 7 项。</a:t>
+              <a:t>共 25 项有两路历史；此处仅展示人工核查顺序，不能当成有效预测。</a:t>
             </a:r>
           </a:p>
         </p:txBody>
@@ -4706,7 +4706,7 @@
               </a:defRPr>
             </a:pPr>
             <a:r>
-              <a:t>只看预警年 2022—2023：34 条记录；双源命中率 87.5%，旧规则 81.8%。</a:t>
+              <a:t>较早两组预警年合计 34 条：双源命中率 87.5%，旧规则 81.8%；仅用于定位跨年差异。</a:t>
             </a:r>
           </a:p>
         </p:txBody>
@@ -5109,7 +5109,7 @@
               </a:defRPr>
             </a:pPr>
             <a:r>
-              <a:t>结论：扩大样本后保留有条件的预警用途</a:t>
+              <a:t>结论：近期样本尚不能支持直接应用</a:t>
             </a:r>
           </a:p>
         </p:txBody>
@@ -5304,7 +5304,7 @@
               </a:defRPr>
             </a:pPr>
             <a:r>
-              <a:t>双源可用于优先核查的候选；2025 年问卷整体上移使未来稳定性仍待验证。</a:t>
+              <a:t>最近一组（2024 年预警）双源 3 次警报全部误报，不能据合并命中率直接部署。</a:t>
             </a:r>
           </a:p>
         </p:txBody>
@@ -10858,7 +10858,7 @@
               </a:defRPr>
             </a:pPr>
             <a:r>
-              <a:t>看几条真实记录如何判定</a:t>
+              <a:t>看真实记录：命中、误报与漏报</a:t>
             </a:r>
           </a:p>
         </p:txBody>
@@ -10897,7 +10897,7 @@
               </a:defRPr>
             </a:pPr>
             <a:r>
-              <a:t>示例取自 2024 年预警；2025 年问卷结果只用于事后核验</a:t>
+              <a:t>跨预警年份分层举例；双源规则以问卷与评论同时报警为准</a:t>
             </a:r>
           </a:p>
         </p:txBody>
@@ -10950,8 +10950,8 @@
           <p:nvPr/>
         </p:nvGraphicFramePr>
         <p:xfrm>
-          <a:off x="667512" y="1371600"/>
-          <a:ext cx="11247120" cy="4288536"/>
+          <a:off x="649224" y="1344168"/>
+          <a:ext cx="11247119" cy="4224528"/>
         </p:xfrm>
         <a:graphic>
           <a:graphicData uri="http://schemas.openxmlformats.org/drawingml/2006/table">
@@ -10960,20 +10960,22 @@
                 <a:tableStyleId>{5C22544A-7EE6-4342-B048-85BDC9FD1C3A}</a:tableStyleId>
               </a:tblPr>
               <a:tblGrid>
-                <a:gridCol w="2194560"/>
-                <a:gridCol w="1554480"/>
-                <a:gridCol w="1554480"/>
-                <a:gridCol w="3474720"/>
-                <a:gridCol w="2468880"/>
+                <a:gridCol w="969264"/>
+                <a:gridCol w="1856231"/>
+                <a:gridCol w="1207008"/>
+                <a:gridCol w="1207008"/>
+                <a:gridCol w="1627632"/>
+                <a:gridCol w="2240280"/>
+                <a:gridCol w="2139696"/>
               </a:tblGrid>
-              <a:tr h="612648">
-                <a:tc>
-                  <a:txBody>
-                    <a:bodyPr/>
-                    <a:lstStyle/>
-                    <a:p>
-                      <a:pPr>
-                        <a:defRPr sz="1600" b="1">
+              <a:tr h="603504">
+                <a:tc>
+                  <a:txBody>
+                    <a:bodyPr/>
+                    <a:lstStyle/>
+                    <a:p>
+                      <a:pPr>
+                        <a:defRPr sz="1500" b="1">
                           <a:solidFill>
                             <a:srgbClr val="FFFFFF"/>
                           </a:solidFill>
@@ -10981,6 +10983,30 @@
                         </a:defRPr>
                       </a:pPr>
                       <a:r>
+                        <a:t>预警年</a:t>
+                      </a:r>
+                    </a:p>
+                  </a:txBody>
+                  <a:tcPr>
+                    <a:solidFill>
+                      <a:srgbClr val="162A41"/>
+                    </a:solidFill>
+                  </a:tcPr>
+                </a:tc>
+                <a:tc>
+                  <a:txBody>
+                    <a:bodyPr/>
+                    <a:lstStyle/>
+                    <a:p>
+                      <a:pPr>
+                        <a:defRPr sz="1500" b="1">
+                          <a:solidFill>
+                            <a:srgbClr val="FFFFFF"/>
+                          </a:solidFill>
+                          <a:latin typeface="Microsoft YaHei"/>
+                        </a:defRPr>
+                      </a:pPr>
+                      <a:r>
                         <a:t>技术</a:t>
                       </a:r>
                     </a:p>
@@ -10997,7 +11023,7 @@
                     <a:lstStyle/>
                     <a:p>
                       <a:pPr>
-                        <a:defRPr sz="1600" b="1">
+                        <a:defRPr sz="1500" b="1">
                           <a:solidFill>
                             <a:srgbClr val="FFFFFF"/>
                           </a:solidFill>
@@ -11005,7 +11031,7 @@
                         </a:defRPr>
                       </a:pPr>
                       <a:r>
-                        <a:t>当年问卷</a:t>
+                        <a:t>问卷</a:t>
                       </a:r>
                     </a:p>
                   </a:txBody>
@@ -11021,7 +11047,7 @@
                     <a:lstStyle/>
                     <a:p>
                       <a:pPr>
-                        <a:defRPr sz="1600" b="1">
+                        <a:defRPr sz="1500" b="1">
                           <a:solidFill>
                             <a:srgbClr val="FFFFFF"/>
                           </a:solidFill>
@@ -11029,7 +11055,7 @@
                         </a:defRPr>
                       </a:pPr>
                       <a:r>
-                        <a:t>当年评论</a:t>
+                        <a:t>评论</a:t>
                       </a:r>
                     </a:p>
                   </a:txBody>
@@ -11045,7 +11071,7 @@
                     <a:lstStyle/>
                     <a:p>
                       <a:pPr>
-                        <a:defRPr sz="1600" b="1">
+                        <a:defRPr sz="1500" b="1">
                           <a:solidFill>
                             <a:srgbClr val="FFFFFF"/>
                           </a:solidFill>
@@ -11053,7 +11079,7 @@
                         </a:defRPr>
                       </a:pPr>
                       <a:r>
-                        <a:t>当年输出</a:t>
+                        <a:t>双源输出</a:t>
                       </a:r>
                     </a:p>
                   </a:txBody>
@@ -11069,7 +11095,7 @@
                     <a:lstStyle/>
                     <a:p>
                       <a:pPr>
-                        <a:defRPr sz="1600" b="1">
+                        <a:defRPr sz="1500" b="1">
                           <a:solidFill>
                             <a:srgbClr val="FFFFFF"/>
                           </a:solidFill>
@@ -11077,7 +11103,7 @@
                         </a:defRPr>
                       </a:pPr>
                       <a:r>
-                        <a:t>后续使用率</a:t>
+                        <a:t>使用率→下一年</a:t>
                       </a:r>
                     </a:p>
                   </a:txBody>
@@ -11087,15 +11113,573 @@
                     </a:solidFill>
                   </a:tcPr>
                 </a:tc>
+                <a:tc>
+                  <a:txBody>
+                    <a:bodyPr/>
+                    <a:lstStyle/>
+                    <a:p>
+                      <a:pPr>
+                        <a:defRPr sz="1500" b="1">
+                          <a:solidFill>
+                            <a:srgbClr val="FFFFFF"/>
+                          </a:solidFill>
+                          <a:latin typeface="Microsoft YaHei"/>
+                        </a:defRPr>
+                      </a:pPr>
+                      <a:r>
+                        <a:t>事后判定</a:t>
+                      </a:r>
+                    </a:p>
+                  </a:txBody>
+                  <a:tcPr>
+                    <a:solidFill>
+                      <a:srgbClr val="162A41"/>
+                    </a:solidFill>
+                  </a:tcPr>
+                </a:tc>
               </a:tr>
-              <a:tr h="612648">
-                <a:tc>
-                  <a:txBody>
-                    <a:bodyPr/>
-                    <a:lstStyle/>
-                    <a:p>
-                      <a:pPr>
-                        <a:defRPr sz="1600" b="0">
+              <a:tr h="603504">
+                <a:tc>
+                  <a:txBody>
+                    <a:bodyPr/>
+                    <a:lstStyle/>
+                    <a:p>
+                      <a:pPr>
+                        <a:defRPr sz="1500" b="0">
+                          <a:solidFill>
+                            <a:srgbClr val="162A41"/>
+                          </a:solidFill>
+                          <a:latin typeface="Microsoft YaHei"/>
+                        </a:defRPr>
+                      </a:pPr>
+                      <a:r>
+                        <a:t>2022</a:t>
+                      </a:r>
+                    </a:p>
+                  </a:txBody>
+                  <a:tcPr>
+                    <a:solidFill>
+                      <a:srgbClr val="EAF1F3"/>
+                    </a:solidFill>
+                  </a:tcPr>
+                </a:tc>
+                <a:tc>
+                  <a:txBody>
+                    <a:bodyPr/>
+                    <a:lstStyle/>
+                    <a:p>
+                      <a:pPr>
+                        <a:defRPr sz="1500" b="0">
+                          <a:solidFill>
+                            <a:srgbClr val="162A41"/>
+                          </a:solidFill>
+                          <a:latin typeface="Microsoft YaHei"/>
+                        </a:defRPr>
+                      </a:pPr>
+                      <a:r>
+                        <a:t>Express</a:t>
+                      </a:r>
+                    </a:p>
+                  </a:txBody>
+                  <a:tcPr>
+                    <a:solidFill>
+                      <a:srgbClr val="EAF1F3"/>
+                    </a:solidFill>
+                  </a:tcPr>
+                </a:tc>
+                <a:tc>
+                  <a:txBody>
+                    <a:bodyPr/>
+                    <a:lstStyle/>
+                    <a:p>
+                      <a:pPr>
+                        <a:defRPr sz="1500" b="0">
+                          <a:solidFill>
+                            <a:srgbClr val="162A41"/>
+                          </a:solidFill>
+                          <a:latin typeface="Microsoft YaHei"/>
+                        </a:defRPr>
+                      </a:pPr>
+                      <a:r>
+                        <a:t>警报</a:t>
+                      </a:r>
+                    </a:p>
+                  </a:txBody>
+                  <a:tcPr>
+                    <a:solidFill>
+                      <a:srgbClr val="EAF1F3"/>
+                    </a:solidFill>
+                  </a:tcPr>
+                </a:tc>
+                <a:tc>
+                  <a:txBody>
+                    <a:bodyPr/>
+                    <a:lstStyle/>
+                    <a:p>
+                      <a:pPr>
+                        <a:defRPr sz="1500" b="0">
+                          <a:solidFill>
+                            <a:srgbClr val="162A41"/>
+                          </a:solidFill>
+                          <a:latin typeface="Microsoft YaHei"/>
+                        </a:defRPr>
+                      </a:pPr>
+                      <a:r>
+                        <a:t>警报</a:t>
+                      </a:r>
+                    </a:p>
+                  </a:txBody>
+                  <a:tcPr>
+                    <a:solidFill>
+                      <a:srgbClr val="EAF1F3"/>
+                    </a:solidFill>
+                  </a:tcPr>
+                </a:tc>
+                <a:tc>
+                  <a:txBody>
+                    <a:bodyPr/>
+                    <a:lstStyle/>
+                    <a:p>
+                      <a:pPr>
+                        <a:defRPr sz="1500" b="0">
+                          <a:solidFill>
+                            <a:srgbClr val="162A41"/>
+                          </a:solidFill>
+                          <a:latin typeface="Microsoft YaHei"/>
+                        </a:defRPr>
+                      </a:pPr>
+                      <a:r>
+                        <a:t>警报</a:t>
+                      </a:r>
+                    </a:p>
+                  </a:txBody>
+                  <a:tcPr>
+                    <a:solidFill>
+                      <a:srgbClr val="EAF1F3"/>
+                    </a:solidFill>
+                  </a:tcPr>
+                </a:tc>
+                <a:tc>
+                  <a:txBody>
+                    <a:bodyPr/>
+                    <a:lstStyle/>
+                    <a:p>
+                      <a:pPr>
+                        <a:defRPr sz="1500" b="0">
+                          <a:solidFill>
+                            <a:srgbClr val="162A41"/>
+                          </a:solidFill>
+                          <a:latin typeface="Microsoft YaHei"/>
+                        </a:defRPr>
+                      </a:pPr>
+                      <a:r>
+                        <a:t>23.45%→20.68%</a:t>
+                      </a:r>
+                    </a:p>
+                  </a:txBody>
+                  <a:tcPr>
+                    <a:solidFill>
+                      <a:srgbClr val="EAF1F3"/>
+                    </a:solidFill>
+                  </a:tcPr>
+                </a:tc>
+                <a:tc>
+                  <a:txBody>
+                    <a:bodyPr/>
+                    <a:lstStyle/>
+                    <a:p>
+                      <a:pPr>
+                        <a:defRPr sz="1500" b="0">
+                          <a:solidFill>
+                            <a:srgbClr val="162A41"/>
+                          </a:solidFill>
+                          <a:latin typeface="Microsoft YaHei"/>
+                        </a:defRPr>
+                      </a:pPr>
+                      <a:r>
+                        <a:t>命中</a:t>
+                      </a:r>
+                    </a:p>
+                  </a:txBody>
+                  <a:tcPr>
+                    <a:solidFill>
+                      <a:srgbClr val="EAF1F3"/>
+                    </a:solidFill>
+                  </a:tcPr>
+                </a:tc>
+              </a:tr>
+              <a:tr h="603504">
+                <a:tc>
+                  <a:txBody>
+                    <a:bodyPr/>
+                    <a:lstStyle/>
+                    <a:p>
+                      <a:pPr>
+                        <a:defRPr sz="1500" b="0">
+                          <a:solidFill>
+                            <a:srgbClr val="162A41"/>
+                          </a:solidFill>
+                          <a:latin typeface="Microsoft YaHei"/>
+                        </a:defRPr>
+                      </a:pPr>
+                      <a:r>
+                        <a:t>2023</a:t>
+                      </a:r>
+                    </a:p>
+                  </a:txBody>
+                  <a:tcPr>
+                    <a:solidFill>
+                      <a:srgbClr val="F8FAFB"/>
+                    </a:solidFill>
+                  </a:tcPr>
+                </a:tc>
+                <a:tc>
+                  <a:txBody>
+                    <a:bodyPr/>
+                    <a:lstStyle/>
+                    <a:p>
+                      <a:pPr>
+                        <a:defRPr sz="1500" b="0">
+                          <a:solidFill>
+                            <a:srgbClr val="162A41"/>
+                          </a:solidFill>
+                          <a:latin typeface="Microsoft YaHei"/>
+                        </a:defRPr>
+                      </a:pPr>
+                      <a:r>
+                        <a:t>Gatsby</a:t>
+                      </a:r>
+                    </a:p>
+                  </a:txBody>
+                  <a:tcPr>
+                    <a:solidFill>
+                      <a:srgbClr val="F8FAFB"/>
+                    </a:solidFill>
+                  </a:tcPr>
+                </a:tc>
+                <a:tc>
+                  <a:txBody>
+                    <a:bodyPr/>
+                    <a:lstStyle/>
+                    <a:p>
+                      <a:pPr>
+                        <a:defRPr sz="1500" b="0">
+                          <a:solidFill>
+                            <a:srgbClr val="162A41"/>
+                          </a:solidFill>
+                          <a:latin typeface="Microsoft YaHei"/>
+                        </a:defRPr>
+                      </a:pPr>
+                      <a:r>
+                        <a:t>警报</a:t>
+                      </a:r>
+                    </a:p>
+                  </a:txBody>
+                  <a:tcPr>
+                    <a:solidFill>
+                      <a:srgbClr val="F8FAFB"/>
+                    </a:solidFill>
+                  </a:tcPr>
+                </a:tc>
+                <a:tc>
+                  <a:txBody>
+                    <a:bodyPr/>
+                    <a:lstStyle/>
+                    <a:p>
+                      <a:pPr>
+                        <a:defRPr sz="1500" b="0">
+                          <a:solidFill>
+                            <a:srgbClr val="162A41"/>
+                          </a:solidFill>
+                          <a:latin typeface="Microsoft YaHei"/>
+                        </a:defRPr>
+                      </a:pPr>
+                      <a:r>
+                        <a:t>警报</a:t>
+                      </a:r>
+                    </a:p>
+                  </a:txBody>
+                  <a:tcPr>
+                    <a:solidFill>
+                      <a:srgbClr val="F8FAFB"/>
+                    </a:solidFill>
+                  </a:tcPr>
+                </a:tc>
+                <a:tc>
+                  <a:txBody>
+                    <a:bodyPr/>
+                    <a:lstStyle/>
+                    <a:p>
+                      <a:pPr>
+                        <a:defRPr sz="1500" b="0">
+                          <a:solidFill>
+                            <a:srgbClr val="162A41"/>
+                          </a:solidFill>
+                          <a:latin typeface="Microsoft YaHei"/>
+                        </a:defRPr>
+                      </a:pPr>
+                      <a:r>
+                        <a:t>警报</a:t>
+                      </a:r>
+                    </a:p>
+                  </a:txBody>
+                  <a:tcPr>
+                    <a:solidFill>
+                      <a:srgbClr val="F8FAFB"/>
+                    </a:solidFill>
+                  </a:tcPr>
+                </a:tc>
+                <a:tc>
+                  <a:txBody>
+                    <a:bodyPr/>
+                    <a:lstStyle/>
+                    <a:p>
+                      <a:pPr>
+                        <a:defRPr sz="1500" b="0">
+                          <a:solidFill>
+                            <a:srgbClr val="162A41"/>
+                          </a:solidFill>
+                          <a:latin typeface="Microsoft YaHei"/>
+                        </a:defRPr>
+                      </a:pPr>
+                      <a:r>
+                        <a:t>2.50%→1.68%</a:t>
+                      </a:r>
+                    </a:p>
+                  </a:txBody>
+                  <a:tcPr>
+                    <a:solidFill>
+                      <a:srgbClr val="F8FAFB"/>
+                    </a:solidFill>
+                  </a:tcPr>
+                </a:tc>
+                <a:tc>
+                  <a:txBody>
+                    <a:bodyPr/>
+                    <a:lstStyle/>
+                    <a:p>
+                      <a:pPr>
+                        <a:defRPr sz="1500" b="0">
+                          <a:solidFill>
+                            <a:srgbClr val="162A41"/>
+                          </a:solidFill>
+                          <a:latin typeface="Microsoft YaHei"/>
+                        </a:defRPr>
+                      </a:pPr>
+                      <a:r>
+                        <a:t>命中</a:t>
+                      </a:r>
+                    </a:p>
+                  </a:txBody>
+                  <a:tcPr>
+                    <a:solidFill>
+                      <a:srgbClr val="F8FAFB"/>
+                    </a:solidFill>
+                  </a:tcPr>
+                </a:tc>
+              </a:tr>
+              <a:tr h="603504">
+                <a:tc>
+                  <a:txBody>
+                    <a:bodyPr/>
+                    <a:lstStyle/>
+                    <a:p>
+                      <a:pPr>
+                        <a:defRPr sz="1500" b="0">
+                          <a:solidFill>
+                            <a:srgbClr val="162A41"/>
+                          </a:solidFill>
+                          <a:latin typeface="Microsoft YaHei"/>
+                        </a:defRPr>
+                      </a:pPr>
+                      <a:r>
+                        <a:t>2023</a:t>
+                      </a:r>
+                    </a:p>
+                  </a:txBody>
+                  <a:tcPr>
+                    <a:solidFill>
+                      <a:srgbClr val="EAF1F3"/>
+                    </a:solidFill>
+                  </a:tcPr>
+                </a:tc>
+                <a:tc>
+                  <a:txBody>
+                    <a:bodyPr/>
+                    <a:lstStyle/>
+                    <a:p>
+                      <a:pPr>
+                        <a:defRPr sz="1500" b="0">
+                          <a:solidFill>
+                            <a:srgbClr val="162A41"/>
+                          </a:solidFill>
+                          <a:latin typeface="Microsoft YaHei"/>
+                        </a:defRPr>
+                      </a:pPr>
+                      <a:r>
+                        <a:t>Flask</a:t>
+                      </a:r>
+                    </a:p>
+                  </a:txBody>
+                  <a:tcPr>
+                    <a:solidFill>
+                      <a:srgbClr val="EAF1F3"/>
+                    </a:solidFill>
+                  </a:tcPr>
+                </a:tc>
+                <a:tc>
+                  <a:txBody>
+                    <a:bodyPr/>
+                    <a:lstStyle/>
+                    <a:p>
+                      <a:pPr>
+                        <a:defRPr sz="1500" b="0">
+                          <a:solidFill>
+                            <a:srgbClr val="162A41"/>
+                          </a:solidFill>
+                          <a:latin typeface="Microsoft YaHei"/>
+                        </a:defRPr>
+                      </a:pPr>
+                      <a:r>
+                        <a:t>警报</a:t>
+                      </a:r>
+                    </a:p>
+                  </a:txBody>
+                  <a:tcPr>
+                    <a:solidFill>
+                      <a:srgbClr val="EAF1F3"/>
+                    </a:solidFill>
+                  </a:tcPr>
+                </a:tc>
+                <a:tc>
+                  <a:txBody>
+                    <a:bodyPr/>
+                    <a:lstStyle/>
+                    <a:p>
+                      <a:pPr>
+                        <a:defRPr sz="1500" b="0">
+                          <a:solidFill>
+                            <a:srgbClr val="162A41"/>
+                          </a:solidFill>
+                          <a:latin typeface="Microsoft YaHei"/>
+                        </a:defRPr>
+                      </a:pPr>
+                      <a:r>
+                        <a:t>警报</a:t>
+                      </a:r>
+                    </a:p>
+                  </a:txBody>
+                  <a:tcPr>
+                    <a:solidFill>
+                      <a:srgbClr val="EAF1F3"/>
+                    </a:solidFill>
+                  </a:tcPr>
+                </a:tc>
+                <a:tc>
+                  <a:txBody>
+                    <a:bodyPr/>
+                    <a:lstStyle/>
+                    <a:p>
+                      <a:pPr>
+                        <a:defRPr sz="1500" b="0">
+                          <a:solidFill>
+                            <a:srgbClr val="162A41"/>
+                          </a:solidFill>
+                          <a:latin typeface="Microsoft YaHei"/>
+                        </a:defRPr>
+                      </a:pPr>
+                      <a:r>
+                        <a:t>警报</a:t>
+                      </a:r>
+                    </a:p>
+                  </a:txBody>
+                  <a:tcPr>
+                    <a:solidFill>
+                      <a:srgbClr val="EAF1F3"/>
+                    </a:solidFill>
+                  </a:tcPr>
+                </a:tc>
+                <a:tc>
+                  <a:txBody>
+                    <a:bodyPr/>
+                    <a:lstStyle/>
+                    <a:p>
+                      <a:pPr>
+                        <a:defRPr sz="1500" b="0">
+                          <a:solidFill>
+                            <a:srgbClr val="162A41"/>
+                          </a:solidFill>
+                          <a:latin typeface="Microsoft YaHei"/>
+                        </a:defRPr>
+                      </a:pPr>
+                      <a:r>
+                        <a:t>13.05%→13.83%</a:t>
+                      </a:r>
+                    </a:p>
+                  </a:txBody>
+                  <a:tcPr>
+                    <a:solidFill>
+                      <a:srgbClr val="EAF1F3"/>
+                    </a:solidFill>
+                  </a:tcPr>
+                </a:tc>
+                <a:tc>
+                  <a:txBody>
+                    <a:bodyPr/>
+                    <a:lstStyle/>
+                    <a:p>
+                      <a:pPr>
+                        <a:defRPr sz="1500" b="0">
+                          <a:solidFill>
+                            <a:srgbClr val="162A41"/>
+                          </a:solidFill>
+                          <a:latin typeface="Microsoft YaHei"/>
+                        </a:defRPr>
+                      </a:pPr>
+                      <a:r>
+                        <a:t>误报</a:t>
+                      </a:r>
+                    </a:p>
+                  </a:txBody>
+                  <a:tcPr>
+                    <a:solidFill>
+                      <a:srgbClr val="EAF1F3"/>
+                    </a:solidFill>
+                  </a:tcPr>
+                </a:tc>
+              </a:tr>
+              <a:tr h="603504">
+                <a:tc>
+                  <a:txBody>
+                    <a:bodyPr/>
+                    <a:lstStyle/>
+                    <a:p>
+                      <a:pPr>
+                        <a:defRPr sz="1500" b="0">
+                          <a:solidFill>
+                            <a:srgbClr val="162A41"/>
+                          </a:solidFill>
+                          <a:latin typeface="Microsoft YaHei"/>
+                        </a:defRPr>
+                      </a:pPr>
+                      <a:r>
+                        <a:t>2024</a:t>
+                      </a:r>
+                    </a:p>
+                  </a:txBody>
+                  <a:tcPr>
+                    <a:solidFill>
+                      <a:srgbClr val="F8FAFB"/>
+                    </a:solidFill>
+                  </a:tcPr>
+                </a:tc>
+                <a:tc>
+                  <a:txBody>
+                    <a:bodyPr/>
+                    <a:lstStyle/>
+                    <a:p>
+                      <a:pPr>
+                        <a:defRPr sz="1500" b="0">
                           <a:solidFill>
                             <a:srgbClr val="162A41"/>
                           </a:solidFill>
@@ -11109,6 +11693,152 @@
                   </a:txBody>
                   <a:tcPr>
                     <a:solidFill>
+                      <a:srgbClr val="F8FAFB"/>
+                    </a:solidFill>
+                  </a:tcPr>
+                </a:tc>
+                <a:tc>
+                  <a:txBody>
+                    <a:bodyPr/>
+                    <a:lstStyle/>
+                    <a:p>
+                      <a:pPr>
+                        <a:defRPr sz="1500" b="0">
+                          <a:solidFill>
+                            <a:srgbClr val="162A41"/>
+                          </a:solidFill>
+                          <a:latin typeface="Microsoft YaHei"/>
+                        </a:defRPr>
+                      </a:pPr>
+                      <a:r>
+                        <a:t>警报</a:t>
+                      </a:r>
+                    </a:p>
+                  </a:txBody>
+                  <a:tcPr>
+                    <a:solidFill>
+                      <a:srgbClr val="F8FAFB"/>
+                    </a:solidFill>
+                  </a:tcPr>
+                </a:tc>
+                <a:tc>
+                  <a:txBody>
+                    <a:bodyPr/>
+                    <a:lstStyle/>
+                    <a:p>
+                      <a:pPr>
+                        <a:defRPr sz="1500" b="0">
+                          <a:solidFill>
+                            <a:srgbClr val="162A41"/>
+                          </a:solidFill>
+                          <a:latin typeface="Microsoft YaHei"/>
+                        </a:defRPr>
+                      </a:pPr>
+                      <a:r>
+                        <a:t>警报</a:t>
+                      </a:r>
+                    </a:p>
+                  </a:txBody>
+                  <a:tcPr>
+                    <a:solidFill>
+                      <a:srgbClr val="F8FAFB"/>
+                    </a:solidFill>
+                  </a:tcPr>
+                </a:tc>
+                <a:tc>
+                  <a:txBody>
+                    <a:bodyPr/>
+                    <a:lstStyle/>
+                    <a:p>
+                      <a:pPr>
+                        <a:defRPr sz="1500" b="0">
+                          <a:solidFill>
+                            <a:srgbClr val="162A41"/>
+                          </a:solidFill>
+                          <a:latin typeface="Microsoft YaHei"/>
+                        </a:defRPr>
+                      </a:pPr>
+                      <a:r>
+                        <a:t>警报</a:t>
+                      </a:r>
+                    </a:p>
+                  </a:txBody>
+                  <a:tcPr>
+                    <a:solidFill>
+                      <a:srgbClr val="F8FAFB"/>
+                    </a:solidFill>
+                  </a:tcPr>
+                </a:tc>
+                <a:tc>
+                  <a:txBody>
+                    <a:bodyPr/>
+                    <a:lstStyle/>
+                    <a:p>
+                      <a:pPr>
+                        <a:defRPr sz="1500" b="0">
+                          <a:solidFill>
+                            <a:srgbClr val="162A41"/>
+                          </a:solidFill>
+                          <a:latin typeface="Microsoft YaHei"/>
+                        </a:defRPr>
+                      </a:pPr>
+                      <a:r>
+                        <a:t>22.99%→24.10%</a:t>
+                      </a:r>
+                    </a:p>
+                  </a:txBody>
+                  <a:tcPr>
+                    <a:solidFill>
+                      <a:srgbClr val="F8FAFB"/>
+                    </a:solidFill>
+                  </a:tcPr>
+                </a:tc>
+                <a:tc>
+                  <a:txBody>
+                    <a:bodyPr/>
+                    <a:lstStyle/>
+                    <a:p>
+                      <a:pPr>
+                        <a:defRPr sz="1500" b="0">
+                          <a:solidFill>
+                            <a:srgbClr val="162A41"/>
+                          </a:solidFill>
+                          <a:latin typeface="Microsoft YaHei"/>
+                        </a:defRPr>
+                      </a:pPr>
+                      <a:r>
+                        <a:t>误报</a:t>
+                      </a:r>
+                    </a:p>
+                  </a:txBody>
+                  <a:tcPr>
+                    <a:solidFill>
+                      <a:srgbClr val="F8FAFB"/>
+                    </a:solidFill>
+                  </a:tcPr>
+                </a:tc>
+              </a:tr>
+              <a:tr h="603504">
+                <a:tc>
+                  <a:txBody>
+                    <a:bodyPr/>
+                    <a:lstStyle/>
+                    <a:p>
+                      <a:pPr>
+                        <a:defRPr sz="1500" b="0">
+                          <a:solidFill>
+                            <a:srgbClr val="162A41"/>
+                          </a:solidFill>
+                          <a:latin typeface="Microsoft YaHei"/>
+                        </a:defRPr>
+                      </a:pPr>
+                      <a:r>
+                        <a:t>2023</a:t>
+                      </a:r>
+                    </a:p>
+                  </a:txBody>
+                  <a:tcPr>
+                    <a:solidFill>
                       <a:srgbClr val="EAF1F3"/>
                     </a:solidFill>
                   </a:tcPr>
@@ -11119,7 +11849,55 @@
                     <a:lstStyle/>
                     <a:p>
                       <a:pPr>
-                        <a:defRPr sz="1600" b="0">
+                        <a:defRPr sz="1500" b="0">
+                          <a:solidFill>
+                            <a:srgbClr val="162A41"/>
+                          </a:solidFill>
+                          <a:latin typeface="Microsoft YaHei"/>
+                        </a:defRPr>
+                      </a:pPr>
+                      <a:r>
+                        <a:t>Redis</a:t>
+                      </a:r>
+                    </a:p>
+                  </a:txBody>
+                  <a:tcPr>
+                    <a:solidFill>
+                      <a:srgbClr val="EAF1F3"/>
+                    </a:solidFill>
+                  </a:tcPr>
+                </a:tc>
+                <a:tc>
+                  <a:txBody>
+                    <a:bodyPr/>
+                    <a:lstStyle/>
+                    <a:p>
+                      <a:pPr>
+                        <a:defRPr sz="1500" b="0">
+                          <a:solidFill>
+                            <a:srgbClr val="162A41"/>
+                          </a:solidFill>
+                          <a:latin typeface="Microsoft YaHei"/>
+                        </a:defRPr>
+                      </a:pPr>
+                      <a:r>
+                        <a:t>无</a:t>
+                      </a:r>
+                    </a:p>
+                  </a:txBody>
+                  <a:tcPr>
+                    <a:solidFill>
+                      <a:srgbClr val="EAF1F3"/>
+                    </a:solidFill>
+                  </a:tcPr>
+                </a:tc>
+                <a:tc>
+                  <a:txBody>
+                    <a:bodyPr/>
+                    <a:lstStyle/>
+                    <a:p>
+                      <a:pPr>
+                        <a:defRPr sz="1500" b="0">
                           <a:solidFill>
                             <a:srgbClr val="162A41"/>
                           </a:solidFill>
@@ -11143,7 +11921,153 @@
                     <a:lstStyle/>
                     <a:p>
                       <a:pPr>
-                        <a:defRPr sz="1600" b="0">
+                        <a:defRPr sz="1500" b="0">
+                          <a:solidFill>
+                            <a:srgbClr val="162A41"/>
+                          </a:solidFill>
+                          <a:latin typeface="Microsoft YaHei"/>
+                        </a:defRPr>
+                      </a:pPr>
+                      <a:r>
+                        <a:t>不警报</a:t>
+                      </a:r>
+                    </a:p>
+                  </a:txBody>
+                  <a:tcPr>
+                    <a:solidFill>
+                      <a:srgbClr val="EAF1F3"/>
+                    </a:solidFill>
+                  </a:tcPr>
+                </a:tc>
+                <a:tc>
+                  <a:txBody>
+                    <a:bodyPr/>
+                    <a:lstStyle/>
+                    <a:p>
+                      <a:pPr>
+                        <a:defRPr sz="1500" b="0">
+                          <a:solidFill>
+                            <a:srgbClr val="162A41"/>
+                          </a:solidFill>
+                          <a:latin typeface="Microsoft YaHei"/>
+                        </a:defRPr>
+                      </a:pPr>
+                      <a:r>
+                        <a:t>21.30%→20.82%</a:t>
+                      </a:r>
+                    </a:p>
+                  </a:txBody>
+                  <a:tcPr>
+                    <a:solidFill>
+                      <a:srgbClr val="EAF1F3"/>
+                    </a:solidFill>
+                  </a:tcPr>
+                </a:tc>
+                <a:tc>
+                  <a:txBody>
+                    <a:bodyPr/>
+                    <a:lstStyle/>
+                    <a:p>
+                      <a:pPr>
+                        <a:defRPr sz="1500" b="0">
+                          <a:solidFill>
+                            <a:srgbClr val="162A41"/>
+                          </a:solidFill>
+                          <a:latin typeface="Microsoft YaHei"/>
+                        </a:defRPr>
+                      </a:pPr>
+                      <a:r>
+                        <a:t>漏报</a:t>
+                      </a:r>
+                    </a:p>
+                  </a:txBody>
+                  <a:tcPr>
+                    <a:solidFill>
+                      <a:srgbClr val="EAF1F3"/>
+                    </a:solidFill>
+                  </a:tcPr>
+                </a:tc>
+              </a:tr>
+              <a:tr h="603504">
+                <a:tc>
+                  <a:txBody>
+                    <a:bodyPr/>
+                    <a:lstStyle/>
+                    <a:p>
+                      <a:pPr>
+                        <a:defRPr sz="1500" b="0">
+                          <a:solidFill>
+                            <a:srgbClr val="162A41"/>
+                          </a:solidFill>
+                          <a:latin typeface="Microsoft YaHei"/>
+                        </a:defRPr>
+                      </a:pPr>
+                      <a:r>
+                        <a:t>2023</a:t>
+                      </a:r>
+                    </a:p>
+                  </a:txBody>
+                  <a:tcPr>
+                    <a:solidFill>
+                      <a:srgbClr val="F8FAFB"/>
+                    </a:solidFill>
+                  </a:tcPr>
+                </a:tc>
+                <a:tc>
+                  <a:txBody>
+                    <a:bodyPr/>
+                    <a:lstStyle/>
+                    <a:p>
+                      <a:pPr>
+                        <a:defRPr sz="1500" b="0">
+                          <a:solidFill>
+                            <a:srgbClr val="162A41"/>
+                          </a:solidFill>
+                          <a:latin typeface="Microsoft YaHei"/>
+                        </a:defRPr>
+                      </a:pPr>
+                      <a:r>
+                        <a:t>FastAPI</a:t>
+                      </a:r>
+                    </a:p>
+                  </a:txBody>
+                  <a:tcPr>
+                    <a:solidFill>
+                      <a:srgbClr val="F8FAFB"/>
+                    </a:solidFill>
+                  </a:tcPr>
+                </a:tc>
+                <a:tc>
+                  <a:txBody>
+                    <a:bodyPr/>
+                    <a:lstStyle/>
+                    <a:p>
+                      <a:pPr>
+                        <a:defRPr sz="1500" b="0">
+                          <a:solidFill>
+                            <a:srgbClr val="162A41"/>
+                          </a:solidFill>
+                          <a:latin typeface="Microsoft YaHei"/>
+                        </a:defRPr>
+                      </a:pPr>
+                      <a:r>
+                        <a:t>无</a:t>
+                      </a:r>
+                    </a:p>
+                  </a:txBody>
+                  <a:tcPr>
+                    <a:solidFill>
+                      <a:srgbClr val="F8FAFB"/>
+                    </a:solidFill>
+                  </a:tcPr>
+                </a:tc>
+                <a:tc>
+                  <a:txBody>
+                    <a:bodyPr/>
+                    <a:lstStyle/>
+                    <a:p>
+                      <a:pPr>
+                        <a:defRPr sz="1500" b="0">
                           <a:solidFill>
                             <a:srgbClr val="162A41"/>
                           </a:solidFill>
@@ -11157,80 +12081,6 @@
                   </a:txBody>
                   <a:tcPr>
                     <a:solidFill>
-                      <a:srgbClr val="EAF1F3"/>
-                    </a:solidFill>
-                  </a:tcPr>
-                </a:tc>
-                <a:tc>
-                  <a:txBody>
-                    <a:bodyPr/>
-                    <a:lstStyle/>
-                    <a:p>
-                      <a:pPr>
-                        <a:defRPr sz="1600" b="0">
-                          <a:solidFill>
-                            <a:srgbClr val="162A41"/>
-                          </a:solidFill>
-                          <a:latin typeface="Microsoft YaHei"/>
-                        </a:defRPr>
-                      </a:pPr>
-                      <a:r>
-                        <a:t>双源收缩</a:t>
-                      </a:r>
-                    </a:p>
-                  </a:txBody>
-                  <a:tcPr>
-                    <a:solidFill>
-                      <a:srgbClr val="EAF1F3"/>
-                    </a:solidFill>
-                  </a:tcPr>
-                </a:tc>
-                <a:tc>
-                  <a:txBody>
-                    <a:bodyPr/>
-                    <a:lstStyle/>
-                    <a:p>
-                      <a:pPr>
-                        <a:defRPr sz="1600" b="0">
-                          <a:solidFill>
-                            <a:srgbClr val="162A41"/>
-                          </a:solidFill>
-                          <a:latin typeface="Microsoft YaHei"/>
-                        </a:defRPr>
-                      </a:pPr>
-                      <a:r>
-                        <a:t>未下降</a:t>
-                      </a:r>
-                    </a:p>
-                  </a:txBody>
-                  <a:tcPr>
-                    <a:solidFill>
-                      <a:srgbClr val="EAF1F3"/>
-                    </a:solidFill>
-                  </a:tcPr>
-                </a:tc>
-              </a:tr>
-              <a:tr h="612648">
-                <a:tc>
-                  <a:txBody>
-                    <a:bodyPr/>
-                    <a:lstStyle/>
-                    <a:p>
-                      <a:pPr>
-                        <a:defRPr sz="1600" b="0">
-                          <a:solidFill>
-                            <a:srgbClr val="162A41"/>
-                          </a:solidFill>
-                          <a:latin typeface="Microsoft YaHei"/>
-                        </a:defRPr>
-                      </a:pPr>
-                      <a:r>
-                        <a:t>Flask</a:t>
-                      </a:r>
-                    </a:p>
-                  </a:txBody>
-                  <a:tcPr>
-                    <a:solidFill>
                       <a:srgbClr val="F8FAFB"/>
                     </a:solidFill>
                   </a:tcPr>
@@ -11241,15 +12091,15 @@
                     <a:lstStyle/>
                     <a:p>
                       <a:pPr>
-                        <a:defRPr sz="1600" b="0">
-                          <a:solidFill>
-                            <a:srgbClr val="162A41"/>
-                          </a:solidFill>
-                          <a:latin typeface="Microsoft YaHei"/>
-                        </a:defRPr>
-                      </a:pPr>
-                      <a:r>
-                        <a:t>警报</a:t>
+                        <a:defRPr sz="1500" b="0">
+                          <a:solidFill>
+                            <a:srgbClr val="162A41"/>
+                          </a:solidFill>
+                          <a:latin typeface="Microsoft YaHei"/>
+                        </a:defRPr>
+                      </a:pPr>
+                      <a:r>
+                        <a:t>不警报</a:t>
                       </a:r>
                     </a:p>
                   </a:txBody>
@@ -11265,15 +12115,15 @@
                     <a:lstStyle/>
                     <a:p>
                       <a:pPr>
-                        <a:defRPr sz="1600" b="0">
-                          <a:solidFill>
-                            <a:srgbClr val="162A41"/>
-                          </a:solidFill>
-                          <a:latin typeface="Microsoft YaHei"/>
-                        </a:defRPr>
-                      </a:pPr>
-                      <a:r>
-                        <a:t>警报</a:t>
+                        <a:defRPr sz="1500" b="0">
+                          <a:solidFill>
+                            <a:srgbClr val="162A41"/>
+                          </a:solidFill>
+                          <a:latin typeface="Microsoft YaHei"/>
+                        </a:defRPr>
+                      </a:pPr>
+                      <a:r>
+                        <a:t>7.96%→10.63%</a:t>
                       </a:r>
                     </a:p>
                   </a:txBody>
@@ -11289,527 +12139,15 @@
                     <a:lstStyle/>
                     <a:p>
                       <a:pPr>
-                        <a:defRPr sz="1600" b="0">
-                          <a:solidFill>
-                            <a:srgbClr val="162A41"/>
-                          </a:solidFill>
-                          <a:latin typeface="Microsoft YaHei"/>
-                        </a:defRPr>
-                      </a:pPr>
-                      <a:r>
-                        <a:t>双源收缩</a:t>
-                      </a:r>
-                    </a:p>
-                  </a:txBody>
-                  <a:tcPr>
-                    <a:solidFill>
-                      <a:srgbClr val="F8FAFB"/>
-                    </a:solidFill>
-                  </a:tcPr>
-                </a:tc>
-                <a:tc>
-                  <a:txBody>
-                    <a:bodyPr/>
-                    <a:lstStyle/>
-                    <a:p>
-                      <a:pPr>
-                        <a:defRPr sz="1600" b="0">
-                          <a:solidFill>
-                            <a:srgbClr val="162A41"/>
-                          </a:solidFill>
-                          <a:latin typeface="Microsoft YaHei"/>
-                        </a:defRPr>
-                      </a:pPr>
-                      <a:r>
-                        <a:t>未下降</a:t>
-                      </a:r>
-                    </a:p>
-                  </a:txBody>
-                  <a:tcPr>
-                    <a:solidFill>
-                      <a:srgbClr val="F8FAFB"/>
-                    </a:solidFill>
-                  </a:tcPr>
-                </a:tc>
-              </a:tr>
-              <a:tr h="612648">
-                <a:tc>
-                  <a:txBody>
-                    <a:bodyPr/>
-                    <a:lstStyle/>
-                    <a:p>
-                      <a:pPr>
-                        <a:defRPr sz="1600" b="0">
-                          <a:solidFill>
-                            <a:srgbClr val="162A41"/>
-                          </a:solidFill>
-                          <a:latin typeface="Microsoft YaHei"/>
-                        </a:defRPr>
-                      </a:pPr>
-                      <a:r>
-                        <a:t>Spring Boot</a:t>
-                      </a:r>
-                    </a:p>
-                  </a:txBody>
-                  <a:tcPr>
-                    <a:solidFill>
-                      <a:srgbClr val="EAF1F3"/>
-                    </a:solidFill>
-                  </a:tcPr>
-                </a:tc>
-                <a:tc>
-                  <a:txBody>
-                    <a:bodyPr/>
-                    <a:lstStyle/>
-                    <a:p>
-                      <a:pPr>
-                        <a:defRPr sz="1600" b="0">
-                          <a:solidFill>
-                            <a:srgbClr val="162A41"/>
-                          </a:solidFill>
-                          <a:latin typeface="Microsoft YaHei"/>
-                        </a:defRPr>
-                      </a:pPr>
-                      <a:r>
-                        <a:t>警报</a:t>
-                      </a:r>
-                    </a:p>
-                  </a:txBody>
-                  <a:tcPr>
-                    <a:solidFill>
-                      <a:srgbClr val="EAF1F3"/>
-                    </a:solidFill>
-                  </a:tcPr>
-                </a:tc>
-                <a:tc>
-                  <a:txBody>
-                    <a:bodyPr/>
-                    <a:lstStyle/>
-                    <a:p>
-                      <a:pPr>
-                        <a:defRPr sz="1600" b="0">
-                          <a:solidFill>
-                            <a:srgbClr val="162A41"/>
-                          </a:solidFill>
-                          <a:latin typeface="Microsoft YaHei"/>
-                        </a:defRPr>
-                      </a:pPr>
-                      <a:r>
-                        <a:t>警报</a:t>
-                      </a:r>
-                    </a:p>
-                  </a:txBody>
-                  <a:tcPr>
-                    <a:solidFill>
-                      <a:srgbClr val="EAF1F3"/>
-                    </a:solidFill>
-                  </a:tcPr>
-                </a:tc>
-                <a:tc>
-                  <a:txBody>
-                    <a:bodyPr/>
-                    <a:lstStyle/>
-                    <a:p>
-                      <a:pPr>
-                        <a:defRPr sz="1600" b="0">
-                          <a:solidFill>
-                            <a:srgbClr val="162A41"/>
-                          </a:solidFill>
-                          <a:latin typeface="Microsoft YaHei"/>
-                        </a:defRPr>
-                      </a:pPr>
-                      <a:r>
-                        <a:t>双源收缩</a:t>
-                      </a:r>
-                    </a:p>
-                  </a:txBody>
-                  <a:tcPr>
-                    <a:solidFill>
-                      <a:srgbClr val="EAF1F3"/>
-                    </a:solidFill>
-                  </a:tcPr>
-                </a:tc>
-                <a:tc>
-                  <a:txBody>
-                    <a:bodyPr/>
-                    <a:lstStyle/>
-                    <a:p>
-                      <a:pPr>
-                        <a:defRPr sz="1600" b="0">
-                          <a:solidFill>
-                            <a:srgbClr val="162A41"/>
-                          </a:solidFill>
-                          <a:latin typeface="Microsoft YaHei"/>
-                        </a:defRPr>
-                      </a:pPr>
-                      <a:r>
-                        <a:t>未下降</a:t>
-                      </a:r>
-                    </a:p>
-                  </a:txBody>
-                  <a:tcPr>
-                    <a:solidFill>
-                      <a:srgbClr val="EAF1F3"/>
-                    </a:solidFill>
-                  </a:tcPr>
-                </a:tc>
-              </a:tr>
-              <a:tr h="612648">
-                <a:tc>
-                  <a:txBody>
-                    <a:bodyPr/>
-                    <a:lstStyle/>
-                    <a:p>
-                      <a:pPr>
-                        <a:defRPr sz="1600" b="0">
-                          <a:solidFill>
-                            <a:srgbClr val="162A41"/>
-                          </a:solidFill>
-                          <a:latin typeface="Microsoft YaHei"/>
-                        </a:defRPr>
-                      </a:pPr>
-                      <a:r>
-                        <a:t>C#</a:t>
-                      </a:r>
-                    </a:p>
-                  </a:txBody>
-                  <a:tcPr>
-                    <a:solidFill>
-                      <a:srgbClr val="F8FAFB"/>
-                    </a:solidFill>
-                  </a:tcPr>
-                </a:tc>
-                <a:tc>
-                  <a:txBody>
-                    <a:bodyPr/>
-                    <a:lstStyle/>
-                    <a:p>
-                      <a:pPr>
-                        <a:defRPr sz="1600" b="0">
-                          <a:solidFill>
-                            <a:srgbClr val="162A41"/>
-                          </a:solidFill>
-                          <a:latin typeface="Microsoft YaHei"/>
-                        </a:defRPr>
-                      </a:pPr>
-                      <a:r>
-                        <a:t>警报</a:t>
-                      </a:r>
-                    </a:p>
-                  </a:txBody>
-                  <a:tcPr>
-                    <a:solidFill>
-                      <a:srgbClr val="F8FAFB"/>
-                    </a:solidFill>
-                  </a:tcPr>
-                </a:tc>
-                <a:tc>
-                  <a:txBody>
-                    <a:bodyPr/>
-                    <a:lstStyle/>
-                    <a:p>
-                      <a:pPr>
-                        <a:defRPr sz="1600" b="0">
-                          <a:solidFill>
-                            <a:srgbClr val="162A41"/>
-                          </a:solidFill>
-                          <a:latin typeface="Microsoft YaHei"/>
-                        </a:defRPr>
-                      </a:pPr>
-                      <a:r>
-                        <a:t>无</a:t>
-                      </a:r>
-                    </a:p>
-                  </a:txBody>
-                  <a:tcPr>
-                    <a:solidFill>
-                      <a:srgbClr val="F8FAFB"/>
-                    </a:solidFill>
-                  </a:tcPr>
-                </a:tc>
-                <a:tc>
-                  <a:txBody>
-                    <a:bodyPr/>
-                    <a:lstStyle/>
-                    <a:p>
-                      <a:pPr>
-                        <a:defRPr sz="1600" b="0">
-                          <a:solidFill>
-                            <a:srgbClr val="162A41"/>
-                          </a:solidFill>
-                          <a:latin typeface="Microsoft YaHei"/>
-                        </a:defRPr>
-                      </a:pPr>
-                      <a:r>
-                        <a:t>问卷单源警报</a:t>
-                      </a:r>
-                    </a:p>
-                  </a:txBody>
-                  <a:tcPr>
-                    <a:solidFill>
-                      <a:srgbClr val="F8FAFB"/>
-                    </a:solidFill>
-                  </a:tcPr>
-                </a:tc>
-                <a:tc>
-                  <a:txBody>
-                    <a:bodyPr/>
-                    <a:lstStyle/>
-                    <a:p>
-                      <a:pPr>
-                        <a:defRPr sz="1600" b="0">
-                          <a:solidFill>
-                            <a:srgbClr val="162A41"/>
-                          </a:solidFill>
-                          <a:latin typeface="Microsoft YaHei"/>
-                        </a:defRPr>
-                      </a:pPr>
-                      <a:r>
-                        <a:t>未下降</a:t>
-                      </a:r>
-                    </a:p>
-                  </a:txBody>
-                  <a:tcPr>
-                    <a:solidFill>
-                      <a:srgbClr val="F8FAFB"/>
-                    </a:solidFill>
-                  </a:tcPr>
-                </a:tc>
-              </a:tr>
-              <a:tr h="612648">
-                <a:tc>
-                  <a:txBody>
-                    <a:bodyPr/>
-                    <a:lstStyle/>
-                    <a:p>
-                      <a:pPr>
-                        <a:defRPr sz="1600" b="0">
-                          <a:solidFill>
-                            <a:srgbClr val="162A41"/>
-                          </a:solidFill>
-                          <a:latin typeface="Microsoft YaHei"/>
-                        </a:defRPr>
-                      </a:pPr>
-                      <a:r>
-                        <a:t>Redis</a:t>
-                      </a:r>
-                    </a:p>
-                  </a:txBody>
-                  <a:tcPr>
-                    <a:solidFill>
-                      <a:srgbClr val="EAF1F3"/>
-                    </a:solidFill>
-                  </a:tcPr>
-                </a:tc>
-                <a:tc>
-                  <a:txBody>
-                    <a:bodyPr/>
-                    <a:lstStyle/>
-                    <a:p>
-                      <a:pPr>
-                        <a:defRPr sz="1600" b="0">
-                          <a:solidFill>
-                            <a:srgbClr val="162A41"/>
-                          </a:solidFill>
-                          <a:latin typeface="Microsoft YaHei"/>
-                        </a:defRPr>
-                      </a:pPr>
-                      <a:r>
-                        <a:t>无</a:t>
-                      </a:r>
-                    </a:p>
-                  </a:txBody>
-                  <a:tcPr>
-                    <a:solidFill>
-                      <a:srgbClr val="EAF1F3"/>
-                    </a:solidFill>
-                  </a:tcPr>
-                </a:tc>
-                <a:tc>
-                  <a:txBody>
-                    <a:bodyPr/>
-                    <a:lstStyle/>
-                    <a:p>
-                      <a:pPr>
-                        <a:defRPr sz="1600" b="0">
-                          <a:solidFill>
-                            <a:srgbClr val="162A41"/>
-                          </a:solidFill>
-                          <a:latin typeface="Microsoft YaHei"/>
-                        </a:defRPr>
-                      </a:pPr>
-                      <a:r>
-                        <a:t>警报</a:t>
-                      </a:r>
-                    </a:p>
-                  </a:txBody>
-                  <a:tcPr>
-                    <a:solidFill>
-                      <a:srgbClr val="EAF1F3"/>
-                    </a:solidFill>
-                  </a:tcPr>
-                </a:tc>
-                <a:tc>
-                  <a:txBody>
-                    <a:bodyPr/>
-                    <a:lstStyle/>
-                    <a:p>
-                      <a:pPr>
-                        <a:defRPr sz="1600" b="0">
-                          <a:solidFill>
-                            <a:srgbClr val="162A41"/>
-                          </a:solidFill>
-                          <a:latin typeface="Microsoft YaHei"/>
-                        </a:defRPr>
-                      </a:pPr>
-                      <a:r>
-                        <a:t>评论单源警报</a:t>
-                      </a:r>
-                    </a:p>
-                  </a:txBody>
-                  <a:tcPr>
-                    <a:solidFill>
-                      <a:srgbClr val="EAF1F3"/>
-                    </a:solidFill>
-                  </a:tcPr>
-                </a:tc>
-                <a:tc>
-                  <a:txBody>
-                    <a:bodyPr/>
-                    <a:lstStyle/>
-                    <a:p>
-                      <a:pPr>
-                        <a:defRPr sz="1600" b="0">
-                          <a:solidFill>
-                            <a:srgbClr val="162A41"/>
-                          </a:solidFill>
-                          <a:latin typeface="Microsoft YaHei"/>
-                        </a:defRPr>
-                      </a:pPr>
-                      <a:r>
-                        <a:t>未下降</a:t>
-                      </a:r>
-                    </a:p>
-                  </a:txBody>
-                  <a:tcPr>
-                    <a:solidFill>
-                      <a:srgbClr val="EAF1F3"/>
-                    </a:solidFill>
-                  </a:tcPr>
-                </a:tc>
-              </a:tr>
-              <a:tr h="612648">
-                <a:tc>
-                  <a:txBody>
-                    <a:bodyPr/>
-                    <a:lstStyle/>
-                    <a:p>
-                      <a:pPr>
-                        <a:defRPr sz="1600" b="0">
-                          <a:solidFill>
-                            <a:srgbClr val="162A41"/>
-                          </a:solidFill>
-                          <a:latin typeface="Microsoft YaHei"/>
-                        </a:defRPr>
-                      </a:pPr>
-                      <a:r>
-                        <a:t>Express</a:t>
-                      </a:r>
-                    </a:p>
-                  </a:txBody>
-                  <a:tcPr>
-                    <a:solidFill>
-                      <a:srgbClr val="F8FAFB"/>
-                    </a:solidFill>
-                  </a:tcPr>
-                </a:tc>
-                <a:tc>
-                  <a:txBody>
-                    <a:bodyPr/>
-                    <a:lstStyle/>
-                    <a:p>
-                      <a:pPr>
-                        <a:defRPr sz="1600" b="0">
-                          <a:solidFill>
-                            <a:srgbClr val="162A41"/>
-                          </a:solidFill>
-                          <a:latin typeface="Microsoft YaHei"/>
-                        </a:defRPr>
-                      </a:pPr>
-                      <a:r>
-                        <a:t>警报</a:t>
-                      </a:r>
-                    </a:p>
-                  </a:txBody>
-                  <a:tcPr>
-                    <a:solidFill>
-                      <a:srgbClr val="F8FAFB"/>
-                    </a:solidFill>
-                  </a:tcPr>
-                </a:tc>
-                <a:tc>
-                  <a:txBody>
-                    <a:bodyPr/>
-                    <a:lstStyle/>
-                    <a:p>
-                      <a:pPr>
-                        <a:defRPr sz="1600" b="0">
-                          <a:solidFill>
-                            <a:srgbClr val="162A41"/>
-                          </a:solidFill>
-                          <a:latin typeface="Microsoft YaHei"/>
-                        </a:defRPr>
-                      </a:pPr>
-                      <a:r>
-                        <a:t>无</a:t>
-                      </a:r>
-                    </a:p>
-                  </a:txBody>
-                  <a:tcPr>
-                    <a:solidFill>
-                      <a:srgbClr val="F8FAFB"/>
-                    </a:solidFill>
-                  </a:tcPr>
-                </a:tc>
-                <a:tc>
-                  <a:txBody>
-                    <a:bodyPr/>
-                    <a:lstStyle/>
-                    <a:p>
-                      <a:pPr>
-                        <a:defRPr sz="1600" b="0">
-                          <a:solidFill>
-                            <a:srgbClr val="162A41"/>
-                          </a:solidFill>
-                          <a:latin typeface="Microsoft YaHei"/>
-                        </a:defRPr>
-                      </a:pPr>
-                      <a:r>
-                        <a:t>问卷单源警报</a:t>
-                      </a:r>
-                    </a:p>
-                  </a:txBody>
-                  <a:tcPr>
-                    <a:solidFill>
-                      <a:srgbClr val="F8FAFB"/>
-                    </a:solidFill>
-                  </a:tcPr>
-                </a:tc>
-                <a:tc>
-                  <a:txBody>
-                    <a:bodyPr/>
-                    <a:lstStyle/>
-                    <a:p>
-                      <a:pPr>
-                        <a:defRPr sz="1600" b="0">
-                          <a:solidFill>
-                            <a:srgbClr val="162A41"/>
-                          </a:solidFill>
-                          <a:latin typeface="Microsoft YaHei"/>
-                        </a:defRPr>
-                      </a:pPr>
-                      <a:r>
-                        <a:t>未下降</a:t>
+                        <a:defRPr sz="1500" b="0">
+                          <a:solidFill>
+                            <a:srgbClr val="162A41"/>
+                          </a:solidFill>
+                          <a:latin typeface="Microsoft YaHei"/>
+                        </a:defRPr>
+                      </a:pPr>
+                      <a:r>
+                        <a:t>正确未报</a:t>
                       </a:r>
                     </a:p>
                   </a:txBody>
@@ -11832,8 +12170,8 @@
         </p:nvSpPr>
         <p:spPr>
           <a:xfrm>
-            <a:off x="758952" y="5861304"/>
-            <a:ext cx="10515600" cy="420624"/>
+            <a:off x="749808" y="5797296"/>
+            <a:ext cx="10607040" cy="484632"/>
           </a:xfrm>
           <a:prstGeom prst="rect">
             <a:avLst/>
@@ -11850,7 +12188,7 @@
               <a:spcAft>
                 <a:spcPts val="1000"/>
               </a:spcAft>
-              <a:defRPr sz="1700" b="0">
+              <a:defRPr sz="1600" b="0">
                 <a:solidFill>
                   <a:srgbClr val="007E80"/>
                 </a:solidFill>
@@ -11858,7 +12196,7 @@
               </a:defRPr>
             </a:pPr>
             <a:r>
-              <a:t>本页仅示例决策过程；总体结论以全部记录的回测表为准。</a:t>
+              <a:t>分层示例并非随机样本；完整 59 条中：命中 7、误报 4、漏报 16、正确未报 32。</a:t>
             </a:r>
           </a:p>
         </p:txBody>
